--- a/presentation/bridge.pptx
+++ b/presentation/bridge.pptx
@@ -3159,6 +3159,9 @@
   <p:clrMapOvr>
     <a:masterClrMapping/>
   </p:clrMapOvr>
+  <p:transition spd="slow">
+    <p:fade/>
+  </p:transition>
 </p:sld>
 </file>
 
@@ -3505,7 +3508,7 @@
                 <a:ea typeface="Inter" pitchFamily="34" charset="-122"/>
                 <a:cs typeface="Inter" pitchFamily="34" charset="-120"/>
               </a:rPr>
-              <a:t> — User study with healthcare students measuring learning outcomes vs. traditional IPE formats. This is the credibility milestone.</a:t>
+              <a:t> — User study with healthcare students measuring outcomes vs. traditional IPE formats. This is the credibility milestone.</a:t>
             </a:r>
             <a:endParaRPr lang="en-US" sz="1500" dirty="0"/>
           </a:p>
@@ -3627,7 +3630,7 @@
                 <a:ea typeface="Inter" pitchFamily="34" charset="-122"/>
                 <a:cs typeface="Inter" pitchFamily="34" charset="-120"/>
               </a:rPr>
-              <a:t> — Extend beyond opioid education to diabetes management, pediatric emergency care, and other high-priority clinical domains. The admin case-creation workflow makes this frictionless.</a:t>
+              <a:t> — Extend beyond opioid education to diabetes management and other high-priority clinical domains.</a:t>
             </a:r>
             <a:endParaRPr lang="en-US" sz="1500" dirty="0"/>
           </a:p>
@@ -3849,6 +3852,801 @@
   <p:clrMapOvr>
     <a:masterClrMapping/>
   </p:clrMapOvr>
+  <p:transition>
+    <p:fade/>
+  </p:transition>
+  <p:timing>
+    <p:tnLst>
+      <p:par>
+        <p:cTn id="1" dur="indefinite" restart="never" nodeType="tmRoot">
+          <p:childTnLst>
+            <p:seq concurrent="1" nextAc="seek">
+              <p:cTn id="2" dur="indefinite" nodeType="mainSeq">
+                <p:childTnLst>
+                  <p:par>
+                    <p:cTn id="3" fill="hold">
+                      <p:stCondLst>
+                        <p:cond delay="indefinite"/>
+                      </p:stCondLst>
+                      <p:childTnLst>
+                        <p:par>
+                          <p:cTn id="4" fill="hold">
+                            <p:stCondLst>
+                              <p:cond delay="0"/>
+                            </p:stCondLst>
+                            <p:childTnLst>
+                              <p:par>
+                                <p:cTn id="5" presetID="53" presetClass="entr" presetSubtype="16" fill="hold" grpId="0" nodeType="clickEffect">
+                                  <p:stCondLst>
+                                    <p:cond delay="0"/>
+                                  </p:stCondLst>
+                                  <p:childTnLst>
+                                    <p:set>
+                                      <p:cBhvr>
+                                        <p:cTn id="6" dur="1" fill="hold">
+                                          <p:stCondLst>
+                                            <p:cond delay="0"/>
+                                          </p:stCondLst>
+                                        </p:cTn>
+                                        <p:tgtEl>
+                                          <p:spTgt spid="8"/>
+                                        </p:tgtEl>
+                                        <p:attrNameLst>
+                                          <p:attrName>style.visibility</p:attrName>
+                                        </p:attrNameLst>
+                                      </p:cBhvr>
+                                      <p:to>
+                                        <p:strVal val="visible"/>
+                                      </p:to>
+                                    </p:set>
+                                    <p:anim calcmode="lin" valueType="num">
+                                      <p:cBhvr>
+                                        <p:cTn id="7" dur="500" fill="hold"/>
+                                        <p:tgtEl>
+                                          <p:spTgt spid="8"/>
+                                        </p:tgtEl>
+                                        <p:attrNameLst>
+                                          <p:attrName>ppt_w</p:attrName>
+                                        </p:attrNameLst>
+                                      </p:cBhvr>
+                                      <p:tavLst>
+                                        <p:tav tm="0">
+                                          <p:val>
+                                            <p:fltVal val="0"/>
+                                          </p:val>
+                                        </p:tav>
+                                        <p:tav tm="100000">
+                                          <p:val>
+                                            <p:strVal val="#ppt_w"/>
+                                          </p:val>
+                                        </p:tav>
+                                      </p:tavLst>
+                                    </p:anim>
+                                    <p:anim calcmode="lin" valueType="num">
+                                      <p:cBhvr>
+                                        <p:cTn id="8" dur="500" fill="hold"/>
+                                        <p:tgtEl>
+                                          <p:spTgt spid="8"/>
+                                        </p:tgtEl>
+                                        <p:attrNameLst>
+                                          <p:attrName>ppt_h</p:attrName>
+                                        </p:attrNameLst>
+                                      </p:cBhvr>
+                                      <p:tavLst>
+                                        <p:tav tm="0">
+                                          <p:val>
+                                            <p:fltVal val="0"/>
+                                          </p:val>
+                                        </p:tav>
+                                        <p:tav tm="100000">
+                                          <p:val>
+                                            <p:strVal val="#ppt_h"/>
+                                          </p:val>
+                                        </p:tav>
+                                      </p:tavLst>
+                                    </p:anim>
+                                    <p:animEffect transition="in" filter="fade">
+                                      <p:cBhvr>
+                                        <p:cTn id="9" dur="500"/>
+                                        <p:tgtEl>
+                                          <p:spTgt spid="8"/>
+                                        </p:tgtEl>
+                                      </p:cBhvr>
+                                    </p:animEffect>
+                                  </p:childTnLst>
+                                </p:cTn>
+                              </p:par>
+                            </p:childTnLst>
+                          </p:cTn>
+                        </p:par>
+                      </p:childTnLst>
+                    </p:cTn>
+                  </p:par>
+                  <p:par>
+                    <p:cTn id="10" fill="hold">
+                      <p:stCondLst>
+                        <p:cond delay="indefinite"/>
+                      </p:stCondLst>
+                      <p:childTnLst>
+                        <p:par>
+                          <p:cTn id="11" fill="hold">
+                            <p:stCondLst>
+                              <p:cond delay="0"/>
+                            </p:stCondLst>
+                            <p:childTnLst>
+                              <p:par>
+                                <p:cTn id="12" presetID="53" presetClass="entr" presetSubtype="16" fill="hold" nodeType="clickEffect">
+                                  <p:stCondLst>
+                                    <p:cond delay="0"/>
+                                  </p:stCondLst>
+                                  <p:childTnLst>
+                                    <p:set>
+                                      <p:cBhvr>
+                                        <p:cTn id="13" dur="1" fill="hold">
+                                          <p:stCondLst>
+                                            <p:cond delay="0"/>
+                                          </p:stCondLst>
+                                        </p:cTn>
+                                        <p:tgtEl>
+                                          <p:spTgt spid="9">
+                                            <p:txEl>
+                                              <p:pRg st="0" end="0"/>
+                                            </p:txEl>
+                                          </p:spTgt>
+                                        </p:tgtEl>
+                                        <p:attrNameLst>
+                                          <p:attrName>style.visibility</p:attrName>
+                                        </p:attrNameLst>
+                                      </p:cBhvr>
+                                      <p:to>
+                                        <p:strVal val="visible"/>
+                                      </p:to>
+                                    </p:set>
+                                    <p:anim calcmode="lin" valueType="num">
+                                      <p:cBhvr>
+                                        <p:cTn id="14" dur="500" fill="hold"/>
+                                        <p:tgtEl>
+                                          <p:spTgt spid="9">
+                                            <p:txEl>
+                                              <p:pRg st="0" end="0"/>
+                                            </p:txEl>
+                                          </p:spTgt>
+                                        </p:tgtEl>
+                                        <p:attrNameLst>
+                                          <p:attrName>ppt_w</p:attrName>
+                                        </p:attrNameLst>
+                                      </p:cBhvr>
+                                      <p:tavLst>
+                                        <p:tav tm="0">
+                                          <p:val>
+                                            <p:fltVal val="0"/>
+                                          </p:val>
+                                        </p:tav>
+                                        <p:tav tm="100000">
+                                          <p:val>
+                                            <p:strVal val="#ppt_w"/>
+                                          </p:val>
+                                        </p:tav>
+                                      </p:tavLst>
+                                    </p:anim>
+                                    <p:anim calcmode="lin" valueType="num">
+                                      <p:cBhvr>
+                                        <p:cTn id="15" dur="500" fill="hold"/>
+                                        <p:tgtEl>
+                                          <p:spTgt spid="9">
+                                            <p:txEl>
+                                              <p:pRg st="0" end="0"/>
+                                            </p:txEl>
+                                          </p:spTgt>
+                                        </p:tgtEl>
+                                        <p:attrNameLst>
+                                          <p:attrName>ppt_h</p:attrName>
+                                        </p:attrNameLst>
+                                      </p:cBhvr>
+                                      <p:tavLst>
+                                        <p:tav tm="0">
+                                          <p:val>
+                                            <p:fltVal val="0"/>
+                                          </p:val>
+                                        </p:tav>
+                                        <p:tav tm="100000">
+                                          <p:val>
+                                            <p:strVal val="#ppt_h"/>
+                                          </p:val>
+                                        </p:tav>
+                                      </p:tavLst>
+                                    </p:anim>
+                                    <p:animEffect transition="in" filter="fade">
+                                      <p:cBhvr>
+                                        <p:cTn id="16" dur="500"/>
+                                        <p:tgtEl>
+                                          <p:spTgt spid="9">
+                                            <p:txEl>
+                                              <p:pRg st="0" end="0"/>
+                                            </p:txEl>
+                                          </p:spTgt>
+                                        </p:tgtEl>
+                                      </p:cBhvr>
+                                    </p:animEffect>
+                                  </p:childTnLst>
+                                </p:cTn>
+                              </p:par>
+                            </p:childTnLst>
+                          </p:cTn>
+                        </p:par>
+                      </p:childTnLst>
+                    </p:cTn>
+                  </p:par>
+                  <p:par>
+                    <p:cTn id="17" fill="hold">
+                      <p:stCondLst>
+                        <p:cond delay="indefinite"/>
+                      </p:stCondLst>
+                      <p:childTnLst>
+                        <p:par>
+                          <p:cTn id="18" fill="hold">
+                            <p:stCondLst>
+                              <p:cond delay="0"/>
+                            </p:stCondLst>
+                            <p:childTnLst>
+                              <p:par>
+                                <p:cTn id="19" presetID="53" presetClass="entr" presetSubtype="16" fill="hold" grpId="0" nodeType="clickEffect">
+                                  <p:stCondLst>
+                                    <p:cond delay="0"/>
+                                  </p:stCondLst>
+                                  <p:childTnLst>
+                                    <p:set>
+                                      <p:cBhvr>
+                                        <p:cTn id="20" dur="1" fill="hold">
+                                          <p:stCondLst>
+                                            <p:cond delay="0"/>
+                                          </p:stCondLst>
+                                        </p:cTn>
+                                        <p:tgtEl>
+                                          <p:spTgt spid="11"/>
+                                        </p:tgtEl>
+                                        <p:attrNameLst>
+                                          <p:attrName>style.visibility</p:attrName>
+                                        </p:attrNameLst>
+                                      </p:cBhvr>
+                                      <p:to>
+                                        <p:strVal val="visible"/>
+                                      </p:to>
+                                    </p:set>
+                                    <p:anim calcmode="lin" valueType="num">
+                                      <p:cBhvr>
+                                        <p:cTn id="21" dur="500" fill="hold"/>
+                                        <p:tgtEl>
+                                          <p:spTgt spid="11"/>
+                                        </p:tgtEl>
+                                        <p:attrNameLst>
+                                          <p:attrName>ppt_w</p:attrName>
+                                        </p:attrNameLst>
+                                      </p:cBhvr>
+                                      <p:tavLst>
+                                        <p:tav tm="0">
+                                          <p:val>
+                                            <p:fltVal val="0"/>
+                                          </p:val>
+                                        </p:tav>
+                                        <p:tav tm="100000">
+                                          <p:val>
+                                            <p:strVal val="#ppt_w"/>
+                                          </p:val>
+                                        </p:tav>
+                                      </p:tavLst>
+                                    </p:anim>
+                                    <p:anim calcmode="lin" valueType="num">
+                                      <p:cBhvr>
+                                        <p:cTn id="22" dur="500" fill="hold"/>
+                                        <p:tgtEl>
+                                          <p:spTgt spid="11"/>
+                                        </p:tgtEl>
+                                        <p:attrNameLst>
+                                          <p:attrName>ppt_h</p:attrName>
+                                        </p:attrNameLst>
+                                      </p:cBhvr>
+                                      <p:tavLst>
+                                        <p:tav tm="0">
+                                          <p:val>
+                                            <p:fltVal val="0"/>
+                                          </p:val>
+                                        </p:tav>
+                                        <p:tav tm="100000">
+                                          <p:val>
+                                            <p:strVal val="#ppt_h"/>
+                                          </p:val>
+                                        </p:tav>
+                                      </p:tavLst>
+                                    </p:anim>
+                                    <p:animEffect transition="in" filter="fade">
+                                      <p:cBhvr>
+                                        <p:cTn id="23" dur="500"/>
+                                        <p:tgtEl>
+                                          <p:spTgt spid="11"/>
+                                        </p:tgtEl>
+                                      </p:cBhvr>
+                                    </p:animEffect>
+                                  </p:childTnLst>
+                                </p:cTn>
+                              </p:par>
+                            </p:childTnLst>
+                          </p:cTn>
+                        </p:par>
+                      </p:childTnLst>
+                    </p:cTn>
+                  </p:par>
+                  <p:par>
+                    <p:cTn id="24" fill="hold">
+                      <p:stCondLst>
+                        <p:cond delay="indefinite"/>
+                      </p:stCondLst>
+                      <p:childTnLst>
+                        <p:par>
+                          <p:cTn id="25" fill="hold">
+                            <p:stCondLst>
+                              <p:cond delay="0"/>
+                            </p:stCondLst>
+                            <p:childTnLst>
+                              <p:par>
+                                <p:cTn id="26" presetID="53" presetClass="entr" presetSubtype="16" fill="hold" nodeType="clickEffect">
+                                  <p:stCondLst>
+                                    <p:cond delay="0"/>
+                                  </p:stCondLst>
+                                  <p:childTnLst>
+                                    <p:set>
+                                      <p:cBhvr>
+                                        <p:cTn id="27" dur="1" fill="hold">
+                                          <p:stCondLst>
+                                            <p:cond delay="0"/>
+                                          </p:stCondLst>
+                                        </p:cTn>
+                                        <p:tgtEl>
+                                          <p:spTgt spid="12">
+                                            <p:txEl>
+                                              <p:pRg st="0" end="0"/>
+                                            </p:txEl>
+                                          </p:spTgt>
+                                        </p:tgtEl>
+                                        <p:attrNameLst>
+                                          <p:attrName>style.visibility</p:attrName>
+                                        </p:attrNameLst>
+                                      </p:cBhvr>
+                                      <p:to>
+                                        <p:strVal val="visible"/>
+                                      </p:to>
+                                    </p:set>
+                                    <p:anim calcmode="lin" valueType="num">
+                                      <p:cBhvr>
+                                        <p:cTn id="28" dur="500" fill="hold"/>
+                                        <p:tgtEl>
+                                          <p:spTgt spid="12">
+                                            <p:txEl>
+                                              <p:pRg st="0" end="0"/>
+                                            </p:txEl>
+                                          </p:spTgt>
+                                        </p:tgtEl>
+                                        <p:attrNameLst>
+                                          <p:attrName>ppt_w</p:attrName>
+                                        </p:attrNameLst>
+                                      </p:cBhvr>
+                                      <p:tavLst>
+                                        <p:tav tm="0">
+                                          <p:val>
+                                            <p:fltVal val="0"/>
+                                          </p:val>
+                                        </p:tav>
+                                        <p:tav tm="100000">
+                                          <p:val>
+                                            <p:strVal val="#ppt_w"/>
+                                          </p:val>
+                                        </p:tav>
+                                      </p:tavLst>
+                                    </p:anim>
+                                    <p:anim calcmode="lin" valueType="num">
+                                      <p:cBhvr>
+                                        <p:cTn id="29" dur="500" fill="hold"/>
+                                        <p:tgtEl>
+                                          <p:spTgt spid="12">
+                                            <p:txEl>
+                                              <p:pRg st="0" end="0"/>
+                                            </p:txEl>
+                                          </p:spTgt>
+                                        </p:tgtEl>
+                                        <p:attrNameLst>
+                                          <p:attrName>ppt_h</p:attrName>
+                                        </p:attrNameLst>
+                                      </p:cBhvr>
+                                      <p:tavLst>
+                                        <p:tav tm="0">
+                                          <p:val>
+                                            <p:fltVal val="0"/>
+                                          </p:val>
+                                        </p:tav>
+                                        <p:tav tm="100000">
+                                          <p:val>
+                                            <p:strVal val="#ppt_h"/>
+                                          </p:val>
+                                        </p:tav>
+                                      </p:tavLst>
+                                    </p:anim>
+                                    <p:animEffect transition="in" filter="fade">
+                                      <p:cBhvr>
+                                        <p:cTn id="30" dur="500"/>
+                                        <p:tgtEl>
+                                          <p:spTgt spid="12">
+                                            <p:txEl>
+                                              <p:pRg st="0" end="0"/>
+                                            </p:txEl>
+                                          </p:spTgt>
+                                        </p:tgtEl>
+                                      </p:cBhvr>
+                                    </p:animEffect>
+                                  </p:childTnLst>
+                                </p:cTn>
+                              </p:par>
+                            </p:childTnLst>
+                          </p:cTn>
+                        </p:par>
+                      </p:childTnLst>
+                    </p:cTn>
+                  </p:par>
+                  <p:par>
+                    <p:cTn id="31" fill="hold">
+                      <p:stCondLst>
+                        <p:cond delay="indefinite"/>
+                      </p:stCondLst>
+                      <p:childTnLst>
+                        <p:par>
+                          <p:cTn id="32" fill="hold">
+                            <p:stCondLst>
+                              <p:cond delay="0"/>
+                            </p:stCondLst>
+                            <p:childTnLst>
+                              <p:par>
+                                <p:cTn id="33" presetID="53" presetClass="entr" presetSubtype="16" fill="hold" grpId="0" nodeType="clickEffect">
+                                  <p:stCondLst>
+                                    <p:cond delay="0"/>
+                                  </p:stCondLst>
+                                  <p:childTnLst>
+                                    <p:set>
+                                      <p:cBhvr>
+                                        <p:cTn id="34" dur="1" fill="hold">
+                                          <p:stCondLst>
+                                            <p:cond delay="0"/>
+                                          </p:stCondLst>
+                                        </p:cTn>
+                                        <p:tgtEl>
+                                          <p:spTgt spid="14"/>
+                                        </p:tgtEl>
+                                        <p:attrNameLst>
+                                          <p:attrName>style.visibility</p:attrName>
+                                        </p:attrNameLst>
+                                      </p:cBhvr>
+                                      <p:to>
+                                        <p:strVal val="visible"/>
+                                      </p:to>
+                                    </p:set>
+                                    <p:anim calcmode="lin" valueType="num">
+                                      <p:cBhvr>
+                                        <p:cTn id="35" dur="500" fill="hold"/>
+                                        <p:tgtEl>
+                                          <p:spTgt spid="14"/>
+                                        </p:tgtEl>
+                                        <p:attrNameLst>
+                                          <p:attrName>ppt_w</p:attrName>
+                                        </p:attrNameLst>
+                                      </p:cBhvr>
+                                      <p:tavLst>
+                                        <p:tav tm="0">
+                                          <p:val>
+                                            <p:fltVal val="0"/>
+                                          </p:val>
+                                        </p:tav>
+                                        <p:tav tm="100000">
+                                          <p:val>
+                                            <p:strVal val="#ppt_w"/>
+                                          </p:val>
+                                        </p:tav>
+                                      </p:tavLst>
+                                    </p:anim>
+                                    <p:anim calcmode="lin" valueType="num">
+                                      <p:cBhvr>
+                                        <p:cTn id="36" dur="500" fill="hold"/>
+                                        <p:tgtEl>
+                                          <p:spTgt spid="14"/>
+                                        </p:tgtEl>
+                                        <p:attrNameLst>
+                                          <p:attrName>ppt_h</p:attrName>
+                                        </p:attrNameLst>
+                                      </p:cBhvr>
+                                      <p:tavLst>
+                                        <p:tav tm="0">
+                                          <p:val>
+                                            <p:fltVal val="0"/>
+                                          </p:val>
+                                        </p:tav>
+                                        <p:tav tm="100000">
+                                          <p:val>
+                                            <p:strVal val="#ppt_h"/>
+                                          </p:val>
+                                        </p:tav>
+                                      </p:tavLst>
+                                    </p:anim>
+                                    <p:animEffect transition="in" filter="fade">
+                                      <p:cBhvr>
+                                        <p:cTn id="37" dur="500"/>
+                                        <p:tgtEl>
+                                          <p:spTgt spid="14"/>
+                                        </p:tgtEl>
+                                      </p:cBhvr>
+                                    </p:animEffect>
+                                  </p:childTnLst>
+                                </p:cTn>
+                              </p:par>
+                            </p:childTnLst>
+                          </p:cTn>
+                        </p:par>
+                      </p:childTnLst>
+                    </p:cTn>
+                  </p:par>
+                  <p:par>
+                    <p:cTn id="38" fill="hold">
+                      <p:stCondLst>
+                        <p:cond delay="indefinite"/>
+                      </p:stCondLst>
+                      <p:childTnLst>
+                        <p:par>
+                          <p:cTn id="39" fill="hold">
+                            <p:stCondLst>
+                              <p:cond delay="0"/>
+                            </p:stCondLst>
+                            <p:childTnLst>
+                              <p:par>
+                                <p:cTn id="40" presetID="53" presetClass="entr" presetSubtype="16" fill="hold" nodeType="clickEffect">
+                                  <p:stCondLst>
+                                    <p:cond delay="0"/>
+                                  </p:stCondLst>
+                                  <p:childTnLst>
+                                    <p:set>
+                                      <p:cBhvr>
+                                        <p:cTn id="41" dur="1" fill="hold">
+                                          <p:stCondLst>
+                                            <p:cond delay="0"/>
+                                          </p:stCondLst>
+                                        </p:cTn>
+                                        <p:tgtEl>
+                                          <p:spTgt spid="15">
+                                            <p:txEl>
+                                              <p:pRg st="0" end="0"/>
+                                            </p:txEl>
+                                          </p:spTgt>
+                                        </p:tgtEl>
+                                        <p:attrNameLst>
+                                          <p:attrName>style.visibility</p:attrName>
+                                        </p:attrNameLst>
+                                      </p:cBhvr>
+                                      <p:to>
+                                        <p:strVal val="visible"/>
+                                      </p:to>
+                                    </p:set>
+                                    <p:anim calcmode="lin" valueType="num">
+                                      <p:cBhvr>
+                                        <p:cTn id="42" dur="500" fill="hold"/>
+                                        <p:tgtEl>
+                                          <p:spTgt spid="15">
+                                            <p:txEl>
+                                              <p:pRg st="0" end="0"/>
+                                            </p:txEl>
+                                          </p:spTgt>
+                                        </p:tgtEl>
+                                        <p:attrNameLst>
+                                          <p:attrName>ppt_w</p:attrName>
+                                        </p:attrNameLst>
+                                      </p:cBhvr>
+                                      <p:tavLst>
+                                        <p:tav tm="0">
+                                          <p:val>
+                                            <p:fltVal val="0"/>
+                                          </p:val>
+                                        </p:tav>
+                                        <p:tav tm="100000">
+                                          <p:val>
+                                            <p:strVal val="#ppt_w"/>
+                                          </p:val>
+                                        </p:tav>
+                                      </p:tavLst>
+                                    </p:anim>
+                                    <p:anim calcmode="lin" valueType="num">
+                                      <p:cBhvr>
+                                        <p:cTn id="43" dur="500" fill="hold"/>
+                                        <p:tgtEl>
+                                          <p:spTgt spid="15">
+                                            <p:txEl>
+                                              <p:pRg st="0" end="0"/>
+                                            </p:txEl>
+                                          </p:spTgt>
+                                        </p:tgtEl>
+                                        <p:attrNameLst>
+                                          <p:attrName>ppt_h</p:attrName>
+                                        </p:attrNameLst>
+                                      </p:cBhvr>
+                                      <p:tavLst>
+                                        <p:tav tm="0">
+                                          <p:val>
+                                            <p:fltVal val="0"/>
+                                          </p:val>
+                                        </p:tav>
+                                        <p:tav tm="100000">
+                                          <p:val>
+                                            <p:strVal val="#ppt_h"/>
+                                          </p:val>
+                                        </p:tav>
+                                      </p:tavLst>
+                                    </p:anim>
+                                    <p:animEffect transition="in" filter="fade">
+                                      <p:cBhvr>
+                                        <p:cTn id="44" dur="500"/>
+                                        <p:tgtEl>
+                                          <p:spTgt spid="15">
+                                            <p:txEl>
+                                              <p:pRg st="0" end="0"/>
+                                            </p:txEl>
+                                          </p:spTgt>
+                                        </p:tgtEl>
+                                      </p:cBhvr>
+                                    </p:animEffect>
+                                  </p:childTnLst>
+                                </p:cTn>
+                              </p:par>
+                            </p:childTnLst>
+                          </p:cTn>
+                        </p:par>
+                      </p:childTnLst>
+                    </p:cTn>
+                  </p:par>
+                  <p:par>
+                    <p:cTn id="45" fill="hold">
+                      <p:stCondLst>
+                        <p:cond delay="indefinite"/>
+                      </p:stCondLst>
+                      <p:childTnLst>
+                        <p:par>
+                          <p:cTn id="46" fill="hold">
+                            <p:stCondLst>
+                              <p:cond delay="0"/>
+                            </p:stCondLst>
+                            <p:childTnLst>
+                              <p:par>
+                                <p:cTn id="47" presetID="53" presetClass="entr" presetSubtype="16" fill="hold" nodeType="clickEffect">
+                                  <p:stCondLst>
+                                    <p:cond delay="0"/>
+                                  </p:stCondLst>
+                                  <p:childTnLst>
+                                    <p:set>
+                                      <p:cBhvr>
+                                        <p:cTn id="48" dur="1" fill="hold">
+                                          <p:stCondLst>
+                                            <p:cond delay="0"/>
+                                          </p:stCondLst>
+                                        </p:cTn>
+                                        <p:tgtEl>
+                                          <p:spTgt spid="16">
+                                            <p:txEl>
+                                              <p:pRg st="0" end="0"/>
+                                            </p:txEl>
+                                          </p:spTgt>
+                                        </p:tgtEl>
+                                        <p:attrNameLst>
+                                          <p:attrName>style.visibility</p:attrName>
+                                        </p:attrNameLst>
+                                      </p:cBhvr>
+                                      <p:to>
+                                        <p:strVal val="visible"/>
+                                      </p:to>
+                                    </p:set>
+                                    <p:anim calcmode="lin" valueType="num">
+                                      <p:cBhvr>
+                                        <p:cTn id="49" dur="500" fill="hold"/>
+                                        <p:tgtEl>
+                                          <p:spTgt spid="16">
+                                            <p:txEl>
+                                              <p:pRg st="0" end="0"/>
+                                            </p:txEl>
+                                          </p:spTgt>
+                                        </p:tgtEl>
+                                        <p:attrNameLst>
+                                          <p:attrName>ppt_w</p:attrName>
+                                        </p:attrNameLst>
+                                      </p:cBhvr>
+                                      <p:tavLst>
+                                        <p:tav tm="0">
+                                          <p:val>
+                                            <p:fltVal val="0"/>
+                                          </p:val>
+                                        </p:tav>
+                                        <p:tav tm="100000">
+                                          <p:val>
+                                            <p:strVal val="#ppt_w"/>
+                                          </p:val>
+                                        </p:tav>
+                                      </p:tavLst>
+                                    </p:anim>
+                                    <p:anim calcmode="lin" valueType="num">
+                                      <p:cBhvr>
+                                        <p:cTn id="50" dur="500" fill="hold"/>
+                                        <p:tgtEl>
+                                          <p:spTgt spid="16">
+                                            <p:txEl>
+                                              <p:pRg st="0" end="0"/>
+                                            </p:txEl>
+                                          </p:spTgt>
+                                        </p:tgtEl>
+                                        <p:attrNameLst>
+                                          <p:attrName>ppt_h</p:attrName>
+                                        </p:attrNameLst>
+                                      </p:cBhvr>
+                                      <p:tavLst>
+                                        <p:tav tm="0">
+                                          <p:val>
+                                            <p:fltVal val="0"/>
+                                          </p:val>
+                                        </p:tav>
+                                        <p:tav tm="100000">
+                                          <p:val>
+                                            <p:strVal val="#ppt_h"/>
+                                          </p:val>
+                                        </p:tav>
+                                      </p:tavLst>
+                                    </p:anim>
+                                    <p:animEffect transition="in" filter="fade">
+                                      <p:cBhvr>
+                                        <p:cTn id="51" dur="500"/>
+                                        <p:tgtEl>
+                                          <p:spTgt spid="16">
+                                            <p:txEl>
+                                              <p:pRg st="0" end="0"/>
+                                            </p:txEl>
+                                          </p:spTgt>
+                                        </p:tgtEl>
+                                      </p:cBhvr>
+                                    </p:animEffect>
+                                  </p:childTnLst>
+                                </p:cTn>
+                              </p:par>
+                            </p:childTnLst>
+                          </p:cTn>
+                        </p:par>
+                      </p:childTnLst>
+                    </p:cTn>
+                  </p:par>
+                </p:childTnLst>
+              </p:cTn>
+              <p:prevCondLst>
+                <p:cond evt="onPrev" delay="0">
+                  <p:tgtEl>
+                    <p:sldTgt/>
+                  </p:tgtEl>
+                </p:cond>
+              </p:prevCondLst>
+              <p:nextCondLst>
+                <p:cond evt="onNext" delay="0">
+                  <p:tgtEl>
+                    <p:sldTgt/>
+                  </p:tgtEl>
+                </p:cond>
+              </p:nextCondLst>
+            </p:seq>
+          </p:childTnLst>
+        </p:cTn>
+      </p:par>
+    </p:tnLst>
+    <p:bldLst>
+      <p:bldP spid="8" grpId="0" animBg="1"/>
+      <p:bldP spid="11" grpId="0" animBg="1"/>
+      <p:bldP spid="14" grpId="0" animBg="1"/>
+    </p:bldLst>
+  </p:timing>
 </p:sld>
 </file>
 
@@ -4130,6 +4928,7 @@
                 <a:latin typeface="Inter Bold" pitchFamily="34" charset="0"/>
                 <a:ea typeface="Inter Bold" pitchFamily="34" charset="-122"/>
                 <a:cs typeface="Inter Bold" pitchFamily="34" charset="-120"/>
+                <a:hlinkClick r:id="rId3"/>
               </a:rPr>
               <a:t>http://35.169.252.108:8080/</a:t>
             </a:r>
@@ -4224,27 +5023,6 @@
                 <a:ea typeface="Inter" pitchFamily="34" charset="-122"/>
                 <a:cs typeface="Inter" pitchFamily="34" charset="-120"/>
               </a:rPr>
-              <a:t>Get six evidence-grounded perspectives instantly</a:t>
-            </a:r>
-            <a:endParaRPr lang="en-US" sz="1700" dirty="0"/>
-          </a:p>
-          <a:p>
-            <a:pPr marL="342900" indent="-342900" algn="l">
-              <a:lnSpc>
-                <a:spcPts val="2650"/>
-              </a:lnSpc>
-              <a:buSzPct val="100000"/>
-              <a:buChar char="•"/>
-            </a:pPr>
-            <a:r>
-              <a:rPr lang="en-US" sz="1700" dirty="0">
-                <a:solidFill>
-                  <a:srgbClr val="272525"/>
-                </a:solidFill>
-                <a:latin typeface="Inter" pitchFamily="34" charset="0"/>
-                <a:ea typeface="Inter" pitchFamily="34" charset="-122"/>
-                <a:cs typeface="Inter" pitchFamily="34" charset="-120"/>
-              </a:rPr>
               <a:t>See how different professionals approach the same case</a:t>
             </a:r>
             <a:endParaRPr lang="en-US" sz="1700" dirty="0"/>
@@ -4324,6 +5102,9 @@
   <p:clrMapOvr>
     <a:masterClrMapping/>
   </p:clrMapOvr>
+  <p:transition>
+    <p:fade/>
+  </p:transition>
 </p:sld>
 </file>
 
@@ -4528,6 +5309,9 @@
   <p:clrMapOvr>
     <a:masterClrMapping/>
   </p:clrMapOvr>
+  <p:transition>
+    <p:fade/>
+  </p:transition>
 </p:sld>
 </file>
 
@@ -4768,6 +5552,9 @@
   <p:clrMapOvr>
     <a:masterClrMapping/>
   </p:clrMapOvr>
+  <p:transition>
+    <p:fade/>
+  </p:transition>
 </p:sld>
 </file>
 
@@ -5298,7 +6085,7 @@
                 <a:ea typeface="Inter" pitchFamily="34" charset="-122"/>
                 <a:cs typeface="Inter" pitchFamily="34" charset="-120"/>
               </a:rPr>
-              <a:t>Imagine a student asks "What's the naloxone dose for Julia?" and the AI confidently answers wrong.</a:t>
+              <a:t>Imagine a student asking, "What's the naloxone dose for Julia?" and the AI confidently answers wrong.</a:t>
             </a:r>
             <a:endParaRPr lang="en-US" sz="1350" dirty="0"/>
           </a:p>
@@ -5469,6 +6256,1458 @@
   <p:clrMapOvr>
     <a:masterClrMapping/>
   </p:clrMapOvr>
+  <p:transition>
+    <p:fade/>
+  </p:transition>
+  <p:timing>
+    <p:tnLst>
+      <p:par>
+        <p:cTn id="1" dur="indefinite" restart="never" nodeType="tmRoot">
+          <p:childTnLst>
+            <p:seq concurrent="1" nextAc="seek">
+              <p:cTn id="2" dur="indefinite" nodeType="mainSeq">
+                <p:childTnLst>
+                  <p:par>
+                    <p:cTn id="3" fill="hold">
+                      <p:stCondLst>
+                        <p:cond delay="indefinite"/>
+                      </p:stCondLst>
+                      <p:childTnLst>
+                        <p:par>
+                          <p:cTn id="4" fill="hold">
+                            <p:stCondLst>
+                              <p:cond delay="0"/>
+                            </p:stCondLst>
+                            <p:childTnLst>
+                              <p:par>
+                                <p:cTn id="5" presetID="53" presetClass="entr" presetSubtype="16" fill="hold" nodeType="clickEffect">
+                                  <p:stCondLst>
+                                    <p:cond delay="0"/>
+                                  </p:stCondLst>
+                                  <p:childTnLst>
+                                    <p:set>
+                                      <p:cBhvr>
+                                        <p:cTn id="6" dur="1" fill="hold">
+                                          <p:stCondLst>
+                                            <p:cond delay="0"/>
+                                          </p:stCondLst>
+                                        </p:cTn>
+                                        <p:tgtEl>
+                                          <p:spTgt spid="6">
+                                            <p:txEl>
+                                              <p:pRg st="0" end="0"/>
+                                            </p:txEl>
+                                          </p:spTgt>
+                                        </p:tgtEl>
+                                        <p:attrNameLst>
+                                          <p:attrName>style.visibility</p:attrName>
+                                        </p:attrNameLst>
+                                      </p:cBhvr>
+                                      <p:to>
+                                        <p:strVal val="visible"/>
+                                      </p:to>
+                                    </p:set>
+                                    <p:anim calcmode="lin" valueType="num">
+                                      <p:cBhvr>
+                                        <p:cTn id="7" dur="500" fill="hold"/>
+                                        <p:tgtEl>
+                                          <p:spTgt spid="6">
+                                            <p:txEl>
+                                              <p:pRg st="0" end="0"/>
+                                            </p:txEl>
+                                          </p:spTgt>
+                                        </p:tgtEl>
+                                        <p:attrNameLst>
+                                          <p:attrName>ppt_w</p:attrName>
+                                        </p:attrNameLst>
+                                      </p:cBhvr>
+                                      <p:tavLst>
+                                        <p:tav tm="0">
+                                          <p:val>
+                                            <p:fltVal val="0"/>
+                                          </p:val>
+                                        </p:tav>
+                                        <p:tav tm="100000">
+                                          <p:val>
+                                            <p:strVal val="#ppt_w"/>
+                                          </p:val>
+                                        </p:tav>
+                                      </p:tavLst>
+                                    </p:anim>
+                                    <p:anim calcmode="lin" valueType="num">
+                                      <p:cBhvr>
+                                        <p:cTn id="8" dur="500" fill="hold"/>
+                                        <p:tgtEl>
+                                          <p:spTgt spid="6">
+                                            <p:txEl>
+                                              <p:pRg st="0" end="0"/>
+                                            </p:txEl>
+                                          </p:spTgt>
+                                        </p:tgtEl>
+                                        <p:attrNameLst>
+                                          <p:attrName>ppt_h</p:attrName>
+                                        </p:attrNameLst>
+                                      </p:cBhvr>
+                                      <p:tavLst>
+                                        <p:tav tm="0">
+                                          <p:val>
+                                            <p:fltVal val="0"/>
+                                          </p:val>
+                                        </p:tav>
+                                        <p:tav tm="100000">
+                                          <p:val>
+                                            <p:strVal val="#ppt_h"/>
+                                          </p:val>
+                                        </p:tav>
+                                      </p:tavLst>
+                                    </p:anim>
+                                    <p:animEffect transition="in" filter="fade">
+                                      <p:cBhvr>
+                                        <p:cTn id="9" dur="500"/>
+                                        <p:tgtEl>
+                                          <p:spTgt spid="6">
+                                            <p:txEl>
+                                              <p:pRg st="0" end="0"/>
+                                            </p:txEl>
+                                          </p:spTgt>
+                                        </p:tgtEl>
+                                      </p:cBhvr>
+                                    </p:animEffect>
+                                  </p:childTnLst>
+                                </p:cTn>
+                              </p:par>
+                            </p:childTnLst>
+                          </p:cTn>
+                        </p:par>
+                      </p:childTnLst>
+                    </p:cTn>
+                  </p:par>
+                  <p:par>
+                    <p:cTn id="10" fill="hold">
+                      <p:stCondLst>
+                        <p:cond delay="indefinite"/>
+                      </p:stCondLst>
+                      <p:childTnLst>
+                        <p:par>
+                          <p:cTn id="11" fill="hold">
+                            <p:stCondLst>
+                              <p:cond delay="0"/>
+                            </p:stCondLst>
+                            <p:childTnLst>
+                              <p:par>
+                                <p:cTn id="12" presetID="53" presetClass="entr" presetSubtype="16" fill="hold" grpId="0" nodeType="clickEffect">
+                                  <p:stCondLst>
+                                    <p:cond delay="0"/>
+                                  </p:stCondLst>
+                                  <p:childTnLst>
+                                    <p:set>
+                                      <p:cBhvr>
+                                        <p:cTn id="13" dur="1" fill="hold">
+                                          <p:stCondLst>
+                                            <p:cond delay="0"/>
+                                          </p:stCondLst>
+                                        </p:cTn>
+                                        <p:tgtEl>
+                                          <p:spTgt spid="7"/>
+                                        </p:tgtEl>
+                                        <p:attrNameLst>
+                                          <p:attrName>style.visibility</p:attrName>
+                                        </p:attrNameLst>
+                                      </p:cBhvr>
+                                      <p:to>
+                                        <p:strVal val="visible"/>
+                                      </p:to>
+                                    </p:set>
+                                    <p:anim calcmode="lin" valueType="num">
+                                      <p:cBhvr>
+                                        <p:cTn id="14" dur="500" fill="hold"/>
+                                        <p:tgtEl>
+                                          <p:spTgt spid="7"/>
+                                        </p:tgtEl>
+                                        <p:attrNameLst>
+                                          <p:attrName>ppt_w</p:attrName>
+                                        </p:attrNameLst>
+                                      </p:cBhvr>
+                                      <p:tavLst>
+                                        <p:tav tm="0">
+                                          <p:val>
+                                            <p:fltVal val="0"/>
+                                          </p:val>
+                                        </p:tav>
+                                        <p:tav tm="100000">
+                                          <p:val>
+                                            <p:strVal val="#ppt_w"/>
+                                          </p:val>
+                                        </p:tav>
+                                      </p:tavLst>
+                                    </p:anim>
+                                    <p:anim calcmode="lin" valueType="num">
+                                      <p:cBhvr>
+                                        <p:cTn id="15" dur="500" fill="hold"/>
+                                        <p:tgtEl>
+                                          <p:spTgt spid="7"/>
+                                        </p:tgtEl>
+                                        <p:attrNameLst>
+                                          <p:attrName>ppt_h</p:attrName>
+                                        </p:attrNameLst>
+                                      </p:cBhvr>
+                                      <p:tavLst>
+                                        <p:tav tm="0">
+                                          <p:val>
+                                            <p:fltVal val="0"/>
+                                          </p:val>
+                                        </p:tav>
+                                        <p:tav tm="100000">
+                                          <p:val>
+                                            <p:strVal val="#ppt_h"/>
+                                          </p:val>
+                                        </p:tav>
+                                      </p:tavLst>
+                                    </p:anim>
+                                    <p:animEffect transition="in" filter="fade">
+                                      <p:cBhvr>
+                                        <p:cTn id="16" dur="500"/>
+                                        <p:tgtEl>
+                                          <p:spTgt spid="7"/>
+                                        </p:tgtEl>
+                                      </p:cBhvr>
+                                    </p:animEffect>
+                                  </p:childTnLst>
+                                </p:cTn>
+                              </p:par>
+                            </p:childTnLst>
+                          </p:cTn>
+                        </p:par>
+                      </p:childTnLst>
+                    </p:cTn>
+                  </p:par>
+                  <p:par>
+                    <p:cTn id="17" fill="hold">
+                      <p:stCondLst>
+                        <p:cond delay="indefinite"/>
+                      </p:stCondLst>
+                      <p:childTnLst>
+                        <p:par>
+                          <p:cTn id="18" fill="hold">
+                            <p:stCondLst>
+                              <p:cond delay="0"/>
+                            </p:stCondLst>
+                            <p:childTnLst>
+                              <p:par>
+                                <p:cTn id="19" presetID="53" presetClass="entr" presetSubtype="16" fill="hold" nodeType="clickEffect">
+                                  <p:stCondLst>
+                                    <p:cond delay="0"/>
+                                  </p:stCondLst>
+                                  <p:childTnLst>
+                                    <p:set>
+                                      <p:cBhvr>
+                                        <p:cTn id="20" dur="1" fill="hold">
+                                          <p:stCondLst>
+                                            <p:cond delay="0"/>
+                                          </p:stCondLst>
+                                        </p:cTn>
+                                        <p:tgtEl>
+                                          <p:spTgt spid="8">
+                                            <p:txEl>
+                                              <p:pRg st="0" end="0"/>
+                                            </p:txEl>
+                                          </p:spTgt>
+                                        </p:tgtEl>
+                                        <p:attrNameLst>
+                                          <p:attrName>style.visibility</p:attrName>
+                                        </p:attrNameLst>
+                                      </p:cBhvr>
+                                      <p:to>
+                                        <p:strVal val="visible"/>
+                                      </p:to>
+                                    </p:set>
+                                    <p:anim calcmode="lin" valueType="num">
+                                      <p:cBhvr>
+                                        <p:cTn id="21" dur="500" fill="hold"/>
+                                        <p:tgtEl>
+                                          <p:spTgt spid="8">
+                                            <p:txEl>
+                                              <p:pRg st="0" end="0"/>
+                                            </p:txEl>
+                                          </p:spTgt>
+                                        </p:tgtEl>
+                                        <p:attrNameLst>
+                                          <p:attrName>ppt_w</p:attrName>
+                                        </p:attrNameLst>
+                                      </p:cBhvr>
+                                      <p:tavLst>
+                                        <p:tav tm="0">
+                                          <p:val>
+                                            <p:fltVal val="0"/>
+                                          </p:val>
+                                        </p:tav>
+                                        <p:tav tm="100000">
+                                          <p:val>
+                                            <p:strVal val="#ppt_w"/>
+                                          </p:val>
+                                        </p:tav>
+                                      </p:tavLst>
+                                    </p:anim>
+                                    <p:anim calcmode="lin" valueType="num">
+                                      <p:cBhvr>
+                                        <p:cTn id="22" dur="500" fill="hold"/>
+                                        <p:tgtEl>
+                                          <p:spTgt spid="8">
+                                            <p:txEl>
+                                              <p:pRg st="0" end="0"/>
+                                            </p:txEl>
+                                          </p:spTgt>
+                                        </p:tgtEl>
+                                        <p:attrNameLst>
+                                          <p:attrName>ppt_h</p:attrName>
+                                        </p:attrNameLst>
+                                      </p:cBhvr>
+                                      <p:tavLst>
+                                        <p:tav tm="0">
+                                          <p:val>
+                                            <p:fltVal val="0"/>
+                                          </p:val>
+                                        </p:tav>
+                                        <p:tav tm="100000">
+                                          <p:val>
+                                            <p:strVal val="#ppt_h"/>
+                                          </p:val>
+                                        </p:tav>
+                                      </p:tavLst>
+                                    </p:anim>
+                                    <p:animEffect transition="in" filter="fade">
+                                      <p:cBhvr>
+                                        <p:cTn id="23" dur="500"/>
+                                        <p:tgtEl>
+                                          <p:spTgt spid="8">
+                                            <p:txEl>
+                                              <p:pRg st="0" end="0"/>
+                                            </p:txEl>
+                                          </p:spTgt>
+                                        </p:tgtEl>
+                                      </p:cBhvr>
+                                    </p:animEffect>
+                                  </p:childTnLst>
+                                </p:cTn>
+                              </p:par>
+                            </p:childTnLst>
+                          </p:cTn>
+                        </p:par>
+                      </p:childTnLst>
+                    </p:cTn>
+                  </p:par>
+                  <p:par>
+                    <p:cTn id="24" fill="hold">
+                      <p:stCondLst>
+                        <p:cond delay="indefinite"/>
+                      </p:stCondLst>
+                      <p:childTnLst>
+                        <p:par>
+                          <p:cTn id="25" fill="hold">
+                            <p:stCondLst>
+                              <p:cond delay="0"/>
+                            </p:stCondLst>
+                            <p:childTnLst>
+                              <p:par>
+                                <p:cTn id="26" presetID="53" presetClass="entr" presetSubtype="16" fill="hold" nodeType="clickEffect">
+                                  <p:stCondLst>
+                                    <p:cond delay="0"/>
+                                  </p:stCondLst>
+                                  <p:childTnLst>
+                                    <p:set>
+                                      <p:cBhvr>
+                                        <p:cTn id="27" dur="1" fill="hold">
+                                          <p:stCondLst>
+                                            <p:cond delay="0"/>
+                                          </p:stCondLst>
+                                        </p:cTn>
+                                        <p:tgtEl>
+                                          <p:spTgt spid="9">
+                                            <p:txEl>
+                                              <p:pRg st="0" end="0"/>
+                                            </p:txEl>
+                                          </p:spTgt>
+                                        </p:tgtEl>
+                                        <p:attrNameLst>
+                                          <p:attrName>style.visibility</p:attrName>
+                                        </p:attrNameLst>
+                                      </p:cBhvr>
+                                      <p:to>
+                                        <p:strVal val="visible"/>
+                                      </p:to>
+                                    </p:set>
+                                    <p:anim calcmode="lin" valueType="num">
+                                      <p:cBhvr>
+                                        <p:cTn id="28" dur="500" fill="hold"/>
+                                        <p:tgtEl>
+                                          <p:spTgt spid="9">
+                                            <p:txEl>
+                                              <p:pRg st="0" end="0"/>
+                                            </p:txEl>
+                                          </p:spTgt>
+                                        </p:tgtEl>
+                                        <p:attrNameLst>
+                                          <p:attrName>ppt_w</p:attrName>
+                                        </p:attrNameLst>
+                                      </p:cBhvr>
+                                      <p:tavLst>
+                                        <p:tav tm="0">
+                                          <p:val>
+                                            <p:fltVal val="0"/>
+                                          </p:val>
+                                        </p:tav>
+                                        <p:tav tm="100000">
+                                          <p:val>
+                                            <p:strVal val="#ppt_w"/>
+                                          </p:val>
+                                        </p:tav>
+                                      </p:tavLst>
+                                    </p:anim>
+                                    <p:anim calcmode="lin" valueType="num">
+                                      <p:cBhvr>
+                                        <p:cTn id="29" dur="500" fill="hold"/>
+                                        <p:tgtEl>
+                                          <p:spTgt spid="9">
+                                            <p:txEl>
+                                              <p:pRg st="0" end="0"/>
+                                            </p:txEl>
+                                          </p:spTgt>
+                                        </p:tgtEl>
+                                        <p:attrNameLst>
+                                          <p:attrName>ppt_h</p:attrName>
+                                        </p:attrNameLst>
+                                      </p:cBhvr>
+                                      <p:tavLst>
+                                        <p:tav tm="0">
+                                          <p:val>
+                                            <p:fltVal val="0"/>
+                                          </p:val>
+                                        </p:tav>
+                                        <p:tav tm="100000">
+                                          <p:val>
+                                            <p:strVal val="#ppt_h"/>
+                                          </p:val>
+                                        </p:tav>
+                                      </p:tavLst>
+                                    </p:anim>
+                                    <p:animEffect transition="in" filter="fade">
+                                      <p:cBhvr>
+                                        <p:cTn id="30" dur="500"/>
+                                        <p:tgtEl>
+                                          <p:spTgt spid="9">
+                                            <p:txEl>
+                                              <p:pRg st="0" end="0"/>
+                                            </p:txEl>
+                                          </p:spTgt>
+                                        </p:tgtEl>
+                                      </p:cBhvr>
+                                    </p:animEffect>
+                                  </p:childTnLst>
+                                </p:cTn>
+                              </p:par>
+                            </p:childTnLst>
+                          </p:cTn>
+                        </p:par>
+                      </p:childTnLst>
+                    </p:cTn>
+                  </p:par>
+                  <p:par>
+                    <p:cTn id="31" fill="hold">
+                      <p:stCondLst>
+                        <p:cond delay="indefinite"/>
+                      </p:stCondLst>
+                      <p:childTnLst>
+                        <p:par>
+                          <p:cTn id="32" fill="hold">
+                            <p:stCondLst>
+                              <p:cond delay="0"/>
+                            </p:stCondLst>
+                            <p:childTnLst>
+                              <p:par>
+                                <p:cTn id="33" presetID="53" presetClass="entr" presetSubtype="16" fill="hold" grpId="0" nodeType="clickEffect">
+                                  <p:stCondLst>
+                                    <p:cond delay="0"/>
+                                  </p:stCondLst>
+                                  <p:childTnLst>
+                                    <p:set>
+                                      <p:cBhvr>
+                                        <p:cTn id="34" dur="1" fill="hold">
+                                          <p:stCondLst>
+                                            <p:cond delay="0"/>
+                                          </p:stCondLst>
+                                        </p:cTn>
+                                        <p:tgtEl>
+                                          <p:spTgt spid="10"/>
+                                        </p:tgtEl>
+                                        <p:attrNameLst>
+                                          <p:attrName>style.visibility</p:attrName>
+                                        </p:attrNameLst>
+                                      </p:cBhvr>
+                                      <p:to>
+                                        <p:strVal val="visible"/>
+                                      </p:to>
+                                    </p:set>
+                                    <p:anim calcmode="lin" valueType="num">
+                                      <p:cBhvr>
+                                        <p:cTn id="35" dur="500" fill="hold"/>
+                                        <p:tgtEl>
+                                          <p:spTgt spid="10"/>
+                                        </p:tgtEl>
+                                        <p:attrNameLst>
+                                          <p:attrName>ppt_w</p:attrName>
+                                        </p:attrNameLst>
+                                      </p:cBhvr>
+                                      <p:tavLst>
+                                        <p:tav tm="0">
+                                          <p:val>
+                                            <p:fltVal val="0"/>
+                                          </p:val>
+                                        </p:tav>
+                                        <p:tav tm="100000">
+                                          <p:val>
+                                            <p:strVal val="#ppt_w"/>
+                                          </p:val>
+                                        </p:tav>
+                                      </p:tavLst>
+                                    </p:anim>
+                                    <p:anim calcmode="lin" valueType="num">
+                                      <p:cBhvr>
+                                        <p:cTn id="36" dur="500" fill="hold"/>
+                                        <p:tgtEl>
+                                          <p:spTgt spid="10"/>
+                                        </p:tgtEl>
+                                        <p:attrNameLst>
+                                          <p:attrName>ppt_h</p:attrName>
+                                        </p:attrNameLst>
+                                      </p:cBhvr>
+                                      <p:tavLst>
+                                        <p:tav tm="0">
+                                          <p:val>
+                                            <p:fltVal val="0"/>
+                                          </p:val>
+                                        </p:tav>
+                                        <p:tav tm="100000">
+                                          <p:val>
+                                            <p:strVal val="#ppt_h"/>
+                                          </p:val>
+                                        </p:tav>
+                                      </p:tavLst>
+                                    </p:anim>
+                                    <p:animEffect transition="in" filter="fade">
+                                      <p:cBhvr>
+                                        <p:cTn id="37" dur="500"/>
+                                        <p:tgtEl>
+                                          <p:spTgt spid="10"/>
+                                        </p:tgtEl>
+                                      </p:cBhvr>
+                                    </p:animEffect>
+                                  </p:childTnLst>
+                                </p:cTn>
+                              </p:par>
+                            </p:childTnLst>
+                          </p:cTn>
+                        </p:par>
+                      </p:childTnLst>
+                    </p:cTn>
+                  </p:par>
+                  <p:par>
+                    <p:cTn id="38" fill="hold">
+                      <p:stCondLst>
+                        <p:cond delay="indefinite"/>
+                      </p:stCondLst>
+                      <p:childTnLst>
+                        <p:par>
+                          <p:cTn id="39" fill="hold">
+                            <p:stCondLst>
+                              <p:cond delay="0"/>
+                            </p:stCondLst>
+                            <p:childTnLst>
+                              <p:par>
+                                <p:cTn id="40" presetID="53" presetClass="entr" presetSubtype="16" fill="hold" nodeType="clickEffect">
+                                  <p:stCondLst>
+                                    <p:cond delay="0"/>
+                                  </p:stCondLst>
+                                  <p:childTnLst>
+                                    <p:set>
+                                      <p:cBhvr>
+                                        <p:cTn id="41" dur="1" fill="hold">
+                                          <p:stCondLst>
+                                            <p:cond delay="0"/>
+                                          </p:stCondLst>
+                                        </p:cTn>
+                                        <p:tgtEl>
+                                          <p:spTgt spid="11">
+                                            <p:txEl>
+                                              <p:pRg st="0" end="0"/>
+                                            </p:txEl>
+                                          </p:spTgt>
+                                        </p:tgtEl>
+                                        <p:attrNameLst>
+                                          <p:attrName>style.visibility</p:attrName>
+                                        </p:attrNameLst>
+                                      </p:cBhvr>
+                                      <p:to>
+                                        <p:strVal val="visible"/>
+                                      </p:to>
+                                    </p:set>
+                                    <p:anim calcmode="lin" valueType="num">
+                                      <p:cBhvr>
+                                        <p:cTn id="42" dur="500" fill="hold"/>
+                                        <p:tgtEl>
+                                          <p:spTgt spid="11">
+                                            <p:txEl>
+                                              <p:pRg st="0" end="0"/>
+                                            </p:txEl>
+                                          </p:spTgt>
+                                        </p:tgtEl>
+                                        <p:attrNameLst>
+                                          <p:attrName>ppt_w</p:attrName>
+                                        </p:attrNameLst>
+                                      </p:cBhvr>
+                                      <p:tavLst>
+                                        <p:tav tm="0">
+                                          <p:val>
+                                            <p:fltVal val="0"/>
+                                          </p:val>
+                                        </p:tav>
+                                        <p:tav tm="100000">
+                                          <p:val>
+                                            <p:strVal val="#ppt_w"/>
+                                          </p:val>
+                                        </p:tav>
+                                      </p:tavLst>
+                                    </p:anim>
+                                    <p:anim calcmode="lin" valueType="num">
+                                      <p:cBhvr>
+                                        <p:cTn id="43" dur="500" fill="hold"/>
+                                        <p:tgtEl>
+                                          <p:spTgt spid="11">
+                                            <p:txEl>
+                                              <p:pRg st="0" end="0"/>
+                                            </p:txEl>
+                                          </p:spTgt>
+                                        </p:tgtEl>
+                                        <p:attrNameLst>
+                                          <p:attrName>ppt_h</p:attrName>
+                                        </p:attrNameLst>
+                                      </p:cBhvr>
+                                      <p:tavLst>
+                                        <p:tav tm="0">
+                                          <p:val>
+                                            <p:fltVal val="0"/>
+                                          </p:val>
+                                        </p:tav>
+                                        <p:tav tm="100000">
+                                          <p:val>
+                                            <p:strVal val="#ppt_h"/>
+                                          </p:val>
+                                        </p:tav>
+                                      </p:tavLst>
+                                    </p:anim>
+                                    <p:animEffect transition="in" filter="fade">
+                                      <p:cBhvr>
+                                        <p:cTn id="44" dur="500"/>
+                                        <p:tgtEl>
+                                          <p:spTgt spid="11">
+                                            <p:txEl>
+                                              <p:pRg st="0" end="0"/>
+                                            </p:txEl>
+                                          </p:spTgt>
+                                        </p:tgtEl>
+                                      </p:cBhvr>
+                                    </p:animEffect>
+                                  </p:childTnLst>
+                                </p:cTn>
+                              </p:par>
+                            </p:childTnLst>
+                          </p:cTn>
+                        </p:par>
+                      </p:childTnLst>
+                    </p:cTn>
+                  </p:par>
+                  <p:par>
+                    <p:cTn id="45" fill="hold">
+                      <p:stCondLst>
+                        <p:cond delay="indefinite"/>
+                      </p:stCondLst>
+                      <p:childTnLst>
+                        <p:par>
+                          <p:cTn id="46" fill="hold">
+                            <p:stCondLst>
+                              <p:cond delay="0"/>
+                            </p:stCondLst>
+                            <p:childTnLst>
+                              <p:par>
+                                <p:cTn id="47" presetID="53" presetClass="entr" presetSubtype="16" fill="hold" nodeType="clickEffect">
+                                  <p:stCondLst>
+                                    <p:cond delay="0"/>
+                                  </p:stCondLst>
+                                  <p:childTnLst>
+                                    <p:set>
+                                      <p:cBhvr>
+                                        <p:cTn id="48" dur="1" fill="hold">
+                                          <p:stCondLst>
+                                            <p:cond delay="0"/>
+                                          </p:stCondLst>
+                                        </p:cTn>
+                                        <p:tgtEl>
+                                          <p:spTgt spid="12">
+                                            <p:txEl>
+                                              <p:pRg st="0" end="0"/>
+                                            </p:txEl>
+                                          </p:spTgt>
+                                        </p:tgtEl>
+                                        <p:attrNameLst>
+                                          <p:attrName>style.visibility</p:attrName>
+                                        </p:attrNameLst>
+                                      </p:cBhvr>
+                                      <p:to>
+                                        <p:strVal val="visible"/>
+                                      </p:to>
+                                    </p:set>
+                                    <p:anim calcmode="lin" valueType="num">
+                                      <p:cBhvr>
+                                        <p:cTn id="49" dur="500" fill="hold"/>
+                                        <p:tgtEl>
+                                          <p:spTgt spid="12">
+                                            <p:txEl>
+                                              <p:pRg st="0" end="0"/>
+                                            </p:txEl>
+                                          </p:spTgt>
+                                        </p:tgtEl>
+                                        <p:attrNameLst>
+                                          <p:attrName>ppt_w</p:attrName>
+                                        </p:attrNameLst>
+                                      </p:cBhvr>
+                                      <p:tavLst>
+                                        <p:tav tm="0">
+                                          <p:val>
+                                            <p:fltVal val="0"/>
+                                          </p:val>
+                                        </p:tav>
+                                        <p:tav tm="100000">
+                                          <p:val>
+                                            <p:strVal val="#ppt_w"/>
+                                          </p:val>
+                                        </p:tav>
+                                      </p:tavLst>
+                                    </p:anim>
+                                    <p:anim calcmode="lin" valueType="num">
+                                      <p:cBhvr>
+                                        <p:cTn id="50" dur="500" fill="hold"/>
+                                        <p:tgtEl>
+                                          <p:spTgt spid="12">
+                                            <p:txEl>
+                                              <p:pRg st="0" end="0"/>
+                                            </p:txEl>
+                                          </p:spTgt>
+                                        </p:tgtEl>
+                                        <p:attrNameLst>
+                                          <p:attrName>ppt_h</p:attrName>
+                                        </p:attrNameLst>
+                                      </p:cBhvr>
+                                      <p:tavLst>
+                                        <p:tav tm="0">
+                                          <p:val>
+                                            <p:fltVal val="0"/>
+                                          </p:val>
+                                        </p:tav>
+                                        <p:tav tm="100000">
+                                          <p:val>
+                                            <p:strVal val="#ppt_h"/>
+                                          </p:val>
+                                        </p:tav>
+                                      </p:tavLst>
+                                    </p:anim>
+                                    <p:animEffect transition="in" filter="fade">
+                                      <p:cBhvr>
+                                        <p:cTn id="51" dur="500"/>
+                                        <p:tgtEl>
+                                          <p:spTgt spid="12">
+                                            <p:txEl>
+                                              <p:pRg st="0" end="0"/>
+                                            </p:txEl>
+                                          </p:spTgt>
+                                        </p:tgtEl>
+                                      </p:cBhvr>
+                                    </p:animEffect>
+                                  </p:childTnLst>
+                                </p:cTn>
+                              </p:par>
+                              <p:par>
+                                <p:cTn id="52" presetID="53" presetClass="entr" presetSubtype="16" fill="hold" nodeType="withEffect">
+                                  <p:stCondLst>
+                                    <p:cond delay="0"/>
+                                  </p:stCondLst>
+                                  <p:childTnLst>
+                                    <p:set>
+                                      <p:cBhvr>
+                                        <p:cTn id="53" dur="1" fill="hold">
+                                          <p:stCondLst>
+                                            <p:cond delay="0"/>
+                                          </p:stCondLst>
+                                        </p:cTn>
+                                        <p:tgtEl>
+                                          <p:spTgt spid="12">
+                                            <p:txEl>
+                                              <p:pRg st="1" end="1"/>
+                                            </p:txEl>
+                                          </p:spTgt>
+                                        </p:tgtEl>
+                                        <p:attrNameLst>
+                                          <p:attrName>style.visibility</p:attrName>
+                                        </p:attrNameLst>
+                                      </p:cBhvr>
+                                      <p:to>
+                                        <p:strVal val="visible"/>
+                                      </p:to>
+                                    </p:set>
+                                    <p:anim calcmode="lin" valueType="num">
+                                      <p:cBhvr>
+                                        <p:cTn id="54" dur="500" fill="hold"/>
+                                        <p:tgtEl>
+                                          <p:spTgt spid="12">
+                                            <p:txEl>
+                                              <p:pRg st="1" end="1"/>
+                                            </p:txEl>
+                                          </p:spTgt>
+                                        </p:tgtEl>
+                                        <p:attrNameLst>
+                                          <p:attrName>ppt_w</p:attrName>
+                                        </p:attrNameLst>
+                                      </p:cBhvr>
+                                      <p:tavLst>
+                                        <p:tav tm="0">
+                                          <p:val>
+                                            <p:fltVal val="0"/>
+                                          </p:val>
+                                        </p:tav>
+                                        <p:tav tm="100000">
+                                          <p:val>
+                                            <p:strVal val="#ppt_w"/>
+                                          </p:val>
+                                        </p:tav>
+                                      </p:tavLst>
+                                    </p:anim>
+                                    <p:anim calcmode="lin" valueType="num">
+                                      <p:cBhvr>
+                                        <p:cTn id="55" dur="500" fill="hold"/>
+                                        <p:tgtEl>
+                                          <p:spTgt spid="12">
+                                            <p:txEl>
+                                              <p:pRg st="1" end="1"/>
+                                            </p:txEl>
+                                          </p:spTgt>
+                                        </p:tgtEl>
+                                        <p:attrNameLst>
+                                          <p:attrName>ppt_h</p:attrName>
+                                        </p:attrNameLst>
+                                      </p:cBhvr>
+                                      <p:tavLst>
+                                        <p:tav tm="0">
+                                          <p:val>
+                                            <p:fltVal val="0"/>
+                                          </p:val>
+                                        </p:tav>
+                                        <p:tav tm="100000">
+                                          <p:val>
+                                            <p:strVal val="#ppt_h"/>
+                                          </p:val>
+                                        </p:tav>
+                                      </p:tavLst>
+                                    </p:anim>
+                                    <p:animEffect transition="in" filter="fade">
+                                      <p:cBhvr>
+                                        <p:cTn id="56" dur="500"/>
+                                        <p:tgtEl>
+                                          <p:spTgt spid="12">
+                                            <p:txEl>
+                                              <p:pRg st="1" end="1"/>
+                                            </p:txEl>
+                                          </p:spTgt>
+                                        </p:tgtEl>
+                                      </p:cBhvr>
+                                    </p:animEffect>
+                                  </p:childTnLst>
+                                </p:cTn>
+                              </p:par>
+                            </p:childTnLst>
+                          </p:cTn>
+                        </p:par>
+                      </p:childTnLst>
+                    </p:cTn>
+                  </p:par>
+                  <p:par>
+                    <p:cTn id="57" fill="hold">
+                      <p:stCondLst>
+                        <p:cond delay="indefinite"/>
+                      </p:stCondLst>
+                      <p:childTnLst>
+                        <p:par>
+                          <p:cTn id="58" fill="hold">
+                            <p:stCondLst>
+                              <p:cond delay="0"/>
+                            </p:stCondLst>
+                            <p:childTnLst>
+                              <p:par>
+                                <p:cTn id="59" presetID="53" presetClass="entr" presetSubtype="16" fill="hold" grpId="0" nodeType="clickEffect">
+                                  <p:stCondLst>
+                                    <p:cond delay="0"/>
+                                  </p:stCondLst>
+                                  <p:childTnLst>
+                                    <p:set>
+                                      <p:cBhvr>
+                                        <p:cTn id="60" dur="1" fill="hold">
+                                          <p:stCondLst>
+                                            <p:cond delay="0"/>
+                                          </p:stCondLst>
+                                        </p:cTn>
+                                        <p:tgtEl>
+                                          <p:spTgt spid="13"/>
+                                        </p:tgtEl>
+                                        <p:attrNameLst>
+                                          <p:attrName>style.visibility</p:attrName>
+                                        </p:attrNameLst>
+                                      </p:cBhvr>
+                                      <p:to>
+                                        <p:strVal val="visible"/>
+                                      </p:to>
+                                    </p:set>
+                                    <p:anim calcmode="lin" valueType="num">
+                                      <p:cBhvr>
+                                        <p:cTn id="61" dur="500" fill="hold"/>
+                                        <p:tgtEl>
+                                          <p:spTgt spid="13"/>
+                                        </p:tgtEl>
+                                        <p:attrNameLst>
+                                          <p:attrName>ppt_w</p:attrName>
+                                        </p:attrNameLst>
+                                      </p:cBhvr>
+                                      <p:tavLst>
+                                        <p:tav tm="0">
+                                          <p:val>
+                                            <p:fltVal val="0"/>
+                                          </p:val>
+                                        </p:tav>
+                                        <p:tav tm="100000">
+                                          <p:val>
+                                            <p:strVal val="#ppt_w"/>
+                                          </p:val>
+                                        </p:tav>
+                                      </p:tavLst>
+                                    </p:anim>
+                                    <p:anim calcmode="lin" valueType="num">
+                                      <p:cBhvr>
+                                        <p:cTn id="62" dur="500" fill="hold"/>
+                                        <p:tgtEl>
+                                          <p:spTgt spid="13"/>
+                                        </p:tgtEl>
+                                        <p:attrNameLst>
+                                          <p:attrName>ppt_h</p:attrName>
+                                        </p:attrNameLst>
+                                      </p:cBhvr>
+                                      <p:tavLst>
+                                        <p:tav tm="0">
+                                          <p:val>
+                                            <p:fltVal val="0"/>
+                                          </p:val>
+                                        </p:tav>
+                                        <p:tav tm="100000">
+                                          <p:val>
+                                            <p:strVal val="#ppt_h"/>
+                                          </p:val>
+                                        </p:tav>
+                                      </p:tavLst>
+                                    </p:anim>
+                                    <p:animEffect transition="in" filter="fade">
+                                      <p:cBhvr>
+                                        <p:cTn id="63" dur="500"/>
+                                        <p:tgtEl>
+                                          <p:spTgt spid="13"/>
+                                        </p:tgtEl>
+                                      </p:cBhvr>
+                                    </p:animEffect>
+                                  </p:childTnLst>
+                                </p:cTn>
+                              </p:par>
+                            </p:childTnLst>
+                          </p:cTn>
+                        </p:par>
+                      </p:childTnLst>
+                    </p:cTn>
+                  </p:par>
+                  <p:par>
+                    <p:cTn id="64" fill="hold">
+                      <p:stCondLst>
+                        <p:cond delay="indefinite"/>
+                      </p:stCondLst>
+                      <p:childTnLst>
+                        <p:par>
+                          <p:cTn id="65" fill="hold">
+                            <p:stCondLst>
+                              <p:cond delay="0"/>
+                            </p:stCondLst>
+                            <p:childTnLst>
+                              <p:par>
+                                <p:cTn id="66" presetID="53" presetClass="entr" presetSubtype="16" fill="hold" nodeType="clickEffect">
+                                  <p:stCondLst>
+                                    <p:cond delay="0"/>
+                                  </p:stCondLst>
+                                  <p:childTnLst>
+                                    <p:set>
+                                      <p:cBhvr>
+                                        <p:cTn id="67" dur="1" fill="hold">
+                                          <p:stCondLst>
+                                            <p:cond delay="0"/>
+                                          </p:stCondLst>
+                                        </p:cTn>
+                                        <p:tgtEl>
+                                          <p:spTgt spid="14">
+                                            <p:txEl>
+                                              <p:pRg st="0" end="0"/>
+                                            </p:txEl>
+                                          </p:spTgt>
+                                        </p:tgtEl>
+                                        <p:attrNameLst>
+                                          <p:attrName>style.visibility</p:attrName>
+                                        </p:attrNameLst>
+                                      </p:cBhvr>
+                                      <p:to>
+                                        <p:strVal val="visible"/>
+                                      </p:to>
+                                    </p:set>
+                                    <p:anim calcmode="lin" valueType="num">
+                                      <p:cBhvr>
+                                        <p:cTn id="68" dur="500" fill="hold"/>
+                                        <p:tgtEl>
+                                          <p:spTgt spid="14">
+                                            <p:txEl>
+                                              <p:pRg st="0" end="0"/>
+                                            </p:txEl>
+                                          </p:spTgt>
+                                        </p:tgtEl>
+                                        <p:attrNameLst>
+                                          <p:attrName>ppt_w</p:attrName>
+                                        </p:attrNameLst>
+                                      </p:cBhvr>
+                                      <p:tavLst>
+                                        <p:tav tm="0">
+                                          <p:val>
+                                            <p:fltVal val="0"/>
+                                          </p:val>
+                                        </p:tav>
+                                        <p:tav tm="100000">
+                                          <p:val>
+                                            <p:strVal val="#ppt_w"/>
+                                          </p:val>
+                                        </p:tav>
+                                      </p:tavLst>
+                                    </p:anim>
+                                    <p:anim calcmode="lin" valueType="num">
+                                      <p:cBhvr>
+                                        <p:cTn id="69" dur="500" fill="hold"/>
+                                        <p:tgtEl>
+                                          <p:spTgt spid="14">
+                                            <p:txEl>
+                                              <p:pRg st="0" end="0"/>
+                                            </p:txEl>
+                                          </p:spTgt>
+                                        </p:tgtEl>
+                                        <p:attrNameLst>
+                                          <p:attrName>ppt_h</p:attrName>
+                                        </p:attrNameLst>
+                                      </p:cBhvr>
+                                      <p:tavLst>
+                                        <p:tav tm="0">
+                                          <p:val>
+                                            <p:fltVal val="0"/>
+                                          </p:val>
+                                        </p:tav>
+                                        <p:tav tm="100000">
+                                          <p:val>
+                                            <p:strVal val="#ppt_h"/>
+                                          </p:val>
+                                        </p:tav>
+                                      </p:tavLst>
+                                    </p:anim>
+                                    <p:animEffect transition="in" filter="fade">
+                                      <p:cBhvr>
+                                        <p:cTn id="70" dur="500"/>
+                                        <p:tgtEl>
+                                          <p:spTgt spid="14">
+                                            <p:txEl>
+                                              <p:pRg st="0" end="0"/>
+                                            </p:txEl>
+                                          </p:spTgt>
+                                        </p:tgtEl>
+                                      </p:cBhvr>
+                                    </p:animEffect>
+                                  </p:childTnLst>
+                                </p:cTn>
+                              </p:par>
+                            </p:childTnLst>
+                          </p:cTn>
+                        </p:par>
+                      </p:childTnLst>
+                    </p:cTn>
+                  </p:par>
+                  <p:par>
+                    <p:cTn id="71" fill="hold">
+                      <p:stCondLst>
+                        <p:cond delay="indefinite"/>
+                      </p:stCondLst>
+                      <p:childTnLst>
+                        <p:par>
+                          <p:cTn id="72" fill="hold">
+                            <p:stCondLst>
+                              <p:cond delay="0"/>
+                            </p:stCondLst>
+                            <p:childTnLst>
+                              <p:par>
+                                <p:cTn id="73" presetID="53" presetClass="entr" presetSubtype="16" fill="hold" grpId="0" nodeType="clickEffect">
+                                  <p:stCondLst>
+                                    <p:cond delay="0"/>
+                                  </p:stCondLst>
+                                  <p:childTnLst>
+                                    <p:set>
+                                      <p:cBhvr>
+                                        <p:cTn id="74" dur="1" fill="hold">
+                                          <p:stCondLst>
+                                            <p:cond delay="0"/>
+                                          </p:stCondLst>
+                                        </p:cTn>
+                                        <p:tgtEl>
+                                          <p:spTgt spid="15"/>
+                                        </p:tgtEl>
+                                        <p:attrNameLst>
+                                          <p:attrName>style.visibility</p:attrName>
+                                        </p:attrNameLst>
+                                      </p:cBhvr>
+                                      <p:to>
+                                        <p:strVal val="visible"/>
+                                      </p:to>
+                                    </p:set>
+                                    <p:anim calcmode="lin" valueType="num">
+                                      <p:cBhvr>
+                                        <p:cTn id="75" dur="500" fill="hold"/>
+                                        <p:tgtEl>
+                                          <p:spTgt spid="15"/>
+                                        </p:tgtEl>
+                                        <p:attrNameLst>
+                                          <p:attrName>ppt_w</p:attrName>
+                                        </p:attrNameLst>
+                                      </p:cBhvr>
+                                      <p:tavLst>
+                                        <p:tav tm="0">
+                                          <p:val>
+                                            <p:fltVal val="0"/>
+                                          </p:val>
+                                        </p:tav>
+                                        <p:tav tm="100000">
+                                          <p:val>
+                                            <p:strVal val="#ppt_w"/>
+                                          </p:val>
+                                        </p:tav>
+                                      </p:tavLst>
+                                    </p:anim>
+                                    <p:anim calcmode="lin" valueType="num">
+                                      <p:cBhvr>
+                                        <p:cTn id="76" dur="500" fill="hold"/>
+                                        <p:tgtEl>
+                                          <p:spTgt spid="15"/>
+                                        </p:tgtEl>
+                                        <p:attrNameLst>
+                                          <p:attrName>ppt_h</p:attrName>
+                                        </p:attrNameLst>
+                                      </p:cBhvr>
+                                      <p:tavLst>
+                                        <p:tav tm="0">
+                                          <p:val>
+                                            <p:fltVal val="0"/>
+                                          </p:val>
+                                        </p:tav>
+                                        <p:tav tm="100000">
+                                          <p:val>
+                                            <p:strVal val="#ppt_h"/>
+                                          </p:val>
+                                        </p:tav>
+                                      </p:tavLst>
+                                    </p:anim>
+                                    <p:animEffect transition="in" filter="fade">
+                                      <p:cBhvr>
+                                        <p:cTn id="77" dur="500"/>
+                                        <p:tgtEl>
+                                          <p:spTgt spid="15"/>
+                                        </p:tgtEl>
+                                      </p:cBhvr>
+                                    </p:animEffect>
+                                  </p:childTnLst>
+                                </p:cTn>
+                              </p:par>
+                            </p:childTnLst>
+                          </p:cTn>
+                        </p:par>
+                      </p:childTnLst>
+                    </p:cTn>
+                  </p:par>
+                  <p:par>
+                    <p:cTn id="78" fill="hold">
+                      <p:stCondLst>
+                        <p:cond delay="indefinite"/>
+                      </p:stCondLst>
+                      <p:childTnLst>
+                        <p:par>
+                          <p:cTn id="79" fill="hold">
+                            <p:stCondLst>
+                              <p:cond delay="0"/>
+                            </p:stCondLst>
+                            <p:childTnLst>
+                              <p:par>
+                                <p:cTn id="80" presetID="53" presetClass="entr" presetSubtype="16" fill="hold" nodeType="clickEffect">
+                                  <p:stCondLst>
+                                    <p:cond delay="0"/>
+                                  </p:stCondLst>
+                                  <p:childTnLst>
+                                    <p:set>
+                                      <p:cBhvr>
+                                        <p:cTn id="81" dur="1" fill="hold">
+                                          <p:stCondLst>
+                                            <p:cond delay="0"/>
+                                          </p:stCondLst>
+                                        </p:cTn>
+                                        <p:tgtEl>
+                                          <p:spTgt spid="16">
+                                            <p:txEl>
+                                              <p:pRg st="0" end="0"/>
+                                            </p:txEl>
+                                          </p:spTgt>
+                                        </p:tgtEl>
+                                        <p:attrNameLst>
+                                          <p:attrName>style.visibility</p:attrName>
+                                        </p:attrNameLst>
+                                      </p:cBhvr>
+                                      <p:to>
+                                        <p:strVal val="visible"/>
+                                      </p:to>
+                                    </p:set>
+                                    <p:anim calcmode="lin" valueType="num">
+                                      <p:cBhvr>
+                                        <p:cTn id="82" dur="500" fill="hold"/>
+                                        <p:tgtEl>
+                                          <p:spTgt spid="16">
+                                            <p:txEl>
+                                              <p:pRg st="0" end="0"/>
+                                            </p:txEl>
+                                          </p:spTgt>
+                                        </p:tgtEl>
+                                        <p:attrNameLst>
+                                          <p:attrName>ppt_w</p:attrName>
+                                        </p:attrNameLst>
+                                      </p:cBhvr>
+                                      <p:tavLst>
+                                        <p:tav tm="0">
+                                          <p:val>
+                                            <p:fltVal val="0"/>
+                                          </p:val>
+                                        </p:tav>
+                                        <p:tav tm="100000">
+                                          <p:val>
+                                            <p:strVal val="#ppt_w"/>
+                                          </p:val>
+                                        </p:tav>
+                                      </p:tavLst>
+                                    </p:anim>
+                                    <p:anim calcmode="lin" valueType="num">
+                                      <p:cBhvr>
+                                        <p:cTn id="83" dur="500" fill="hold"/>
+                                        <p:tgtEl>
+                                          <p:spTgt spid="16">
+                                            <p:txEl>
+                                              <p:pRg st="0" end="0"/>
+                                            </p:txEl>
+                                          </p:spTgt>
+                                        </p:tgtEl>
+                                        <p:attrNameLst>
+                                          <p:attrName>ppt_h</p:attrName>
+                                        </p:attrNameLst>
+                                      </p:cBhvr>
+                                      <p:tavLst>
+                                        <p:tav tm="0">
+                                          <p:val>
+                                            <p:fltVal val="0"/>
+                                          </p:val>
+                                        </p:tav>
+                                        <p:tav tm="100000">
+                                          <p:val>
+                                            <p:strVal val="#ppt_h"/>
+                                          </p:val>
+                                        </p:tav>
+                                      </p:tavLst>
+                                    </p:anim>
+                                    <p:animEffect transition="in" filter="fade">
+                                      <p:cBhvr>
+                                        <p:cTn id="84" dur="500"/>
+                                        <p:tgtEl>
+                                          <p:spTgt spid="16">
+                                            <p:txEl>
+                                              <p:pRg st="0" end="0"/>
+                                            </p:txEl>
+                                          </p:spTgt>
+                                        </p:tgtEl>
+                                      </p:cBhvr>
+                                    </p:animEffect>
+                                  </p:childTnLst>
+                                </p:cTn>
+                              </p:par>
+                            </p:childTnLst>
+                          </p:cTn>
+                        </p:par>
+                      </p:childTnLst>
+                    </p:cTn>
+                  </p:par>
+                  <p:par>
+                    <p:cTn id="85" fill="hold">
+                      <p:stCondLst>
+                        <p:cond delay="indefinite"/>
+                      </p:stCondLst>
+                      <p:childTnLst>
+                        <p:par>
+                          <p:cTn id="86" fill="hold">
+                            <p:stCondLst>
+                              <p:cond delay="0"/>
+                            </p:stCondLst>
+                            <p:childTnLst>
+                              <p:par>
+                                <p:cTn id="87" presetID="53" presetClass="entr" presetSubtype="16" fill="hold" nodeType="clickEffect">
+                                  <p:stCondLst>
+                                    <p:cond delay="0"/>
+                                  </p:stCondLst>
+                                  <p:childTnLst>
+                                    <p:set>
+                                      <p:cBhvr>
+                                        <p:cTn id="88" dur="1" fill="hold">
+                                          <p:stCondLst>
+                                            <p:cond delay="0"/>
+                                          </p:stCondLst>
+                                        </p:cTn>
+                                        <p:tgtEl>
+                                          <p:spTgt spid="17">
+                                            <p:txEl>
+                                              <p:pRg st="0" end="0"/>
+                                            </p:txEl>
+                                          </p:spTgt>
+                                        </p:tgtEl>
+                                        <p:attrNameLst>
+                                          <p:attrName>style.visibility</p:attrName>
+                                        </p:attrNameLst>
+                                      </p:cBhvr>
+                                      <p:to>
+                                        <p:strVal val="visible"/>
+                                      </p:to>
+                                    </p:set>
+                                    <p:anim calcmode="lin" valueType="num">
+                                      <p:cBhvr>
+                                        <p:cTn id="89" dur="500" fill="hold"/>
+                                        <p:tgtEl>
+                                          <p:spTgt spid="17">
+                                            <p:txEl>
+                                              <p:pRg st="0" end="0"/>
+                                            </p:txEl>
+                                          </p:spTgt>
+                                        </p:tgtEl>
+                                        <p:attrNameLst>
+                                          <p:attrName>ppt_w</p:attrName>
+                                        </p:attrNameLst>
+                                      </p:cBhvr>
+                                      <p:tavLst>
+                                        <p:tav tm="0">
+                                          <p:val>
+                                            <p:fltVal val="0"/>
+                                          </p:val>
+                                        </p:tav>
+                                        <p:tav tm="100000">
+                                          <p:val>
+                                            <p:strVal val="#ppt_w"/>
+                                          </p:val>
+                                        </p:tav>
+                                      </p:tavLst>
+                                    </p:anim>
+                                    <p:anim calcmode="lin" valueType="num">
+                                      <p:cBhvr>
+                                        <p:cTn id="90" dur="500" fill="hold"/>
+                                        <p:tgtEl>
+                                          <p:spTgt spid="17">
+                                            <p:txEl>
+                                              <p:pRg st="0" end="0"/>
+                                            </p:txEl>
+                                          </p:spTgt>
+                                        </p:tgtEl>
+                                        <p:attrNameLst>
+                                          <p:attrName>ppt_h</p:attrName>
+                                        </p:attrNameLst>
+                                      </p:cBhvr>
+                                      <p:tavLst>
+                                        <p:tav tm="0">
+                                          <p:val>
+                                            <p:fltVal val="0"/>
+                                          </p:val>
+                                        </p:tav>
+                                        <p:tav tm="100000">
+                                          <p:val>
+                                            <p:strVal val="#ppt_h"/>
+                                          </p:val>
+                                        </p:tav>
+                                      </p:tavLst>
+                                    </p:anim>
+                                    <p:animEffect transition="in" filter="fade">
+                                      <p:cBhvr>
+                                        <p:cTn id="91" dur="500"/>
+                                        <p:tgtEl>
+                                          <p:spTgt spid="17">
+                                            <p:txEl>
+                                              <p:pRg st="0" end="0"/>
+                                            </p:txEl>
+                                          </p:spTgt>
+                                        </p:tgtEl>
+                                      </p:cBhvr>
+                                    </p:animEffect>
+                                  </p:childTnLst>
+                                </p:cTn>
+                              </p:par>
+                            </p:childTnLst>
+                          </p:cTn>
+                        </p:par>
+                      </p:childTnLst>
+                    </p:cTn>
+                  </p:par>
+                </p:childTnLst>
+              </p:cTn>
+              <p:prevCondLst>
+                <p:cond evt="onPrev" delay="0">
+                  <p:tgtEl>
+                    <p:sldTgt/>
+                  </p:tgtEl>
+                </p:cond>
+              </p:prevCondLst>
+              <p:nextCondLst>
+                <p:cond evt="onNext" delay="0">
+                  <p:tgtEl>
+                    <p:sldTgt/>
+                  </p:tgtEl>
+                </p:cond>
+              </p:nextCondLst>
+            </p:seq>
+          </p:childTnLst>
+        </p:cTn>
+      </p:par>
+    </p:tnLst>
+    <p:bldLst>
+      <p:bldP spid="7" grpId="0" animBg="1"/>
+      <p:bldP spid="10" grpId="0" animBg="1"/>
+      <p:bldP spid="13" grpId="0" animBg="1"/>
+      <p:bldP spid="15" grpId="0" animBg="1"/>
+    </p:bldLst>
+  </p:timing>
 </p:sld>
 </file>
 
@@ -6374,6 +8613,9 @@
   <p:clrMapOvr>
     <a:masterClrMapping/>
   </p:clrMapOvr>
+  <p:transition>
+    <p:fade/>
+  </p:transition>
 </p:sld>
 </file>
 
@@ -6592,6 +8834,16 @@
               </a:rPr>
               <a:t>No External Grounding</a:t>
             </a:r>
+            <a:br>
+              <a:rPr lang="en-US" sz="2200" b="1" dirty="0">
+                <a:solidFill>
+                  <a:srgbClr val="272525"/>
+                </a:solidFill>
+                <a:latin typeface="Inter Bold" pitchFamily="34" charset="0"/>
+                <a:ea typeface="Inter Bold" pitchFamily="34" charset="-122"/>
+                <a:cs typeface="Inter Bold" pitchFamily="34" charset="-120"/>
+              </a:rPr>
+            </a:br>
             <a:endParaRPr lang="en-US" sz="2200" dirty="0"/>
           </a:p>
         </p:txBody>
@@ -7170,6 +9422,959 @@
   <p:clrMapOvr>
     <a:masterClrMapping/>
   </p:clrMapOvr>
+  <p:transition>
+    <p:fade/>
+  </p:transition>
+  <p:timing>
+    <p:tnLst>
+      <p:par>
+        <p:cTn id="1" dur="indefinite" restart="never" nodeType="tmRoot">
+          <p:childTnLst>
+            <p:seq concurrent="1" nextAc="seek">
+              <p:cTn id="2" dur="indefinite" nodeType="mainSeq">
+                <p:childTnLst>
+                  <p:par>
+                    <p:cTn id="3" fill="hold">
+                      <p:stCondLst>
+                        <p:cond delay="indefinite"/>
+                      </p:stCondLst>
+                      <p:childTnLst>
+                        <p:par>
+                          <p:cTn id="4" fill="hold">
+                            <p:stCondLst>
+                              <p:cond delay="0"/>
+                            </p:stCondLst>
+                            <p:childTnLst>
+                              <p:par>
+                                <p:cTn id="5" presetID="53" presetClass="entr" presetSubtype="16" fill="hold" nodeType="clickEffect">
+                                  <p:stCondLst>
+                                    <p:cond delay="0"/>
+                                  </p:stCondLst>
+                                  <p:childTnLst>
+                                    <p:set>
+                                      <p:cBhvr>
+                                        <p:cTn id="6" dur="1" fill="hold">
+                                          <p:stCondLst>
+                                            <p:cond delay="0"/>
+                                          </p:stCondLst>
+                                        </p:cTn>
+                                        <p:tgtEl>
+                                          <p:spTgt spid="6">
+                                            <p:txEl>
+                                              <p:pRg st="0" end="0"/>
+                                            </p:txEl>
+                                          </p:spTgt>
+                                        </p:tgtEl>
+                                        <p:attrNameLst>
+                                          <p:attrName>style.visibility</p:attrName>
+                                        </p:attrNameLst>
+                                      </p:cBhvr>
+                                      <p:to>
+                                        <p:strVal val="visible"/>
+                                      </p:to>
+                                    </p:set>
+                                    <p:anim calcmode="lin" valueType="num">
+                                      <p:cBhvr>
+                                        <p:cTn id="7" dur="500" fill="hold"/>
+                                        <p:tgtEl>
+                                          <p:spTgt spid="6">
+                                            <p:txEl>
+                                              <p:pRg st="0" end="0"/>
+                                            </p:txEl>
+                                          </p:spTgt>
+                                        </p:tgtEl>
+                                        <p:attrNameLst>
+                                          <p:attrName>ppt_w</p:attrName>
+                                        </p:attrNameLst>
+                                      </p:cBhvr>
+                                      <p:tavLst>
+                                        <p:tav tm="0">
+                                          <p:val>
+                                            <p:fltVal val="0"/>
+                                          </p:val>
+                                        </p:tav>
+                                        <p:tav tm="100000">
+                                          <p:val>
+                                            <p:strVal val="#ppt_w"/>
+                                          </p:val>
+                                        </p:tav>
+                                      </p:tavLst>
+                                    </p:anim>
+                                    <p:anim calcmode="lin" valueType="num">
+                                      <p:cBhvr>
+                                        <p:cTn id="8" dur="500" fill="hold"/>
+                                        <p:tgtEl>
+                                          <p:spTgt spid="6">
+                                            <p:txEl>
+                                              <p:pRg st="0" end="0"/>
+                                            </p:txEl>
+                                          </p:spTgt>
+                                        </p:tgtEl>
+                                        <p:attrNameLst>
+                                          <p:attrName>ppt_h</p:attrName>
+                                        </p:attrNameLst>
+                                      </p:cBhvr>
+                                      <p:tavLst>
+                                        <p:tav tm="0">
+                                          <p:val>
+                                            <p:fltVal val="0"/>
+                                          </p:val>
+                                        </p:tav>
+                                        <p:tav tm="100000">
+                                          <p:val>
+                                            <p:strVal val="#ppt_h"/>
+                                          </p:val>
+                                        </p:tav>
+                                      </p:tavLst>
+                                    </p:anim>
+                                    <p:animEffect transition="in" filter="fade">
+                                      <p:cBhvr>
+                                        <p:cTn id="9" dur="500"/>
+                                        <p:tgtEl>
+                                          <p:spTgt spid="6">
+                                            <p:txEl>
+                                              <p:pRg st="0" end="0"/>
+                                            </p:txEl>
+                                          </p:spTgt>
+                                        </p:tgtEl>
+                                      </p:cBhvr>
+                                    </p:animEffect>
+                                  </p:childTnLst>
+                                </p:cTn>
+                              </p:par>
+                            </p:childTnLst>
+                          </p:cTn>
+                        </p:par>
+                      </p:childTnLst>
+                    </p:cTn>
+                  </p:par>
+                  <p:par>
+                    <p:cTn id="10" fill="hold">
+                      <p:stCondLst>
+                        <p:cond delay="indefinite"/>
+                      </p:stCondLst>
+                      <p:childTnLst>
+                        <p:par>
+                          <p:cTn id="11" fill="hold">
+                            <p:stCondLst>
+                              <p:cond delay="0"/>
+                            </p:stCondLst>
+                            <p:childTnLst>
+                              <p:par>
+                                <p:cTn id="12" presetID="53" presetClass="entr" presetSubtype="16" fill="hold" nodeType="clickEffect">
+                                  <p:stCondLst>
+                                    <p:cond delay="0"/>
+                                  </p:stCondLst>
+                                  <p:childTnLst>
+                                    <p:set>
+                                      <p:cBhvr>
+                                        <p:cTn id="13" dur="1" fill="hold">
+                                          <p:stCondLst>
+                                            <p:cond delay="0"/>
+                                          </p:stCondLst>
+                                        </p:cTn>
+                                        <p:tgtEl>
+                                          <p:spTgt spid="7">
+                                            <p:txEl>
+                                              <p:pRg st="0" end="0"/>
+                                            </p:txEl>
+                                          </p:spTgt>
+                                        </p:tgtEl>
+                                        <p:attrNameLst>
+                                          <p:attrName>style.visibility</p:attrName>
+                                        </p:attrNameLst>
+                                      </p:cBhvr>
+                                      <p:to>
+                                        <p:strVal val="visible"/>
+                                      </p:to>
+                                    </p:set>
+                                    <p:anim calcmode="lin" valueType="num">
+                                      <p:cBhvr>
+                                        <p:cTn id="14" dur="500" fill="hold"/>
+                                        <p:tgtEl>
+                                          <p:spTgt spid="7">
+                                            <p:txEl>
+                                              <p:pRg st="0" end="0"/>
+                                            </p:txEl>
+                                          </p:spTgt>
+                                        </p:tgtEl>
+                                        <p:attrNameLst>
+                                          <p:attrName>ppt_w</p:attrName>
+                                        </p:attrNameLst>
+                                      </p:cBhvr>
+                                      <p:tavLst>
+                                        <p:tav tm="0">
+                                          <p:val>
+                                            <p:fltVal val="0"/>
+                                          </p:val>
+                                        </p:tav>
+                                        <p:tav tm="100000">
+                                          <p:val>
+                                            <p:strVal val="#ppt_w"/>
+                                          </p:val>
+                                        </p:tav>
+                                      </p:tavLst>
+                                    </p:anim>
+                                    <p:anim calcmode="lin" valueType="num">
+                                      <p:cBhvr>
+                                        <p:cTn id="15" dur="500" fill="hold"/>
+                                        <p:tgtEl>
+                                          <p:spTgt spid="7">
+                                            <p:txEl>
+                                              <p:pRg st="0" end="0"/>
+                                            </p:txEl>
+                                          </p:spTgt>
+                                        </p:tgtEl>
+                                        <p:attrNameLst>
+                                          <p:attrName>ppt_h</p:attrName>
+                                        </p:attrNameLst>
+                                      </p:cBhvr>
+                                      <p:tavLst>
+                                        <p:tav tm="0">
+                                          <p:val>
+                                            <p:fltVal val="0"/>
+                                          </p:val>
+                                        </p:tav>
+                                        <p:tav tm="100000">
+                                          <p:val>
+                                            <p:strVal val="#ppt_h"/>
+                                          </p:val>
+                                        </p:tav>
+                                      </p:tavLst>
+                                    </p:anim>
+                                    <p:animEffect transition="in" filter="fade">
+                                      <p:cBhvr>
+                                        <p:cTn id="16" dur="500"/>
+                                        <p:tgtEl>
+                                          <p:spTgt spid="7">
+                                            <p:txEl>
+                                              <p:pRg st="0" end="0"/>
+                                            </p:txEl>
+                                          </p:spTgt>
+                                        </p:tgtEl>
+                                      </p:cBhvr>
+                                    </p:animEffect>
+                                  </p:childTnLst>
+                                </p:cTn>
+                              </p:par>
+                            </p:childTnLst>
+                          </p:cTn>
+                        </p:par>
+                      </p:childTnLst>
+                    </p:cTn>
+                  </p:par>
+                  <p:par>
+                    <p:cTn id="17" fill="hold">
+                      <p:stCondLst>
+                        <p:cond delay="indefinite"/>
+                      </p:stCondLst>
+                      <p:childTnLst>
+                        <p:par>
+                          <p:cTn id="18" fill="hold">
+                            <p:stCondLst>
+                              <p:cond delay="0"/>
+                            </p:stCondLst>
+                            <p:childTnLst>
+                              <p:par>
+                                <p:cTn id="19" presetID="53" presetClass="entr" presetSubtype="16" fill="hold" nodeType="clickEffect">
+                                  <p:stCondLst>
+                                    <p:cond delay="0"/>
+                                  </p:stCondLst>
+                                  <p:childTnLst>
+                                    <p:set>
+                                      <p:cBhvr>
+                                        <p:cTn id="20" dur="1" fill="hold">
+                                          <p:stCondLst>
+                                            <p:cond delay="0"/>
+                                          </p:stCondLst>
+                                        </p:cTn>
+                                        <p:tgtEl>
+                                          <p:spTgt spid="10">
+                                            <p:txEl>
+                                              <p:pRg st="0" end="0"/>
+                                            </p:txEl>
+                                          </p:spTgt>
+                                        </p:tgtEl>
+                                        <p:attrNameLst>
+                                          <p:attrName>style.visibility</p:attrName>
+                                        </p:attrNameLst>
+                                      </p:cBhvr>
+                                      <p:to>
+                                        <p:strVal val="visible"/>
+                                      </p:to>
+                                    </p:set>
+                                    <p:anim calcmode="lin" valueType="num">
+                                      <p:cBhvr>
+                                        <p:cTn id="21" dur="500" fill="hold"/>
+                                        <p:tgtEl>
+                                          <p:spTgt spid="10">
+                                            <p:txEl>
+                                              <p:pRg st="0" end="0"/>
+                                            </p:txEl>
+                                          </p:spTgt>
+                                        </p:tgtEl>
+                                        <p:attrNameLst>
+                                          <p:attrName>ppt_w</p:attrName>
+                                        </p:attrNameLst>
+                                      </p:cBhvr>
+                                      <p:tavLst>
+                                        <p:tav tm="0">
+                                          <p:val>
+                                            <p:fltVal val="0"/>
+                                          </p:val>
+                                        </p:tav>
+                                        <p:tav tm="100000">
+                                          <p:val>
+                                            <p:strVal val="#ppt_w"/>
+                                          </p:val>
+                                        </p:tav>
+                                      </p:tavLst>
+                                    </p:anim>
+                                    <p:anim calcmode="lin" valueType="num">
+                                      <p:cBhvr>
+                                        <p:cTn id="22" dur="500" fill="hold"/>
+                                        <p:tgtEl>
+                                          <p:spTgt spid="10">
+                                            <p:txEl>
+                                              <p:pRg st="0" end="0"/>
+                                            </p:txEl>
+                                          </p:spTgt>
+                                        </p:tgtEl>
+                                        <p:attrNameLst>
+                                          <p:attrName>ppt_h</p:attrName>
+                                        </p:attrNameLst>
+                                      </p:cBhvr>
+                                      <p:tavLst>
+                                        <p:tav tm="0">
+                                          <p:val>
+                                            <p:fltVal val="0"/>
+                                          </p:val>
+                                        </p:tav>
+                                        <p:tav tm="100000">
+                                          <p:val>
+                                            <p:strVal val="#ppt_h"/>
+                                          </p:val>
+                                        </p:tav>
+                                      </p:tavLst>
+                                    </p:anim>
+                                    <p:animEffect transition="in" filter="fade">
+                                      <p:cBhvr>
+                                        <p:cTn id="23" dur="500"/>
+                                        <p:tgtEl>
+                                          <p:spTgt spid="10">
+                                            <p:txEl>
+                                              <p:pRg st="0" end="0"/>
+                                            </p:txEl>
+                                          </p:spTgt>
+                                        </p:tgtEl>
+                                      </p:cBhvr>
+                                    </p:animEffect>
+                                  </p:childTnLst>
+                                </p:cTn>
+                              </p:par>
+                            </p:childTnLst>
+                          </p:cTn>
+                        </p:par>
+                      </p:childTnLst>
+                    </p:cTn>
+                  </p:par>
+                  <p:par>
+                    <p:cTn id="24" fill="hold">
+                      <p:stCondLst>
+                        <p:cond delay="indefinite"/>
+                      </p:stCondLst>
+                      <p:childTnLst>
+                        <p:par>
+                          <p:cTn id="25" fill="hold">
+                            <p:stCondLst>
+                              <p:cond delay="0"/>
+                            </p:stCondLst>
+                            <p:childTnLst>
+                              <p:par>
+                                <p:cTn id="26" presetID="53" presetClass="entr" presetSubtype="16" fill="hold" nodeType="clickEffect">
+                                  <p:stCondLst>
+                                    <p:cond delay="0"/>
+                                  </p:stCondLst>
+                                  <p:childTnLst>
+                                    <p:set>
+                                      <p:cBhvr>
+                                        <p:cTn id="27" dur="1" fill="hold">
+                                          <p:stCondLst>
+                                            <p:cond delay="0"/>
+                                          </p:stCondLst>
+                                        </p:cTn>
+                                        <p:tgtEl>
+                                          <p:spTgt spid="11">
+                                            <p:txEl>
+                                              <p:pRg st="0" end="0"/>
+                                            </p:txEl>
+                                          </p:spTgt>
+                                        </p:tgtEl>
+                                        <p:attrNameLst>
+                                          <p:attrName>style.visibility</p:attrName>
+                                        </p:attrNameLst>
+                                      </p:cBhvr>
+                                      <p:to>
+                                        <p:strVal val="visible"/>
+                                      </p:to>
+                                    </p:set>
+                                    <p:anim calcmode="lin" valueType="num">
+                                      <p:cBhvr>
+                                        <p:cTn id="28" dur="500" fill="hold"/>
+                                        <p:tgtEl>
+                                          <p:spTgt spid="11">
+                                            <p:txEl>
+                                              <p:pRg st="0" end="0"/>
+                                            </p:txEl>
+                                          </p:spTgt>
+                                        </p:tgtEl>
+                                        <p:attrNameLst>
+                                          <p:attrName>ppt_w</p:attrName>
+                                        </p:attrNameLst>
+                                      </p:cBhvr>
+                                      <p:tavLst>
+                                        <p:tav tm="0">
+                                          <p:val>
+                                            <p:fltVal val="0"/>
+                                          </p:val>
+                                        </p:tav>
+                                        <p:tav tm="100000">
+                                          <p:val>
+                                            <p:strVal val="#ppt_w"/>
+                                          </p:val>
+                                        </p:tav>
+                                      </p:tavLst>
+                                    </p:anim>
+                                    <p:anim calcmode="lin" valueType="num">
+                                      <p:cBhvr>
+                                        <p:cTn id="29" dur="500" fill="hold"/>
+                                        <p:tgtEl>
+                                          <p:spTgt spid="11">
+                                            <p:txEl>
+                                              <p:pRg st="0" end="0"/>
+                                            </p:txEl>
+                                          </p:spTgt>
+                                        </p:tgtEl>
+                                        <p:attrNameLst>
+                                          <p:attrName>ppt_h</p:attrName>
+                                        </p:attrNameLst>
+                                      </p:cBhvr>
+                                      <p:tavLst>
+                                        <p:tav tm="0">
+                                          <p:val>
+                                            <p:fltVal val="0"/>
+                                          </p:val>
+                                        </p:tav>
+                                        <p:tav tm="100000">
+                                          <p:val>
+                                            <p:strVal val="#ppt_h"/>
+                                          </p:val>
+                                        </p:tav>
+                                      </p:tavLst>
+                                    </p:anim>
+                                    <p:animEffect transition="in" filter="fade">
+                                      <p:cBhvr>
+                                        <p:cTn id="30" dur="500"/>
+                                        <p:tgtEl>
+                                          <p:spTgt spid="11">
+                                            <p:txEl>
+                                              <p:pRg st="0" end="0"/>
+                                            </p:txEl>
+                                          </p:spTgt>
+                                        </p:tgtEl>
+                                      </p:cBhvr>
+                                    </p:animEffect>
+                                  </p:childTnLst>
+                                </p:cTn>
+                              </p:par>
+                            </p:childTnLst>
+                          </p:cTn>
+                        </p:par>
+                      </p:childTnLst>
+                    </p:cTn>
+                  </p:par>
+                  <p:par>
+                    <p:cTn id="31" fill="hold">
+                      <p:stCondLst>
+                        <p:cond delay="indefinite"/>
+                      </p:stCondLst>
+                      <p:childTnLst>
+                        <p:par>
+                          <p:cTn id="32" fill="hold">
+                            <p:stCondLst>
+                              <p:cond delay="0"/>
+                            </p:stCondLst>
+                            <p:childTnLst>
+                              <p:par>
+                                <p:cTn id="33" presetID="53" presetClass="entr" presetSubtype="16" fill="hold" nodeType="clickEffect">
+                                  <p:stCondLst>
+                                    <p:cond delay="0"/>
+                                  </p:stCondLst>
+                                  <p:childTnLst>
+                                    <p:set>
+                                      <p:cBhvr>
+                                        <p:cTn id="34" dur="1" fill="hold">
+                                          <p:stCondLst>
+                                            <p:cond delay="0"/>
+                                          </p:stCondLst>
+                                        </p:cTn>
+                                        <p:tgtEl>
+                                          <p:spTgt spid="14">
+                                            <p:txEl>
+                                              <p:pRg st="0" end="0"/>
+                                            </p:txEl>
+                                          </p:spTgt>
+                                        </p:tgtEl>
+                                        <p:attrNameLst>
+                                          <p:attrName>style.visibility</p:attrName>
+                                        </p:attrNameLst>
+                                      </p:cBhvr>
+                                      <p:to>
+                                        <p:strVal val="visible"/>
+                                      </p:to>
+                                    </p:set>
+                                    <p:anim calcmode="lin" valueType="num">
+                                      <p:cBhvr>
+                                        <p:cTn id="35" dur="500" fill="hold"/>
+                                        <p:tgtEl>
+                                          <p:spTgt spid="14">
+                                            <p:txEl>
+                                              <p:pRg st="0" end="0"/>
+                                            </p:txEl>
+                                          </p:spTgt>
+                                        </p:tgtEl>
+                                        <p:attrNameLst>
+                                          <p:attrName>ppt_w</p:attrName>
+                                        </p:attrNameLst>
+                                      </p:cBhvr>
+                                      <p:tavLst>
+                                        <p:tav tm="0">
+                                          <p:val>
+                                            <p:fltVal val="0"/>
+                                          </p:val>
+                                        </p:tav>
+                                        <p:tav tm="100000">
+                                          <p:val>
+                                            <p:strVal val="#ppt_w"/>
+                                          </p:val>
+                                        </p:tav>
+                                      </p:tavLst>
+                                    </p:anim>
+                                    <p:anim calcmode="lin" valueType="num">
+                                      <p:cBhvr>
+                                        <p:cTn id="36" dur="500" fill="hold"/>
+                                        <p:tgtEl>
+                                          <p:spTgt spid="14">
+                                            <p:txEl>
+                                              <p:pRg st="0" end="0"/>
+                                            </p:txEl>
+                                          </p:spTgt>
+                                        </p:tgtEl>
+                                        <p:attrNameLst>
+                                          <p:attrName>ppt_h</p:attrName>
+                                        </p:attrNameLst>
+                                      </p:cBhvr>
+                                      <p:tavLst>
+                                        <p:tav tm="0">
+                                          <p:val>
+                                            <p:fltVal val="0"/>
+                                          </p:val>
+                                        </p:tav>
+                                        <p:tav tm="100000">
+                                          <p:val>
+                                            <p:strVal val="#ppt_h"/>
+                                          </p:val>
+                                        </p:tav>
+                                      </p:tavLst>
+                                    </p:anim>
+                                    <p:animEffect transition="in" filter="fade">
+                                      <p:cBhvr>
+                                        <p:cTn id="37" dur="500"/>
+                                        <p:tgtEl>
+                                          <p:spTgt spid="14">
+                                            <p:txEl>
+                                              <p:pRg st="0" end="0"/>
+                                            </p:txEl>
+                                          </p:spTgt>
+                                        </p:tgtEl>
+                                      </p:cBhvr>
+                                    </p:animEffect>
+                                  </p:childTnLst>
+                                </p:cTn>
+                              </p:par>
+                            </p:childTnLst>
+                          </p:cTn>
+                        </p:par>
+                      </p:childTnLst>
+                    </p:cTn>
+                  </p:par>
+                  <p:par>
+                    <p:cTn id="38" fill="hold">
+                      <p:stCondLst>
+                        <p:cond delay="indefinite"/>
+                      </p:stCondLst>
+                      <p:childTnLst>
+                        <p:par>
+                          <p:cTn id="39" fill="hold">
+                            <p:stCondLst>
+                              <p:cond delay="0"/>
+                            </p:stCondLst>
+                            <p:childTnLst>
+                              <p:par>
+                                <p:cTn id="40" presetID="53" presetClass="entr" presetSubtype="16" fill="hold" nodeType="clickEffect">
+                                  <p:stCondLst>
+                                    <p:cond delay="0"/>
+                                  </p:stCondLst>
+                                  <p:childTnLst>
+                                    <p:set>
+                                      <p:cBhvr>
+                                        <p:cTn id="41" dur="1" fill="hold">
+                                          <p:stCondLst>
+                                            <p:cond delay="0"/>
+                                          </p:stCondLst>
+                                        </p:cTn>
+                                        <p:tgtEl>
+                                          <p:spTgt spid="15">
+                                            <p:txEl>
+                                              <p:pRg st="0" end="0"/>
+                                            </p:txEl>
+                                          </p:spTgt>
+                                        </p:tgtEl>
+                                        <p:attrNameLst>
+                                          <p:attrName>style.visibility</p:attrName>
+                                        </p:attrNameLst>
+                                      </p:cBhvr>
+                                      <p:to>
+                                        <p:strVal val="visible"/>
+                                      </p:to>
+                                    </p:set>
+                                    <p:anim calcmode="lin" valueType="num">
+                                      <p:cBhvr>
+                                        <p:cTn id="42" dur="500" fill="hold"/>
+                                        <p:tgtEl>
+                                          <p:spTgt spid="15">
+                                            <p:txEl>
+                                              <p:pRg st="0" end="0"/>
+                                            </p:txEl>
+                                          </p:spTgt>
+                                        </p:tgtEl>
+                                        <p:attrNameLst>
+                                          <p:attrName>ppt_w</p:attrName>
+                                        </p:attrNameLst>
+                                      </p:cBhvr>
+                                      <p:tavLst>
+                                        <p:tav tm="0">
+                                          <p:val>
+                                            <p:fltVal val="0"/>
+                                          </p:val>
+                                        </p:tav>
+                                        <p:tav tm="100000">
+                                          <p:val>
+                                            <p:strVal val="#ppt_w"/>
+                                          </p:val>
+                                        </p:tav>
+                                      </p:tavLst>
+                                    </p:anim>
+                                    <p:anim calcmode="lin" valueType="num">
+                                      <p:cBhvr>
+                                        <p:cTn id="43" dur="500" fill="hold"/>
+                                        <p:tgtEl>
+                                          <p:spTgt spid="15">
+                                            <p:txEl>
+                                              <p:pRg st="0" end="0"/>
+                                            </p:txEl>
+                                          </p:spTgt>
+                                        </p:tgtEl>
+                                        <p:attrNameLst>
+                                          <p:attrName>ppt_h</p:attrName>
+                                        </p:attrNameLst>
+                                      </p:cBhvr>
+                                      <p:tavLst>
+                                        <p:tav tm="0">
+                                          <p:val>
+                                            <p:fltVal val="0"/>
+                                          </p:val>
+                                        </p:tav>
+                                        <p:tav tm="100000">
+                                          <p:val>
+                                            <p:strVal val="#ppt_h"/>
+                                          </p:val>
+                                        </p:tav>
+                                      </p:tavLst>
+                                    </p:anim>
+                                    <p:animEffect transition="in" filter="fade">
+                                      <p:cBhvr>
+                                        <p:cTn id="44" dur="500"/>
+                                        <p:tgtEl>
+                                          <p:spTgt spid="15">
+                                            <p:txEl>
+                                              <p:pRg st="0" end="0"/>
+                                            </p:txEl>
+                                          </p:spTgt>
+                                        </p:tgtEl>
+                                      </p:cBhvr>
+                                    </p:animEffect>
+                                  </p:childTnLst>
+                                </p:cTn>
+                              </p:par>
+                            </p:childTnLst>
+                          </p:cTn>
+                        </p:par>
+                      </p:childTnLst>
+                    </p:cTn>
+                  </p:par>
+                  <p:par>
+                    <p:cTn id="45" fill="hold">
+                      <p:stCondLst>
+                        <p:cond delay="indefinite"/>
+                      </p:stCondLst>
+                      <p:childTnLst>
+                        <p:par>
+                          <p:cTn id="46" fill="hold">
+                            <p:stCondLst>
+                              <p:cond delay="0"/>
+                            </p:stCondLst>
+                            <p:childTnLst>
+                              <p:par>
+                                <p:cTn id="47" presetID="53" presetClass="entr" presetSubtype="16" fill="hold" nodeType="clickEffect">
+                                  <p:stCondLst>
+                                    <p:cond delay="0"/>
+                                  </p:stCondLst>
+                                  <p:childTnLst>
+                                    <p:set>
+                                      <p:cBhvr>
+                                        <p:cTn id="48" dur="1" fill="hold">
+                                          <p:stCondLst>
+                                            <p:cond delay="0"/>
+                                          </p:stCondLst>
+                                        </p:cTn>
+                                        <p:tgtEl>
+                                          <p:spTgt spid="18">
+                                            <p:txEl>
+                                              <p:pRg st="0" end="0"/>
+                                            </p:txEl>
+                                          </p:spTgt>
+                                        </p:tgtEl>
+                                        <p:attrNameLst>
+                                          <p:attrName>style.visibility</p:attrName>
+                                        </p:attrNameLst>
+                                      </p:cBhvr>
+                                      <p:to>
+                                        <p:strVal val="visible"/>
+                                      </p:to>
+                                    </p:set>
+                                    <p:anim calcmode="lin" valueType="num">
+                                      <p:cBhvr>
+                                        <p:cTn id="49" dur="500" fill="hold"/>
+                                        <p:tgtEl>
+                                          <p:spTgt spid="18">
+                                            <p:txEl>
+                                              <p:pRg st="0" end="0"/>
+                                            </p:txEl>
+                                          </p:spTgt>
+                                        </p:tgtEl>
+                                        <p:attrNameLst>
+                                          <p:attrName>ppt_w</p:attrName>
+                                        </p:attrNameLst>
+                                      </p:cBhvr>
+                                      <p:tavLst>
+                                        <p:tav tm="0">
+                                          <p:val>
+                                            <p:fltVal val="0"/>
+                                          </p:val>
+                                        </p:tav>
+                                        <p:tav tm="100000">
+                                          <p:val>
+                                            <p:strVal val="#ppt_w"/>
+                                          </p:val>
+                                        </p:tav>
+                                      </p:tavLst>
+                                    </p:anim>
+                                    <p:anim calcmode="lin" valueType="num">
+                                      <p:cBhvr>
+                                        <p:cTn id="50" dur="500" fill="hold"/>
+                                        <p:tgtEl>
+                                          <p:spTgt spid="18">
+                                            <p:txEl>
+                                              <p:pRg st="0" end="0"/>
+                                            </p:txEl>
+                                          </p:spTgt>
+                                        </p:tgtEl>
+                                        <p:attrNameLst>
+                                          <p:attrName>ppt_h</p:attrName>
+                                        </p:attrNameLst>
+                                      </p:cBhvr>
+                                      <p:tavLst>
+                                        <p:tav tm="0">
+                                          <p:val>
+                                            <p:fltVal val="0"/>
+                                          </p:val>
+                                        </p:tav>
+                                        <p:tav tm="100000">
+                                          <p:val>
+                                            <p:strVal val="#ppt_h"/>
+                                          </p:val>
+                                        </p:tav>
+                                      </p:tavLst>
+                                    </p:anim>
+                                    <p:animEffect transition="in" filter="fade">
+                                      <p:cBhvr>
+                                        <p:cTn id="51" dur="500"/>
+                                        <p:tgtEl>
+                                          <p:spTgt spid="18">
+                                            <p:txEl>
+                                              <p:pRg st="0" end="0"/>
+                                            </p:txEl>
+                                          </p:spTgt>
+                                        </p:tgtEl>
+                                      </p:cBhvr>
+                                    </p:animEffect>
+                                  </p:childTnLst>
+                                </p:cTn>
+                              </p:par>
+                            </p:childTnLst>
+                          </p:cTn>
+                        </p:par>
+                      </p:childTnLst>
+                    </p:cTn>
+                  </p:par>
+                  <p:par>
+                    <p:cTn id="52" fill="hold">
+                      <p:stCondLst>
+                        <p:cond delay="indefinite"/>
+                      </p:stCondLst>
+                      <p:childTnLst>
+                        <p:par>
+                          <p:cTn id="53" fill="hold">
+                            <p:stCondLst>
+                              <p:cond delay="0"/>
+                            </p:stCondLst>
+                            <p:childTnLst>
+                              <p:par>
+                                <p:cTn id="54" presetID="53" presetClass="entr" presetSubtype="16" fill="hold" nodeType="clickEffect">
+                                  <p:stCondLst>
+                                    <p:cond delay="0"/>
+                                  </p:stCondLst>
+                                  <p:childTnLst>
+                                    <p:set>
+                                      <p:cBhvr>
+                                        <p:cTn id="55" dur="1" fill="hold">
+                                          <p:stCondLst>
+                                            <p:cond delay="0"/>
+                                          </p:stCondLst>
+                                        </p:cTn>
+                                        <p:tgtEl>
+                                          <p:spTgt spid="19">
+                                            <p:txEl>
+                                              <p:pRg st="0" end="0"/>
+                                            </p:txEl>
+                                          </p:spTgt>
+                                        </p:tgtEl>
+                                        <p:attrNameLst>
+                                          <p:attrName>style.visibility</p:attrName>
+                                        </p:attrNameLst>
+                                      </p:cBhvr>
+                                      <p:to>
+                                        <p:strVal val="visible"/>
+                                      </p:to>
+                                    </p:set>
+                                    <p:anim calcmode="lin" valueType="num">
+                                      <p:cBhvr>
+                                        <p:cTn id="56" dur="500" fill="hold"/>
+                                        <p:tgtEl>
+                                          <p:spTgt spid="19">
+                                            <p:txEl>
+                                              <p:pRg st="0" end="0"/>
+                                            </p:txEl>
+                                          </p:spTgt>
+                                        </p:tgtEl>
+                                        <p:attrNameLst>
+                                          <p:attrName>ppt_w</p:attrName>
+                                        </p:attrNameLst>
+                                      </p:cBhvr>
+                                      <p:tavLst>
+                                        <p:tav tm="0">
+                                          <p:val>
+                                            <p:fltVal val="0"/>
+                                          </p:val>
+                                        </p:tav>
+                                        <p:tav tm="100000">
+                                          <p:val>
+                                            <p:strVal val="#ppt_w"/>
+                                          </p:val>
+                                        </p:tav>
+                                      </p:tavLst>
+                                    </p:anim>
+                                    <p:anim calcmode="lin" valueType="num">
+                                      <p:cBhvr>
+                                        <p:cTn id="57" dur="500" fill="hold"/>
+                                        <p:tgtEl>
+                                          <p:spTgt spid="19">
+                                            <p:txEl>
+                                              <p:pRg st="0" end="0"/>
+                                            </p:txEl>
+                                          </p:spTgt>
+                                        </p:tgtEl>
+                                        <p:attrNameLst>
+                                          <p:attrName>ppt_h</p:attrName>
+                                        </p:attrNameLst>
+                                      </p:cBhvr>
+                                      <p:tavLst>
+                                        <p:tav tm="0">
+                                          <p:val>
+                                            <p:fltVal val="0"/>
+                                          </p:val>
+                                        </p:tav>
+                                        <p:tav tm="100000">
+                                          <p:val>
+                                            <p:strVal val="#ppt_h"/>
+                                          </p:val>
+                                        </p:tav>
+                                      </p:tavLst>
+                                    </p:anim>
+                                    <p:animEffect transition="in" filter="fade">
+                                      <p:cBhvr>
+                                        <p:cTn id="58" dur="500"/>
+                                        <p:tgtEl>
+                                          <p:spTgt spid="19">
+                                            <p:txEl>
+                                              <p:pRg st="0" end="0"/>
+                                            </p:txEl>
+                                          </p:spTgt>
+                                        </p:tgtEl>
+                                      </p:cBhvr>
+                                    </p:animEffect>
+                                  </p:childTnLst>
+                                </p:cTn>
+                              </p:par>
+                            </p:childTnLst>
+                          </p:cTn>
+                        </p:par>
+                      </p:childTnLst>
+                    </p:cTn>
+                  </p:par>
+                </p:childTnLst>
+              </p:cTn>
+              <p:prevCondLst>
+                <p:cond evt="onPrev" delay="0">
+                  <p:tgtEl>
+                    <p:sldTgt/>
+                  </p:tgtEl>
+                </p:cond>
+              </p:prevCondLst>
+              <p:nextCondLst>
+                <p:cond evt="onNext" delay="0">
+                  <p:tgtEl>
+                    <p:sldTgt/>
+                  </p:tgtEl>
+                </p:cond>
+              </p:nextCondLst>
+            </p:seq>
+          </p:childTnLst>
+        </p:cTn>
+      </p:par>
+    </p:tnLst>
+  </p:timing>
 </p:sld>
 </file>
 
@@ -7943,6 +11148,831 @@
   <p:clrMapOvr>
     <a:masterClrMapping/>
   </p:clrMapOvr>
+  <p:transition>
+    <p:fade/>
+  </p:transition>
+  <p:timing>
+    <p:tnLst>
+      <p:par>
+        <p:cTn id="1" dur="indefinite" restart="never" nodeType="tmRoot">
+          <p:childTnLst>
+            <p:seq concurrent="1" nextAc="seek">
+              <p:cTn id="2" dur="indefinite" nodeType="mainSeq">
+                <p:childTnLst>
+                  <p:par>
+                    <p:cTn id="3" fill="hold">
+                      <p:stCondLst>
+                        <p:cond delay="indefinite"/>
+                      </p:stCondLst>
+                      <p:childTnLst>
+                        <p:par>
+                          <p:cTn id="4" fill="hold">
+                            <p:stCondLst>
+                              <p:cond delay="0"/>
+                            </p:stCondLst>
+                            <p:childTnLst>
+                              <p:par>
+                                <p:cTn id="5" presetID="53" presetClass="entr" presetSubtype="16" fill="hold" nodeType="clickEffect">
+                                  <p:stCondLst>
+                                    <p:cond delay="0"/>
+                                  </p:stCondLst>
+                                  <p:childTnLst>
+                                    <p:set>
+                                      <p:cBhvr>
+                                        <p:cTn id="6" dur="1" fill="hold">
+                                          <p:stCondLst>
+                                            <p:cond delay="0"/>
+                                          </p:stCondLst>
+                                        </p:cTn>
+                                        <p:tgtEl>
+                                          <p:spTgt spid="9">
+                                            <p:txEl>
+                                              <p:pRg st="0" end="0"/>
+                                            </p:txEl>
+                                          </p:spTgt>
+                                        </p:tgtEl>
+                                        <p:attrNameLst>
+                                          <p:attrName>style.visibility</p:attrName>
+                                        </p:attrNameLst>
+                                      </p:cBhvr>
+                                      <p:to>
+                                        <p:strVal val="visible"/>
+                                      </p:to>
+                                    </p:set>
+                                    <p:anim calcmode="lin" valueType="num">
+                                      <p:cBhvr>
+                                        <p:cTn id="7" dur="500" fill="hold"/>
+                                        <p:tgtEl>
+                                          <p:spTgt spid="9">
+                                            <p:txEl>
+                                              <p:pRg st="0" end="0"/>
+                                            </p:txEl>
+                                          </p:spTgt>
+                                        </p:tgtEl>
+                                        <p:attrNameLst>
+                                          <p:attrName>ppt_w</p:attrName>
+                                        </p:attrNameLst>
+                                      </p:cBhvr>
+                                      <p:tavLst>
+                                        <p:tav tm="0">
+                                          <p:val>
+                                            <p:fltVal val="0"/>
+                                          </p:val>
+                                        </p:tav>
+                                        <p:tav tm="100000">
+                                          <p:val>
+                                            <p:strVal val="#ppt_w"/>
+                                          </p:val>
+                                        </p:tav>
+                                      </p:tavLst>
+                                    </p:anim>
+                                    <p:anim calcmode="lin" valueType="num">
+                                      <p:cBhvr>
+                                        <p:cTn id="8" dur="500" fill="hold"/>
+                                        <p:tgtEl>
+                                          <p:spTgt spid="9">
+                                            <p:txEl>
+                                              <p:pRg st="0" end="0"/>
+                                            </p:txEl>
+                                          </p:spTgt>
+                                        </p:tgtEl>
+                                        <p:attrNameLst>
+                                          <p:attrName>ppt_h</p:attrName>
+                                        </p:attrNameLst>
+                                      </p:cBhvr>
+                                      <p:tavLst>
+                                        <p:tav tm="0">
+                                          <p:val>
+                                            <p:fltVal val="0"/>
+                                          </p:val>
+                                        </p:tav>
+                                        <p:tav tm="100000">
+                                          <p:val>
+                                            <p:strVal val="#ppt_h"/>
+                                          </p:val>
+                                        </p:tav>
+                                      </p:tavLst>
+                                    </p:anim>
+                                    <p:animEffect transition="in" filter="fade">
+                                      <p:cBhvr>
+                                        <p:cTn id="9" dur="500"/>
+                                        <p:tgtEl>
+                                          <p:spTgt spid="9">
+                                            <p:txEl>
+                                              <p:pRg st="0" end="0"/>
+                                            </p:txEl>
+                                          </p:spTgt>
+                                        </p:tgtEl>
+                                      </p:cBhvr>
+                                    </p:animEffect>
+                                  </p:childTnLst>
+                                </p:cTn>
+                              </p:par>
+                            </p:childTnLst>
+                          </p:cTn>
+                        </p:par>
+                      </p:childTnLst>
+                    </p:cTn>
+                  </p:par>
+                  <p:par>
+                    <p:cTn id="10" fill="hold">
+                      <p:stCondLst>
+                        <p:cond delay="indefinite"/>
+                      </p:stCondLst>
+                      <p:childTnLst>
+                        <p:par>
+                          <p:cTn id="11" fill="hold">
+                            <p:stCondLst>
+                              <p:cond delay="0"/>
+                            </p:stCondLst>
+                            <p:childTnLst>
+                              <p:par>
+                                <p:cTn id="12" presetID="53" presetClass="entr" presetSubtype="16" fill="hold" nodeType="clickEffect">
+                                  <p:stCondLst>
+                                    <p:cond delay="0"/>
+                                  </p:stCondLst>
+                                  <p:childTnLst>
+                                    <p:set>
+                                      <p:cBhvr>
+                                        <p:cTn id="13" dur="1" fill="hold">
+                                          <p:stCondLst>
+                                            <p:cond delay="0"/>
+                                          </p:stCondLst>
+                                        </p:cTn>
+                                        <p:tgtEl>
+                                          <p:spTgt spid="15">
+                                            <p:txEl>
+                                              <p:pRg st="0" end="0"/>
+                                            </p:txEl>
+                                          </p:spTgt>
+                                        </p:tgtEl>
+                                        <p:attrNameLst>
+                                          <p:attrName>style.visibility</p:attrName>
+                                        </p:attrNameLst>
+                                      </p:cBhvr>
+                                      <p:to>
+                                        <p:strVal val="visible"/>
+                                      </p:to>
+                                    </p:set>
+                                    <p:anim calcmode="lin" valueType="num">
+                                      <p:cBhvr>
+                                        <p:cTn id="14" dur="500" fill="hold"/>
+                                        <p:tgtEl>
+                                          <p:spTgt spid="15">
+                                            <p:txEl>
+                                              <p:pRg st="0" end="0"/>
+                                            </p:txEl>
+                                          </p:spTgt>
+                                        </p:tgtEl>
+                                        <p:attrNameLst>
+                                          <p:attrName>ppt_w</p:attrName>
+                                        </p:attrNameLst>
+                                      </p:cBhvr>
+                                      <p:tavLst>
+                                        <p:tav tm="0">
+                                          <p:val>
+                                            <p:fltVal val="0"/>
+                                          </p:val>
+                                        </p:tav>
+                                        <p:tav tm="100000">
+                                          <p:val>
+                                            <p:strVal val="#ppt_w"/>
+                                          </p:val>
+                                        </p:tav>
+                                      </p:tavLst>
+                                    </p:anim>
+                                    <p:anim calcmode="lin" valueType="num">
+                                      <p:cBhvr>
+                                        <p:cTn id="15" dur="500" fill="hold"/>
+                                        <p:tgtEl>
+                                          <p:spTgt spid="15">
+                                            <p:txEl>
+                                              <p:pRg st="0" end="0"/>
+                                            </p:txEl>
+                                          </p:spTgt>
+                                        </p:tgtEl>
+                                        <p:attrNameLst>
+                                          <p:attrName>ppt_h</p:attrName>
+                                        </p:attrNameLst>
+                                      </p:cBhvr>
+                                      <p:tavLst>
+                                        <p:tav tm="0">
+                                          <p:val>
+                                            <p:fltVal val="0"/>
+                                          </p:val>
+                                        </p:tav>
+                                        <p:tav tm="100000">
+                                          <p:val>
+                                            <p:strVal val="#ppt_h"/>
+                                          </p:val>
+                                        </p:tav>
+                                      </p:tavLst>
+                                    </p:anim>
+                                    <p:animEffect transition="in" filter="fade">
+                                      <p:cBhvr>
+                                        <p:cTn id="16" dur="500"/>
+                                        <p:tgtEl>
+                                          <p:spTgt spid="15">
+                                            <p:txEl>
+                                              <p:pRg st="0" end="0"/>
+                                            </p:txEl>
+                                          </p:spTgt>
+                                        </p:tgtEl>
+                                      </p:cBhvr>
+                                    </p:animEffect>
+                                  </p:childTnLst>
+                                </p:cTn>
+                              </p:par>
+                            </p:childTnLst>
+                          </p:cTn>
+                        </p:par>
+                      </p:childTnLst>
+                    </p:cTn>
+                  </p:par>
+                  <p:par>
+                    <p:cTn id="17" fill="hold">
+                      <p:stCondLst>
+                        <p:cond delay="indefinite"/>
+                      </p:stCondLst>
+                      <p:childTnLst>
+                        <p:par>
+                          <p:cTn id="18" fill="hold">
+                            <p:stCondLst>
+                              <p:cond delay="0"/>
+                            </p:stCondLst>
+                            <p:childTnLst>
+                              <p:par>
+                                <p:cTn id="19" presetID="53" presetClass="entr" presetSubtype="16" fill="hold" nodeType="clickEffect">
+                                  <p:stCondLst>
+                                    <p:cond delay="0"/>
+                                  </p:stCondLst>
+                                  <p:childTnLst>
+                                    <p:set>
+                                      <p:cBhvr>
+                                        <p:cTn id="20" dur="1" fill="hold">
+                                          <p:stCondLst>
+                                            <p:cond delay="0"/>
+                                          </p:stCondLst>
+                                        </p:cTn>
+                                        <p:tgtEl>
+                                          <p:spTgt spid="10">
+                                            <p:txEl>
+                                              <p:pRg st="0" end="0"/>
+                                            </p:txEl>
+                                          </p:spTgt>
+                                        </p:tgtEl>
+                                        <p:attrNameLst>
+                                          <p:attrName>style.visibility</p:attrName>
+                                        </p:attrNameLst>
+                                      </p:cBhvr>
+                                      <p:to>
+                                        <p:strVal val="visible"/>
+                                      </p:to>
+                                    </p:set>
+                                    <p:anim calcmode="lin" valueType="num">
+                                      <p:cBhvr>
+                                        <p:cTn id="21" dur="500" fill="hold"/>
+                                        <p:tgtEl>
+                                          <p:spTgt spid="10">
+                                            <p:txEl>
+                                              <p:pRg st="0" end="0"/>
+                                            </p:txEl>
+                                          </p:spTgt>
+                                        </p:tgtEl>
+                                        <p:attrNameLst>
+                                          <p:attrName>ppt_w</p:attrName>
+                                        </p:attrNameLst>
+                                      </p:cBhvr>
+                                      <p:tavLst>
+                                        <p:tav tm="0">
+                                          <p:val>
+                                            <p:fltVal val="0"/>
+                                          </p:val>
+                                        </p:tav>
+                                        <p:tav tm="100000">
+                                          <p:val>
+                                            <p:strVal val="#ppt_w"/>
+                                          </p:val>
+                                        </p:tav>
+                                      </p:tavLst>
+                                    </p:anim>
+                                    <p:anim calcmode="lin" valueType="num">
+                                      <p:cBhvr>
+                                        <p:cTn id="22" dur="500" fill="hold"/>
+                                        <p:tgtEl>
+                                          <p:spTgt spid="10">
+                                            <p:txEl>
+                                              <p:pRg st="0" end="0"/>
+                                            </p:txEl>
+                                          </p:spTgt>
+                                        </p:tgtEl>
+                                        <p:attrNameLst>
+                                          <p:attrName>ppt_h</p:attrName>
+                                        </p:attrNameLst>
+                                      </p:cBhvr>
+                                      <p:tavLst>
+                                        <p:tav tm="0">
+                                          <p:val>
+                                            <p:fltVal val="0"/>
+                                          </p:val>
+                                        </p:tav>
+                                        <p:tav tm="100000">
+                                          <p:val>
+                                            <p:strVal val="#ppt_h"/>
+                                          </p:val>
+                                        </p:tav>
+                                      </p:tavLst>
+                                    </p:anim>
+                                    <p:animEffect transition="in" filter="fade">
+                                      <p:cBhvr>
+                                        <p:cTn id="23" dur="500"/>
+                                        <p:tgtEl>
+                                          <p:spTgt spid="10">
+                                            <p:txEl>
+                                              <p:pRg st="0" end="0"/>
+                                            </p:txEl>
+                                          </p:spTgt>
+                                        </p:tgtEl>
+                                      </p:cBhvr>
+                                    </p:animEffect>
+                                  </p:childTnLst>
+                                </p:cTn>
+                              </p:par>
+                            </p:childTnLst>
+                          </p:cTn>
+                        </p:par>
+                      </p:childTnLst>
+                    </p:cTn>
+                  </p:par>
+                  <p:par>
+                    <p:cTn id="24" fill="hold">
+                      <p:stCondLst>
+                        <p:cond delay="indefinite"/>
+                      </p:stCondLst>
+                      <p:childTnLst>
+                        <p:par>
+                          <p:cTn id="25" fill="hold">
+                            <p:stCondLst>
+                              <p:cond delay="0"/>
+                            </p:stCondLst>
+                            <p:childTnLst>
+                              <p:par>
+                                <p:cTn id="26" presetID="53" presetClass="entr" presetSubtype="16" fill="hold" nodeType="clickEffect">
+                                  <p:stCondLst>
+                                    <p:cond delay="0"/>
+                                  </p:stCondLst>
+                                  <p:childTnLst>
+                                    <p:set>
+                                      <p:cBhvr>
+                                        <p:cTn id="27" dur="1" fill="hold">
+                                          <p:stCondLst>
+                                            <p:cond delay="0"/>
+                                          </p:stCondLst>
+                                        </p:cTn>
+                                        <p:tgtEl>
+                                          <p:spTgt spid="16">
+                                            <p:txEl>
+                                              <p:pRg st="0" end="0"/>
+                                            </p:txEl>
+                                          </p:spTgt>
+                                        </p:tgtEl>
+                                        <p:attrNameLst>
+                                          <p:attrName>style.visibility</p:attrName>
+                                        </p:attrNameLst>
+                                      </p:cBhvr>
+                                      <p:to>
+                                        <p:strVal val="visible"/>
+                                      </p:to>
+                                    </p:set>
+                                    <p:anim calcmode="lin" valueType="num">
+                                      <p:cBhvr>
+                                        <p:cTn id="28" dur="500" fill="hold"/>
+                                        <p:tgtEl>
+                                          <p:spTgt spid="16">
+                                            <p:txEl>
+                                              <p:pRg st="0" end="0"/>
+                                            </p:txEl>
+                                          </p:spTgt>
+                                        </p:tgtEl>
+                                        <p:attrNameLst>
+                                          <p:attrName>ppt_w</p:attrName>
+                                        </p:attrNameLst>
+                                      </p:cBhvr>
+                                      <p:tavLst>
+                                        <p:tav tm="0">
+                                          <p:val>
+                                            <p:fltVal val="0"/>
+                                          </p:val>
+                                        </p:tav>
+                                        <p:tav tm="100000">
+                                          <p:val>
+                                            <p:strVal val="#ppt_w"/>
+                                          </p:val>
+                                        </p:tav>
+                                      </p:tavLst>
+                                    </p:anim>
+                                    <p:anim calcmode="lin" valueType="num">
+                                      <p:cBhvr>
+                                        <p:cTn id="29" dur="500" fill="hold"/>
+                                        <p:tgtEl>
+                                          <p:spTgt spid="16">
+                                            <p:txEl>
+                                              <p:pRg st="0" end="0"/>
+                                            </p:txEl>
+                                          </p:spTgt>
+                                        </p:tgtEl>
+                                        <p:attrNameLst>
+                                          <p:attrName>ppt_h</p:attrName>
+                                        </p:attrNameLst>
+                                      </p:cBhvr>
+                                      <p:tavLst>
+                                        <p:tav tm="0">
+                                          <p:val>
+                                            <p:fltVal val="0"/>
+                                          </p:val>
+                                        </p:tav>
+                                        <p:tav tm="100000">
+                                          <p:val>
+                                            <p:strVal val="#ppt_h"/>
+                                          </p:val>
+                                        </p:tav>
+                                      </p:tavLst>
+                                    </p:anim>
+                                    <p:animEffect transition="in" filter="fade">
+                                      <p:cBhvr>
+                                        <p:cTn id="30" dur="500"/>
+                                        <p:tgtEl>
+                                          <p:spTgt spid="16">
+                                            <p:txEl>
+                                              <p:pRg st="0" end="0"/>
+                                            </p:txEl>
+                                          </p:spTgt>
+                                        </p:tgtEl>
+                                      </p:cBhvr>
+                                    </p:animEffect>
+                                  </p:childTnLst>
+                                </p:cTn>
+                              </p:par>
+                            </p:childTnLst>
+                          </p:cTn>
+                        </p:par>
+                      </p:childTnLst>
+                    </p:cTn>
+                  </p:par>
+                  <p:par>
+                    <p:cTn id="31" fill="hold">
+                      <p:stCondLst>
+                        <p:cond delay="indefinite"/>
+                      </p:stCondLst>
+                      <p:childTnLst>
+                        <p:par>
+                          <p:cTn id="32" fill="hold">
+                            <p:stCondLst>
+                              <p:cond delay="0"/>
+                            </p:stCondLst>
+                            <p:childTnLst>
+                              <p:par>
+                                <p:cTn id="33" presetID="53" presetClass="entr" presetSubtype="16" fill="hold" grpId="0" nodeType="clickEffect">
+                                  <p:stCondLst>
+                                    <p:cond delay="0"/>
+                                  </p:stCondLst>
+                                  <p:childTnLst>
+                                    <p:set>
+                                      <p:cBhvr>
+                                        <p:cTn id="34" dur="1" fill="hold">
+                                          <p:stCondLst>
+                                            <p:cond delay="0"/>
+                                          </p:stCondLst>
+                                        </p:cTn>
+                                        <p:tgtEl>
+                                          <p:spTgt spid="17"/>
+                                        </p:tgtEl>
+                                        <p:attrNameLst>
+                                          <p:attrName>style.visibility</p:attrName>
+                                        </p:attrNameLst>
+                                      </p:cBhvr>
+                                      <p:to>
+                                        <p:strVal val="visible"/>
+                                      </p:to>
+                                    </p:set>
+                                    <p:anim calcmode="lin" valueType="num">
+                                      <p:cBhvr>
+                                        <p:cTn id="35" dur="500" fill="hold"/>
+                                        <p:tgtEl>
+                                          <p:spTgt spid="17"/>
+                                        </p:tgtEl>
+                                        <p:attrNameLst>
+                                          <p:attrName>ppt_w</p:attrName>
+                                        </p:attrNameLst>
+                                      </p:cBhvr>
+                                      <p:tavLst>
+                                        <p:tav tm="0">
+                                          <p:val>
+                                            <p:fltVal val="0"/>
+                                          </p:val>
+                                        </p:tav>
+                                        <p:tav tm="100000">
+                                          <p:val>
+                                            <p:strVal val="#ppt_w"/>
+                                          </p:val>
+                                        </p:tav>
+                                      </p:tavLst>
+                                    </p:anim>
+                                    <p:anim calcmode="lin" valueType="num">
+                                      <p:cBhvr>
+                                        <p:cTn id="36" dur="500" fill="hold"/>
+                                        <p:tgtEl>
+                                          <p:spTgt spid="17"/>
+                                        </p:tgtEl>
+                                        <p:attrNameLst>
+                                          <p:attrName>ppt_h</p:attrName>
+                                        </p:attrNameLst>
+                                      </p:cBhvr>
+                                      <p:tavLst>
+                                        <p:tav tm="0">
+                                          <p:val>
+                                            <p:fltVal val="0"/>
+                                          </p:val>
+                                        </p:tav>
+                                        <p:tav tm="100000">
+                                          <p:val>
+                                            <p:strVal val="#ppt_h"/>
+                                          </p:val>
+                                        </p:tav>
+                                      </p:tavLst>
+                                    </p:anim>
+                                    <p:animEffect transition="in" filter="fade">
+                                      <p:cBhvr>
+                                        <p:cTn id="37" dur="500"/>
+                                        <p:tgtEl>
+                                          <p:spTgt spid="17"/>
+                                        </p:tgtEl>
+                                      </p:cBhvr>
+                                    </p:animEffect>
+                                  </p:childTnLst>
+                                </p:cTn>
+                              </p:par>
+                            </p:childTnLst>
+                          </p:cTn>
+                        </p:par>
+                      </p:childTnLst>
+                    </p:cTn>
+                  </p:par>
+                  <p:par>
+                    <p:cTn id="38" fill="hold">
+                      <p:stCondLst>
+                        <p:cond delay="indefinite"/>
+                      </p:stCondLst>
+                      <p:childTnLst>
+                        <p:par>
+                          <p:cTn id="39" fill="hold">
+                            <p:stCondLst>
+                              <p:cond delay="0"/>
+                            </p:stCondLst>
+                            <p:childTnLst>
+                              <p:par>
+                                <p:cTn id="40" presetID="53" presetClass="entr" presetSubtype="16" fill="hold" nodeType="clickEffect">
+                                  <p:stCondLst>
+                                    <p:cond delay="0"/>
+                                  </p:stCondLst>
+                                  <p:childTnLst>
+                                    <p:set>
+                                      <p:cBhvr>
+                                        <p:cTn id="41" dur="1" fill="hold">
+                                          <p:stCondLst>
+                                            <p:cond delay="0"/>
+                                          </p:stCondLst>
+                                        </p:cTn>
+                                        <p:tgtEl>
+                                          <p:spTgt spid="18">
+                                            <p:txEl>
+                                              <p:pRg st="0" end="0"/>
+                                            </p:txEl>
+                                          </p:spTgt>
+                                        </p:tgtEl>
+                                        <p:attrNameLst>
+                                          <p:attrName>style.visibility</p:attrName>
+                                        </p:attrNameLst>
+                                      </p:cBhvr>
+                                      <p:to>
+                                        <p:strVal val="visible"/>
+                                      </p:to>
+                                    </p:set>
+                                    <p:anim calcmode="lin" valueType="num">
+                                      <p:cBhvr>
+                                        <p:cTn id="42" dur="500" fill="hold"/>
+                                        <p:tgtEl>
+                                          <p:spTgt spid="18">
+                                            <p:txEl>
+                                              <p:pRg st="0" end="0"/>
+                                            </p:txEl>
+                                          </p:spTgt>
+                                        </p:tgtEl>
+                                        <p:attrNameLst>
+                                          <p:attrName>ppt_w</p:attrName>
+                                        </p:attrNameLst>
+                                      </p:cBhvr>
+                                      <p:tavLst>
+                                        <p:tav tm="0">
+                                          <p:val>
+                                            <p:fltVal val="0"/>
+                                          </p:val>
+                                        </p:tav>
+                                        <p:tav tm="100000">
+                                          <p:val>
+                                            <p:strVal val="#ppt_w"/>
+                                          </p:val>
+                                        </p:tav>
+                                      </p:tavLst>
+                                    </p:anim>
+                                    <p:anim calcmode="lin" valueType="num">
+                                      <p:cBhvr>
+                                        <p:cTn id="43" dur="500" fill="hold"/>
+                                        <p:tgtEl>
+                                          <p:spTgt spid="18">
+                                            <p:txEl>
+                                              <p:pRg st="0" end="0"/>
+                                            </p:txEl>
+                                          </p:spTgt>
+                                        </p:tgtEl>
+                                        <p:attrNameLst>
+                                          <p:attrName>ppt_h</p:attrName>
+                                        </p:attrNameLst>
+                                      </p:cBhvr>
+                                      <p:tavLst>
+                                        <p:tav tm="0">
+                                          <p:val>
+                                            <p:fltVal val="0"/>
+                                          </p:val>
+                                        </p:tav>
+                                        <p:tav tm="100000">
+                                          <p:val>
+                                            <p:strVal val="#ppt_h"/>
+                                          </p:val>
+                                        </p:tav>
+                                      </p:tavLst>
+                                    </p:anim>
+                                    <p:animEffect transition="in" filter="fade">
+                                      <p:cBhvr>
+                                        <p:cTn id="44" dur="500"/>
+                                        <p:tgtEl>
+                                          <p:spTgt spid="18">
+                                            <p:txEl>
+                                              <p:pRg st="0" end="0"/>
+                                            </p:txEl>
+                                          </p:spTgt>
+                                        </p:tgtEl>
+                                      </p:cBhvr>
+                                    </p:animEffect>
+                                  </p:childTnLst>
+                                </p:cTn>
+                              </p:par>
+                            </p:childTnLst>
+                          </p:cTn>
+                        </p:par>
+                      </p:childTnLst>
+                    </p:cTn>
+                  </p:par>
+                  <p:par>
+                    <p:cTn id="45" fill="hold">
+                      <p:stCondLst>
+                        <p:cond delay="indefinite"/>
+                      </p:stCondLst>
+                      <p:childTnLst>
+                        <p:par>
+                          <p:cTn id="46" fill="hold">
+                            <p:stCondLst>
+                              <p:cond delay="0"/>
+                            </p:stCondLst>
+                            <p:childTnLst>
+                              <p:par>
+                                <p:cTn id="47" presetID="53" presetClass="entr" presetSubtype="16" fill="hold" nodeType="clickEffect">
+                                  <p:stCondLst>
+                                    <p:cond delay="0"/>
+                                  </p:stCondLst>
+                                  <p:childTnLst>
+                                    <p:set>
+                                      <p:cBhvr>
+                                        <p:cTn id="48" dur="1" fill="hold">
+                                          <p:stCondLst>
+                                            <p:cond delay="0"/>
+                                          </p:stCondLst>
+                                        </p:cTn>
+                                        <p:tgtEl>
+                                          <p:spTgt spid="19">
+                                            <p:txEl>
+                                              <p:pRg st="0" end="0"/>
+                                            </p:txEl>
+                                          </p:spTgt>
+                                        </p:tgtEl>
+                                        <p:attrNameLst>
+                                          <p:attrName>style.visibility</p:attrName>
+                                        </p:attrNameLst>
+                                      </p:cBhvr>
+                                      <p:to>
+                                        <p:strVal val="visible"/>
+                                      </p:to>
+                                    </p:set>
+                                    <p:anim calcmode="lin" valueType="num">
+                                      <p:cBhvr>
+                                        <p:cTn id="49" dur="500" fill="hold"/>
+                                        <p:tgtEl>
+                                          <p:spTgt spid="19">
+                                            <p:txEl>
+                                              <p:pRg st="0" end="0"/>
+                                            </p:txEl>
+                                          </p:spTgt>
+                                        </p:tgtEl>
+                                        <p:attrNameLst>
+                                          <p:attrName>ppt_w</p:attrName>
+                                        </p:attrNameLst>
+                                      </p:cBhvr>
+                                      <p:tavLst>
+                                        <p:tav tm="0">
+                                          <p:val>
+                                            <p:fltVal val="0"/>
+                                          </p:val>
+                                        </p:tav>
+                                        <p:tav tm="100000">
+                                          <p:val>
+                                            <p:strVal val="#ppt_w"/>
+                                          </p:val>
+                                        </p:tav>
+                                      </p:tavLst>
+                                    </p:anim>
+                                    <p:anim calcmode="lin" valueType="num">
+                                      <p:cBhvr>
+                                        <p:cTn id="50" dur="500" fill="hold"/>
+                                        <p:tgtEl>
+                                          <p:spTgt spid="19">
+                                            <p:txEl>
+                                              <p:pRg st="0" end="0"/>
+                                            </p:txEl>
+                                          </p:spTgt>
+                                        </p:tgtEl>
+                                        <p:attrNameLst>
+                                          <p:attrName>ppt_h</p:attrName>
+                                        </p:attrNameLst>
+                                      </p:cBhvr>
+                                      <p:tavLst>
+                                        <p:tav tm="0">
+                                          <p:val>
+                                            <p:fltVal val="0"/>
+                                          </p:val>
+                                        </p:tav>
+                                        <p:tav tm="100000">
+                                          <p:val>
+                                            <p:strVal val="#ppt_h"/>
+                                          </p:val>
+                                        </p:tav>
+                                      </p:tavLst>
+                                    </p:anim>
+                                    <p:animEffect transition="in" filter="fade">
+                                      <p:cBhvr>
+                                        <p:cTn id="51" dur="500"/>
+                                        <p:tgtEl>
+                                          <p:spTgt spid="19">
+                                            <p:txEl>
+                                              <p:pRg st="0" end="0"/>
+                                            </p:txEl>
+                                          </p:spTgt>
+                                        </p:tgtEl>
+                                      </p:cBhvr>
+                                    </p:animEffect>
+                                  </p:childTnLst>
+                                </p:cTn>
+                              </p:par>
+                            </p:childTnLst>
+                          </p:cTn>
+                        </p:par>
+                      </p:childTnLst>
+                    </p:cTn>
+                  </p:par>
+                </p:childTnLst>
+              </p:cTn>
+              <p:prevCondLst>
+                <p:cond evt="onPrev" delay="0">
+                  <p:tgtEl>
+                    <p:sldTgt/>
+                  </p:tgtEl>
+                </p:cond>
+              </p:prevCondLst>
+              <p:nextCondLst>
+                <p:cond evt="onNext" delay="0">
+                  <p:tgtEl>
+                    <p:sldTgt/>
+                  </p:tgtEl>
+                </p:cond>
+              </p:nextCondLst>
+            </p:seq>
+          </p:childTnLst>
+        </p:cTn>
+      </p:par>
+    </p:tnLst>
+    <p:bldLst>
+      <p:bldP spid="17" grpId="0" animBg="1"/>
+    </p:bldLst>
+  </p:timing>
 </p:sld>
 </file>
 
@@ -8139,11 +12169,10 @@
           <a:bodyPr wrap="square" lIns="0" tIns="0" rIns="0" bIns="0" rtlCol="0" anchor="t"/>
           <a:lstStyle/>
           <a:p>
-            <a:pPr marL="0" indent="0" algn="l">
+            <a:pPr>
               <a:lnSpc>
                 <a:spcPts val="1700"/>
               </a:lnSpc>
-              <a:buNone/>
             </a:pPr>
             <a:r>
               <a:rPr lang="en-US" sz="1250" dirty="0">
@@ -8154,8 +12183,23 @@
                 <a:ea typeface="Inter" pitchFamily="34" charset="-122"/>
                 <a:cs typeface="Inter" pitchFamily="34" charset="-120"/>
               </a:rPr>
-              <a:t>Early prototypes tried to spot handoff moments by reading free-text responses. When smaller models changed the wording or skipped the cue, the referral flow could break.</a:t>
+              <a:t>Unreliable Referral Behavior - Mimic the r</a:t>
             </a:r>
+            <a:r>
+              <a:rPr lang="en-US" sz="1400" dirty="0">
+                <a:effectLst/>
+                <a:latin typeface="Helvetica Neue" panose="02000503000000020004" pitchFamily="2" charset="0"/>
+              </a:rPr>
+              <a:t>eal clinical setting</a:t>
+            </a:r>
+          </a:p>
+          <a:p>
+            <a:pPr marL="0" indent="0" algn="l">
+              <a:lnSpc>
+                <a:spcPts val="1700"/>
+              </a:lnSpc>
+              <a:buNone/>
+            </a:pPr>
             <a:endParaRPr lang="en-US" sz="1250" dirty="0"/>
           </a:p>
         </p:txBody>
@@ -8643,6 +12687,1145 @@
   <p:clrMapOvr>
     <a:masterClrMapping/>
   </p:clrMapOvr>
+  <p:transition>
+    <p:fade/>
+  </p:transition>
+  <p:timing>
+    <p:tnLst>
+      <p:par>
+        <p:cTn id="1" dur="indefinite" restart="never" nodeType="tmRoot">
+          <p:childTnLst>
+            <p:seq concurrent="1" nextAc="seek">
+              <p:cTn id="2" dur="indefinite" nodeType="mainSeq">
+                <p:childTnLst>
+                  <p:par>
+                    <p:cTn id="3" fill="hold">
+                      <p:stCondLst>
+                        <p:cond delay="indefinite"/>
+                      </p:stCondLst>
+                      <p:childTnLst>
+                        <p:par>
+                          <p:cTn id="4" fill="hold">
+                            <p:stCondLst>
+                              <p:cond delay="0"/>
+                            </p:stCondLst>
+                            <p:childTnLst>
+                              <p:par>
+                                <p:cTn id="5" presetID="53" presetClass="entr" presetSubtype="16" fill="hold" grpId="0" nodeType="clickEffect">
+                                  <p:stCondLst>
+                                    <p:cond delay="0"/>
+                                  </p:stCondLst>
+                                  <p:childTnLst>
+                                    <p:set>
+                                      <p:cBhvr>
+                                        <p:cTn id="6" dur="1" fill="hold">
+                                          <p:stCondLst>
+                                            <p:cond delay="0"/>
+                                          </p:stCondLst>
+                                        </p:cTn>
+                                        <p:tgtEl>
+                                          <p:spTgt spid="7"/>
+                                        </p:tgtEl>
+                                        <p:attrNameLst>
+                                          <p:attrName>style.visibility</p:attrName>
+                                        </p:attrNameLst>
+                                      </p:cBhvr>
+                                      <p:to>
+                                        <p:strVal val="visible"/>
+                                      </p:to>
+                                    </p:set>
+                                    <p:anim calcmode="lin" valueType="num">
+                                      <p:cBhvr>
+                                        <p:cTn id="7" dur="500" fill="hold"/>
+                                        <p:tgtEl>
+                                          <p:spTgt spid="7"/>
+                                        </p:tgtEl>
+                                        <p:attrNameLst>
+                                          <p:attrName>ppt_w</p:attrName>
+                                        </p:attrNameLst>
+                                      </p:cBhvr>
+                                      <p:tavLst>
+                                        <p:tav tm="0">
+                                          <p:val>
+                                            <p:fltVal val="0"/>
+                                          </p:val>
+                                        </p:tav>
+                                        <p:tav tm="100000">
+                                          <p:val>
+                                            <p:strVal val="#ppt_w"/>
+                                          </p:val>
+                                        </p:tav>
+                                      </p:tavLst>
+                                    </p:anim>
+                                    <p:anim calcmode="lin" valueType="num">
+                                      <p:cBhvr>
+                                        <p:cTn id="8" dur="500" fill="hold"/>
+                                        <p:tgtEl>
+                                          <p:spTgt spid="7"/>
+                                        </p:tgtEl>
+                                        <p:attrNameLst>
+                                          <p:attrName>ppt_h</p:attrName>
+                                        </p:attrNameLst>
+                                      </p:cBhvr>
+                                      <p:tavLst>
+                                        <p:tav tm="0">
+                                          <p:val>
+                                            <p:fltVal val="0"/>
+                                          </p:val>
+                                        </p:tav>
+                                        <p:tav tm="100000">
+                                          <p:val>
+                                            <p:strVal val="#ppt_h"/>
+                                          </p:val>
+                                        </p:tav>
+                                      </p:tavLst>
+                                    </p:anim>
+                                    <p:animEffect transition="in" filter="fade">
+                                      <p:cBhvr>
+                                        <p:cTn id="9" dur="500"/>
+                                        <p:tgtEl>
+                                          <p:spTgt spid="7"/>
+                                        </p:tgtEl>
+                                      </p:cBhvr>
+                                    </p:animEffect>
+                                  </p:childTnLst>
+                                </p:cTn>
+                              </p:par>
+                            </p:childTnLst>
+                          </p:cTn>
+                        </p:par>
+                      </p:childTnLst>
+                    </p:cTn>
+                  </p:par>
+                  <p:par>
+                    <p:cTn id="10" fill="hold">
+                      <p:stCondLst>
+                        <p:cond delay="indefinite"/>
+                      </p:stCondLst>
+                      <p:childTnLst>
+                        <p:par>
+                          <p:cTn id="11" fill="hold">
+                            <p:stCondLst>
+                              <p:cond delay="0"/>
+                            </p:stCondLst>
+                            <p:childTnLst>
+                              <p:par>
+                                <p:cTn id="12" presetID="53" presetClass="entr" presetSubtype="16" fill="hold" nodeType="clickEffect">
+                                  <p:stCondLst>
+                                    <p:cond delay="0"/>
+                                  </p:stCondLst>
+                                  <p:childTnLst>
+                                    <p:set>
+                                      <p:cBhvr>
+                                        <p:cTn id="13" dur="1" fill="hold">
+                                          <p:stCondLst>
+                                            <p:cond delay="0"/>
+                                          </p:stCondLst>
+                                        </p:cTn>
+                                        <p:tgtEl>
+                                          <p:spTgt spid="8">
+                                            <p:txEl>
+                                              <p:pRg st="0" end="0"/>
+                                            </p:txEl>
+                                          </p:spTgt>
+                                        </p:tgtEl>
+                                        <p:attrNameLst>
+                                          <p:attrName>style.visibility</p:attrName>
+                                        </p:attrNameLst>
+                                      </p:cBhvr>
+                                      <p:to>
+                                        <p:strVal val="visible"/>
+                                      </p:to>
+                                    </p:set>
+                                    <p:anim calcmode="lin" valueType="num">
+                                      <p:cBhvr>
+                                        <p:cTn id="14" dur="500" fill="hold"/>
+                                        <p:tgtEl>
+                                          <p:spTgt spid="8">
+                                            <p:txEl>
+                                              <p:pRg st="0" end="0"/>
+                                            </p:txEl>
+                                          </p:spTgt>
+                                        </p:tgtEl>
+                                        <p:attrNameLst>
+                                          <p:attrName>ppt_w</p:attrName>
+                                        </p:attrNameLst>
+                                      </p:cBhvr>
+                                      <p:tavLst>
+                                        <p:tav tm="0">
+                                          <p:val>
+                                            <p:fltVal val="0"/>
+                                          </p:val>
+                                        </p:tav>
+                                        <p:tav tm="100000">
+                                          <p:val>
+                                            <p:strVal val="#ppt_w"/>
+                                          </p:val>
+                                        </p:tav>
+                                      </p:tavLst>
+                                    </p:anim>
+                                    <p:anim calcmode="lin" valueType="num">
+                                      <p:cBhvr>
+                                        <p:cTn id="15" dur="500" fill="hold"/>
+                                        <p:tgtEl>
+                                          <p:spTgt spid="8">
+                                            <p:txEl>
+                                              <p:pRg st="0" end="0"/>
+                                            </p:txEl>
+                                          </p:spTgt>
+                                        </p:tgtEl>
+                                        <p:attrNameLst>
+                                          <p:attrName>ppt_h</p:attrName>
+                                        </p:attrNameLst>
+                                      </p:cBhvr>
+                                      <p:tavLst>
+                                        <p:tav tm="0">
+                                          <p:val>
+                                            <p:fltVal val="0"/>
+                                          </p:val>
+                                        </p:tav>
+                                        <p:tav tm="100000">
+                                          <p:val>
+                                            <p:strVal val="#ppt_h"/>
+                                          </p:val>
+                                        </p:tav>
+                                      </p:tavLst>
+                                    </p:anim>
+                                    <p:animEffect transition="in" filter="fade">
+                                      <p:cBhvr>
+                                        <p:cTn id="16" dur="500"/>
+                                        <p:tgtEl>
+                                          <p:spTgt spid="8">
+                                            <p:txEl>
+                                              <p:pRg st="0" end="0"/>
+                                            </p:txEl>
+                                          </p:spTgt>
+                                        </p:tgtEl>
+                                      </p:cBhvr>
+                                    </p:animEffect>
+                                  </p:childTnLst>
+                                </p:cTn>
+                              </p:par>
+                            </p:childTnLst>
+                          </p:cTn>
+                        </p:par>
+                      </p:childTnLst>
+                    </p:cTn>
+                  </p:par>
+                  <p:par>
+                    <p:cTn id="17" fill="hold">
+                      <p:stCondLst>
+                        <p:cond delay="indefinite"/>
+                      </p:stCondLst>
+                      <p:childTnLst>
+                        <p:par>
+                          <p:cTn id="18" fill="hold">
+                            <p:stCondLst>
+                              <p:cond delay="0"/>
+                            </p:stCondLst>
+                            <p:childTnLst>
+                              <p:par>
+                                <p:cTn id="19" presetID="53" presetClass="entr" presetSubtype="16" fill="hold" nodeType="clickEffect">
+                                  <p:stCondLst>
+                                    <p:cond delay="0"/>
+                                  </p:stCondLst>
+                                  <p:childTnLst>
+                                    <p:set>
+                                      <p:cBhvr>
+                                        <p:cTn id="20" dur="1" fill="hold">
+                                          <p:stCondLst>
+                                            <p:cond delay="0"/>
+                                          </p:stCondLst>
+                                        </p:cTn>
+                                        <p:tgtEl>
+                                          <p:spTgt spid="9">
+                                            <p:txEl>
+                                              <p:pRg st="0" end="0"/>
+                                            </p:txEl>
+                                          </p:spTgt>
+                                        </p:tgtEl>
+                                        <p:attrNameLst>
+                                          <p:attrName>style.visibility</p:attrName>
+                                        </p:attrNameLst>
+                                      </p:cBhvr>
+                                      <p:to>
+                                        <p:strVal val="visible"/>
+                                      </p:to>
+                                    </p:set>
+                                    <p:anim calcmode="lin" valueType="num">
+                                      <p:cBhvr>
+                                        <p:cTn id="21" dur="500" fill="hold"/>
+                                        <p:tgtEl>
+                                          <p:spTgt spid="9">
+                                            <p:txEl>
+                                              <p:pRg st="0" end="0"/>
+                                            </p:txEl>
+                                          </p:spTgt>
+                                        </p:tgtEl>
+                                        <p:attrNameLst>
+                                          <p:attrName>ppt_w</p:attrName>
+                                        </p:attrNameLst>
+                                      </p:cBhvr>
+                                      <p:tavLst>
+                                        <p:tav tm="0">
+                                          <p:val>
+                                            <p:fltVal val="0"/>
+                                          </p:val>
+                                        </p:tav>
+                                        <p:tav tm="100000">
+                                          <p:val>
+                                            <p:strVal val="#ppt_w"/>
+                                          </p:val>
+                                        </p:tav>
+                                      </p:tavLst>
+                                    </p:anim>
+                                    <p:anim calcmode="lin" valueType="num">
+                                      <p:cBhvr>
+                                        <p:cTn id="22" dur="500" fill="hold"/>
+                                        <p:tgtEl>
+                                          <p:spTgt spid="9">
+                                            <p:txEl>
+                                              <p:pRg st="0" end="0"/>
+                                            </p:txEl>
+                                          </p:spTgt>
+                                        </p:tgtEl>
+                                        <p:attrNameLst>
+                                          <p:attrName>ppt_h</p:attrName>
+                                        </p:attrNameLst>
+                                      </p:cBhvr>
+                                      <p:tavLst>
+                                        <p:tav tm="0">
+                                          <p:val>
+                                            <p:fltVal val="0"/>
+                                          </p:val>
+                                        </p:tav>
+                                        <p:tav tm="100000">
+                                          <p:val>
+                                            <p:strVal val="#ppt_h"/>
+                                          </p:val>
+                                        </p:tav>
+                                      </p:tavLst>
+                                    </p:anim>
+                                    <p:animEffect transition="in" filter="fade">
+                                      <p:cBhvr>
+                                        <p:cTn id="23" dur="500"/>
+                                        <p:tgtEl>
+                                          <p:spTgt spid="9">
+                                            <p:txEl>
+                                              <p:pRg st="0" end="0"/>
+                                            </p:txEl>
+                                          </p:spTgt>
+                                        </p:tgtEl>
+                                      </p:cBhvr>
+                                    </p:animEffect>
+                                  </p:childTnLst>
+                                </p:cTn>
+                              </p:par>
+                            </p:childTnLst>
+                          </p:cTn>
+                        </p:par>
+                      </p:childTnLst>
+                    </p:cTn>
+                  </p:par>
+                  <p:par>
+                    <p:cTn id="24" fill="hold">
+                      <p:stCondLst>
+                        <p:cond delay="indefinite"/>
+                      </p:stCondLst>
+                      <p:childTnLst>
+                        <p:par>
+                          <p:cTn id="25" fill="hold">
+                            <p:stCondLst>
+                              <p:cond delay="0"/>
+                            </p:stCondLst>
+                            <p:childTnLst>
+                              <p:par>
+                                <p:cTn id="26" presetID="53" presetClass="entr" presetSubtype="16" fill="hold" nodeType="clickEffect">
+                                  <p:stCondLst>
+                                    <p:cond delay="0"/>
+                                  </p:stCondLst>
+                                  <p:childTnLst>
+                                    <p:set>
+                                      <p:cBhvr>
+                                        <p:cTn id="27" dur="1" fill="hold">
+                                          <p:stCondLst>
+                                            <p:cond delay="0"/>
+                                          </p:stCondLst>
+                                        </p:cTn>
+                                        <p:tgtEl>
+                                          <p:spTgt spid="10">
+                                            <p:txEl>
+                                              <p:pRg st="0" end="0"/>
+                                            </p:txEl>
+                                          </p:spTgt>
+                                        </p:tgtEl>
+                                        <p:attrNameLst>
+                                          <p:attrName>style.visibility</p:attrName>
+                                        </p:attrNameLst>
+                                      </p:cBhvr>
+                                      <p:to>
+                                        <p:strVal val="visible"/>
+                                      </p:to>
+                                    </p:set>
+                                    <p:anim calcmode="lin" valueType="num">
+                                      <p:cBhvr>
+                                        <p:cTn id="28" dur="500" fill="hold"/>
+                                        <p:tgtEl>
+                                          <p:spTgt spid="10">
+                                            <p:txEl>
+                                              <p:pRg st="0" end="0"/>
+                                            </p:txEl>
+                                          </p:spTgt>
+                                        </p:tgtEl>
+                                        <p:attrNameLst>
+                                          <p:attrName>ppt_w</p:attrName>
+                                        </p:attrNameLst>
+                                      </p:cBhvr>
+                                      <p:tavLst>
+                                        <p:tav tm="0">
+                                          <p:val>
+                                            <p:fltVal val="0"/>
+                                          </p:val>
+                                        </p:tav>
+                                        <p:tav tm="100000">
+                                          <p:val>
+                                            <p:strVal val="#ppt_w"/>
+                                          </p:val>
+                                        </p:tav>
+                                      </p:tavLst>
+                                    </p:anim>
+                                    <p:anim calcmode="lin" valueType="num">
+                                      <p:cBhvr>
+                                        <p:cTn id="29" dur="500" fill="hold"/>
+                                        <p:tgtEl>
+                                          <p:spTgt spid="10">
+                                            <p:txEl>
+                                              <p:pRg st="0" end="0"/>
+                                            </p:txEl>
+                                          </p:spTgt>
+                                        </p:tgtEl>
+                                        <p:attrNameLst>
+                                          <p:attrName>ppt_h</p:attrName>
+                                        </p:attrNameLst>
+                                      </p:cBhvr>
+                                      <p:tavLst>
+                                        <p:tav tm="0">
+                                          <p:val>
+                                            <p:fltVal val="0"/>
+                                          </p:val>
+                                        </p:tav>
+                                        <p:tav tm="100000">
+                                          <p:val>
+                                            <p:strVal val="#ppt_h"/>
+                                          </p:val>
+                                        </p:tav>
+                                      </p:tavLst>
+                                    </p:anim>
+                                    <p:animEffect transition="in" filter="fade">
+                                      <p:cBhvr>
+                                        <p:cTn id="30" dur="500"/>
+                                        <p:tgtEl>
+                                          <p:spTgt spid="10">
+                                            <p:txEl>
+                                              <p:pRg st="0" end="0"/>
+                                            </p:txEl>
+                                          </p:spTgt>
+                                        </p:tgtEl>
+                                      </p:cBhvr>
+                                    </p:animEffect>
+                                  </p:childTnLst>
+                                </p:cTn>
+                              </p:par>
+                            </p:childTnLst>
+                          </p:cTn>
+                        </p:par>
+                      </p:childTnLst>
+                    </p:cTn>
+                  </p:par>
+                  <p:par>
+                    <p:cTn id="31" fill="hold">
+                      <p:stCondLst>
+                        <p:cond delay="indefinite"/>
+                      </p:stCondLst>
+                      <p:childTnLst>
+                        <p:par>
+                          <p:cTn id="32" fill="hold">
+                            <p:stCondLst>
+                              <p:cond delay="0"/>
+                            </p:stCondLst>
+                            <p:childTnLst>
+                              <p:par>
+                                <p:cTn id="33" presetID="53" presetClass="entr" presetSubtype="16" fill="hold" nodeType="clickEffect">
+                                  <p:stCondLst>
+                                    <p:cond delay="0"/>
+                                  </p:stCondLst>
+                                  <p:childTnLst>
+                                    <p:set>
+                                      <p:cBhvr>
+                                        <p:cTn id="34" dur="1" fill="hold">
+                                          <p:stCondLst>
+                                            <p:cond delay="0"/>
+                                          </p:stCondLst>
+                                        </p:cTn>
+                                        <p:tgtEl>
+                                          <p:spTgt spid="11">
+                                            <p:txEl>
+                                              <p:pRg st="0" end="0"/>
+                                            </p:txEl>
+                                          </p:spTgt>
+                                        </p:tgtEl>
+                                        <p:attrNameLst>
+                                          <p:attrName>style.visibility</p:attrName>
+                                        </p:attrNameLst>
+                                      </p:cBhvr>
+                                      <p:to>
+                                        <p:strVal val="visible"/>
+                                      </p:to>
+                                    </p:set>
+                                    <p:anim calcmode="lin" valueType="num">
+                                      <p:cBhvr>
+                                        <p:cTn id="35" dur="500" fill="hold"/>
+                                        <p:tgtEl>
+                                          <p:spTgt spid="11">
+                                            <p:txEl>
+                                              <p:pRg st="0" end="0"/>
+                                            </p:txEl>
+                                          </p:spTgt>
+                                        </p:tgtEl>
+                                        <p:attrNameLst>
+                                          <p:attrName>ppt_w</p:attrName>
+                                        </p:attrNameLst>
+                                      </p:cBhvr>
+                                      <p:tavLst>
+                                        <p:tav tm="0">
+                                          <p:val>
+                                            <p:fltVal val="0"/>
+                                          </p:val>
+                                        </p:tav>
+                                        <p:tav tm="100000">
+                                          <p:val>
+                                            <p:strVal val="#ppt_w"/>
+                                          </p:val>
+                                        </p:tav>
+                                      </p:tavLst>
+                                    </p:anim>
+                                    <p:anim calcmode="lin" valueType="num">
+                                      <p:cBhvr>
+                                        <p:cTn id="36" dur="500" fill="hold"/>
+                                        <p:tgtEl>
+                                          <p:spTgt spid="11">
+                                            <p:txEl>
+                                              <p:pRg st="0" end="0"/>
+                                            </p:txEl>
+                                          </p:spTgt>
+                                        </p:tgtEl>
+                                        <p:attrNameLst>
+                                          <p:attrName>ppt_h</p:attrName>
+                                        </p:attrNameLst>
+                                      </p:cBhvr>
+                                      <p:tavLst>
+                                        <p:tav tm="0">
+                                          <p:val>
+                                            <p:fltVal val="0"/>
+                                          </p:val>
+                                        </p:tav>
+                                        <p:tav tm="100000">
+                                          <p:val>
+                                            <p:strVal val="#ppt_h"/>
+                                          </p:val>
+                                        </p:tav>
+                                      </p:tavLst>
+                                    </p:anim>
+                                    <p:animEffect transition="in" filter="fade">
+                                      <p:cBhvr>
+                                        <p:cTn id="37" dur="500"/>
+                                        <p:tgtEl>
+                                          <p:spTgt spid="11">
+                                            <p:txEl>
+                                              <p:pRg st="0" end="0"/>
+                                            </p:txEl>
+                                          </p:spTgt>
+                                        </p:tgtEl>
+                                      </p:cBhvr>
+                                    </p:animEffect>
+                                  </p:childTnLst>
+                                </p:cTn>
+                              </p:par>
+                            </p:childTnLst>
+                          </p:cTn>
+                        </p:par>
+                      </p:childTnLst>
+                    </p:cTn>
+                  </p:par>
+                  <p:par>
+                    <p:cTn id="38" fill="hold">
+                      <p:stCondLst>
+                        <p:cond delay="indefinite"/>
+                      </p:stCondLst>
+                      <p:childTnLst>
+                        <p:par>
+                          <p:cTn id="39" fill="hold">
+                            <p:stCondLst>
+                              <p:cond delay="0"/>
+                            </p:stCondLst>
+                            <p:childTnLst>
+                              <p:par>
+                                <p:cTn id="40" presetID="53" presetClass="entr" presetSubtype="16" fill="hold" nodeType="clickEffect">
+                                  <p:stCondLst>
+                                    <p:cond delay="0"/>
+                                  </p:stCondLst>
+                                  <p:childTnLst>
+                                    <p:set>
+                                      <p:cBhvr>
+                                        <p:cTn id="41" dur="1" fill="hold">
+                                          <p:stCondLst>
+                                            <p:cond delay="0"/>
+                                          </p:stCondLst>
+                                        </p:cTn>
+                                        <p:tgtEl>
+                                          <p:spTgt spid="12">
+                                            <p:txEl>
+                                              <p:pRg st="0" end="0"/>
+                                            </p:txEl>
+                                          </p:spTgt>
+                                        </p:tgtEl>
+                                        <p:attrNameLst>
+                                          <p:attrName>style.visibility</p:attrName>
+                                        </p:attrNameLst>
+                                      </p:cBhvr>
+                                      <p:to>
+                                        <p:strVal val="visible"/>
+                                      </p:to>
+                                    </p:set>
+                                    <p:anim calcmode="lin" valueType="num">
+                                      <p:cBhvr>
+                                        <p:cTn id="42" dur="500" fill="hold"/>
+                                        <p:tgtEl>
+                                          <p:spTgt spid="12">
+                                            <p:txEl>
+                                              <p:pRg st="0" end="0"/>
+                                            </p:txEl>
+                                          </p:spTgt>
+                                        </p:tgtEl>
+                                        <p:attrNameLst>
+                                          <p:attrName>ppt_w</p:attrName>
+                                        </p:attrNameLst>
+                                      </p:cBhvr>
+                                      <p:tavLst>
+                                        <p:tav tm="0">
+                                          <p:val>
+                                            <p:fltVal val="0"/>
+                                          </p:val>
+                                        </p:tav>
+                                        <p:tav tm="100000">
+                                          <p:val>
+                                            <p:strVal val="#ppt_w"/>
+                                          </p:val>
+                                        </p:tav>
+                                      </p:tavLst>
+                                    </p:anim>
+                                    <p:anim calcmode="lin" valueType="num">
+                                      <p:cBhvr>
+                                        <p:cTn id="43" dur="500" fill="hold"/>
+                                        <p:tgtEl>
+                                          <p:spTgt spid="12">
+                                            <p:txEl>
+                                              <p:pRg st="0" end="0"/>
+                                            </p:txEl>
+                                          </p:spTgt>
+                                        </p:tgtEl>
+                                        <p:attrNameLst>
+                                          <p:attrName>ppt_h</p:attrName>
+                                        </p:attrNameLst>
+                                      </p:cBhvr>
+                                      <p:tavLst>
+                                        <p:tav tm="0">
+                                          <p:val>
+                                            <p:fltVal val="0"/>
+                                          </p:val>
+                                        </p:tav>
+                                        <p:tav tm="100000">
+                                          <p:val>
+                                            <p:strVal val="#ppt_h"/>
+                                          </p:val>
+                                        </p:tav>
+                                      </p:tavLst>
+                                    </p:anim>
+                                    <p:animEffect transition="in" filter="fade">
+                                      <p:cBhvr>
+                                        <p:cTn id="44" dur="500"/>
+                                        <p:tgtEl>
+                                          <p:spTgt spid="12">
+                                            <p:txEl>
+                                              <p:pRg st="0" end="0"/>
+                                            </p:txEl>
+                                          </p:spTgt>
+                                        </p:tgtEl>
+                                      </p:cBhvr>
+                                    </p:animEffect>
+                                  </p:childTnLst>
+                                </p:cTn>
+                              </p:par>
+                            </p:childTnLst>
+                          </p:cTn>
+                        </p:par>
+                      </p:childTnLst>
+                    </p:cTn>
+                  </p:par>
+                  <p:par>
+                    <p:cTn id="45" fill="hold">
+                      <p:stCondLst>
+                        <p:cond delay="indefinite"/>
+                      </p:stCondLst>
+                      <p:childTnLst>
+                        <p:par>
+                          <p:cTn id="46" fill="hold">
+                            <p:stCondLst>
+                              <p:cond delay="0"/>
+                            </p:stCondLst>
+                            <p:childTnLst>
+                              <p:par>
+                                <p:cTn id="47" presetID="53" presetClass="entr" presetSubtype="16" fill="hold" grpId="0" nodeType="clickEffect">
+                                  <p:stCondLst>
+                                    <p:cond delay="0"/>
+                                  </p:stCondLst>
+                                  <p:childTnLst>
+                                    <p:set>
+                                      <p:cBhvr>
+                                        <p:cTn id="48" dur="1" fill="hold">
+                                          <p:stCondLst>
+                                            <p:cond delay="0"/>
+                                          </p:stCondLst>
+                                        </p:cTn>
+                                        <p:tgtEl>
+                                          <p:spTgt spid="13"/>
+                                        </p:tgtEl>
+                                        <p:attrNameLst>
+                                          <p:attrName>style.visibility</p:attrName>
+                                        </p:attrNameLst>
+                                      </p:cBhvr>
+                                      <p:to>
+                                        <p:strVal val="visible"/>
+                                      </p:to>
+                                    </p:set>
+                                    <p:anim calcmode="lin" valueType="num">
+                                      <p:cBhvr>
+                                        <p:cTn id="49" dur="500" fill="hold"/>
+                                        <p:tgtEl>
+                                          <p:spTgt spid="13"/>
+                                        </p:tgtEl>
+                                        <p:attrNameLst>
+                                          <p:attrName>ppt_w</p:attrName>
+                                        </p:attrNameLst>
+                                      </p:cBhvr>
+                                      <p:tavLst>
+                                        <p:tav tm="0">
+                                          <p:val>
+                                            <p:fltVal val="0"/>
+                                          </p:val>
+                                        </p:tav>
+                                        <p:tav tm="100000">
+                                          <p:val>
+                                            <p:strVal val="#ppt_w"/>
+                                          </p:val>
+                                        </p:tav>
+                                      </p:tavLst>
+                                    </p:anim>
+                                    <p:anim calcmode="lin" valueType="num">
+                                      <p:cBhvr>
+                                        <p:cTn id="50" dur="500" fill="hold"/>
+                                        <p:tgtEl>
+                                          <p:spTgt spid="13"/>
+                                        </p:tgtEl>
+                                        <p:attrNameLst>
+                                          <p:attrName>ppt_h</p:attrName>
+                                        </p:attrNameLst>
+                                      </p:cBhvr>
+                                      <p:tavLst>
+                                        <p:tav tm="0">
+                                          <p:val>
+                                            <p:fltVal val="0"/>
+                                          </p:val>
+                                        </p:tav>
+                                        <p:tav tm="100000">
+                                          <p:val>
+                                            <p:strVal val="#ppt_h"/>
+                                          </p:val>
+                                        </p:tav>
+                                      </p:tavLst>
+                                    </p:anim>
+                                    <p:animEffect transition="in" filter="fade">
+                                      <p:cBhvr>
+                                        <p:cTn id="51" dur="500"/>
+                                        <p:tgtEl>
+                                          <p:spTgt spid="13"/>
+                                        </p:tgtEl>
+                                      </p:cBhvr>
+                                    </p:animEffect>
+                                  </p:childTnLst>
+                                </p:cTn>
+                              </p:par>
+                            </p:childTnLst>
+                          </p:cTn>
+                        </p:par>
+                      </p:childTnLst>
+                    </p:cTn>
+                  </p:par>
+                  <p:par>
+                    <p:cTn id="52" fill="hold">
+                      <p:stCondLst>
+                        <p:cond delay="indefinite"/>
+                      </p:stCondLst>
+                      <p:childTnLst>
+                        <p:par>
+                          <p:cTn id="53" fill="hold">
+                            <p:stCondLst>
+                              <p:cond delay="0"/>
+                            </p:stCondLst>
+                            <p:childTnLst>
+                              <p:par>
+                                <p:cTn id="54" presetID="53" presetClass="entr" presetSubtype="16" fill="hold" nodeType="clickEffect">
+                                  <p:stCondLst>
+                                    <p:cond delay="0"/>
+                                  </p:stCondLst>
+                                  <p:childTnLst>
+                                    <p:set>
+                                      <p:cBhvr>
+                                        <p:cTn id="55" dur="1" fill="hold">
+                                          <p:stCondLst>
+                                            <p:cond delay="0"/>
+                                          </p:stCondLst>
+                                        </p:cTn>
+                                        <p:tgtEl>
+                                          <p:spTgt spid="14">
+                                            <p:txEl>
+                                              <p:pRg st="0" end="0"/>
+                                            </p:txEl>
+                                          </p:spTgt>
+                                        </p:tgtEl>
+                                        <p:attrNameLst>
+                                          <p:attrName>style.visibility</p:attrName>
+                                        </p:attrNameLst>
+                                      </p:cBhvr>
+                                      <p:to>
+                                        <p:strVal val="visible"/>
+                                      </p:to>
+                                    </p:set>
+                                    <p:anim calcmode="lin" valueType="num">
+                                      <p:cBhvr>
+                                        <p:cTn id="56" dur="500" fill="hold"/>
+                                        <p:tgtEl>
+                                          <p:spTgt spid="14">
+                                            <p:txEl>
+                                              <p:pRg st="0" end="0"/>
+                                            </p:txEl>
+                                          </p:spTgt>
+                                        </p:tgtEl>
+                                        <p:attrNameLst>
+                                          <p:attrName>ppt_w</p:attrName>
+                                        </p:attrNameLst>
+                                      </p:cBhvr>
+                                      <p:tavLst>
+                                        <p:tav tm="0">
+                                          <p:val>
+                                            <p:fltVal val="0"/>
+                                          </p:val>
+                                        </p:tav>
+                                        <p:tav tm="100000">
+                                          <p:val>
+                                            <p:strVal val="#ppt_w"/>
+                                          </p:val>
+                                        </p:tav>
+                                      </p:tavLst>
+                                    </p:anim>
+                                    <p:anim calcmode="lin" valueType="num">
+                                      <p:cBhvr>
+                                        <p:cTn id="57" dur="500" fill="hold"/>
+                                        <p:tgtEl>
+                                          <p:spTgt spid="14">
+                                            <p:txEl>
+                                              <p:pRg st="0" end="0"/>
+                                            </p:txEl>
+                                          </p:spTgt>
+                                        </p:tgtEl>
+                                        <p:attrNameLst>
+                                          <p:attrName>ppt_h</p:attrName>
+                                        </p:attrNameLst>
+                                      </p:cBhvr>
+                                      <p:tavLst>
+                                        <p:tav tm="0">
+                                          <p:val>
+                                            <p:fltVal val="0"/>
+                                          </p:val>
+                                        </p:tav>
+                                        <p:tav tm="100000">
+                                          <p:val>
+                                            <p:strVal val="#ppt_h"/>
+                                          </p:val>
+                                        </p:tav>
+                                      </p:tavLst>
+                                    </p:anim>
+                                    <p:animEffect transition="in" filter="fade">
+                                      <p:cBhvr>
+                                        <p:cTn id="58" dur="500"/>
+                                        <p:tgtEl>
+                                          <p:spTgt spid="14">
+                                            <p:txEl>
+                                              <p:pRg st="0" end="0"/>
+                                            </p:txEl>
+                                          </p:spTgt>
+                                        </p:tgtEl>
+                                      </p:cBhvr>
+                                    </p:animEffect>
+                                  </p:childTnLst>
+                                </p:cTn>
+                              </p:par>
+                            </p:childTnLst>
+                          </p:cTn>
+                        </p:par>
+                      </p:childTnLst>
+                    </p:cTn>
+                  </p:par>
+                  <p:par>
+                    <p:cTn id="59" fill="hold">
+                      <p:stCondLst>
+                        <p:cond delay="indefinite"/>
+                      </p:stCondLst>
+                      <p:childTnLst>
+                        <p:par>
+                          <p:cTn id="60" fill="hold">
+                            <p:stCondLst>
+                              <p:cond delay="0"/>
+                            </p:stCondLst>
+                            <p:childTnLst>
+                              <p:par>
+                                <p:cTn id="61" presetID="53" presetClass="entr" presetSubtype="16" fill="hold" nodeType="clickEffect">
+                                  <p:stCondLst>
+                                    <p:cond delay="0"/>
+                                  </p:stCondLst>
+                                  <p:childTnLst>
+                                    <p:set>
+                                      <p:cBhvr>
+                                        <p:cTn id="62" dur="1" fill="hold">
+                                          <p:stCondLst>
+                                            <p:cond delay="0"/>
+                                          </p:stCondLst>
+                                        </p:cTn>
+                                        <p:tgtEl>
+                                          <p:spTgt spid="15">
+                                            <p:txEl>
+                                              <p:pRg st="0" end="0"/>
+                                            </p:txEl>
+                                          </p:spTgt>
+                                        </p:tgtEl>
+                                        <p:attrNameLst>
+                                          <p:attrName>style.visibility</p:attrName>
+                                        </p:attrNameLst>
+                                      </p:cBhvr>
+                                      <p:to>
+                                        <p:strVal val="visible"/>
+                                      </p:to>
+                                    </p:set>
+                                    <p:anim calcmode="lin" valueType="num">
+                                      <p:cBhvr>
+                                        <p:cTn id="63" dur="500" fill="hold"/>
+                                        <p:tgtEl>
+                                          <p:spTgt spid="15">
+                                            <p:txEl>
+                                              <p:pRg st="0" end="0"/>
+                                            </p:txEl>
+                                          </p:spTgt>
+                                        </p:tgtEl>
+                                        <p:attrNameLst>
+                                          <p:attrName>ppt_w</p:attrName>
+                                        </p:attrNameLst>
+                                      </p:cBhvr>
+                                      <p:tavLst>
+                                        <p:tav tm="0">
+                                          <p:val>
+                                            <p:fltVal val="0"/>
+                                          </p:val>
+                                        </p:tav>
+                                        <p:tav tm="100000">
+                                          <p:val>
+                                            <p:strVal val="#ppt_w"/>
+                                          </p:val>
+                                        </p:tav>
+                                      </p:tavLst>
+                                    </p:anim>
+                                    <p:anim calcmode="lin" valueType="num">
+                                      <p:cBhvr>
+                                        <p:cTn id="64" dur="500" fill="hold"/>
+                                        <p:tgtEl>
+                                          <p:spTgt spid="15">
+                                            <p:txEl>
+                                              <p:pRg st="0" end="0"/>
+                                            </p:txEl>
+                                          </p:spTgt>
+                                        </p:tgtEl>
+                                        <p:attrNameLst>
+                                          <p:attrName>ppt_h</p:attrName>
+                                        </p:attrNameLst>
+                                      </p:cBhvr>
+                                      <p:tavLst>
+                                        <p:tav tm="0">
+                                          <p:val>
+                                            <p:fltVal val="0"/>
+                                          </p:val>
+                                        </p:tav>
+                                        <p:tav tm="100000">
+                                          <p:val>
+                                            <p:strVal val="#ppt_h"/>
+                                          </p:val>
+                                        </p:tav>
+                                      </p:tavLst>
+                                    </p:anim>
+                                    <p:animEffect transition="in" filter="fade">
+                                      <p:cBhvr>
+                                        <p:cTn id="65" dur="500"/>
+                                        <p:tgtEl>
+                                          <p:spTgt spid="15">
+                                            <p:txEl>
+                                              <p:pRg st="0" end="0"/>
+                                            </p:txEl>
+                                          </p:spTgt>
+                                        </p:tgtEl>
+                                      </p:cBhvr>
+                                    </p:animEffect>
+                                  </p:childTnLst>
+                                </p:cTn>
+                              </p:par>
+                            </p:childTnLst>
+                          </p:cTn>
+                        </p:par>
+                      </p:childTnLst>
+                    </p:cTn>
+                  </p:par>
+                  <p:par>
+                    <p:cTn id="66" fill="hold">
+                      <p:stCondLst>
+                        <p:cond delay="indefinite"/>
+                      </p:stCondLst>
+                      <p:childTnLst>
+                        <p:par>
+                          <p:cTn id="67" fill="hold">
+                            <p:stCondLst>
+                              <p:cond delay="0"/>
+                            </p:stCondLst>
+                            <p:childTnLst>
+                              <p:par>
+                                <p:cTn id="68" presetID="53" presetClass="entr" presetSubtype="16" fill="hold" nodeType="clickEffect">
+                                  <p:stCondLst>
+                                    <p:cond delay="0"/>
+                                  </p:stCondLst>
+                                  <p:childTnLst>
+                                    <p:set>
+                                      <p:cBhvr>
+                                        <p:cTn id="69" dur="1" fill="hold">
+                                          <p:stCondLst>
+                                            <p:cond delay="0"/>
+                                          </p:stCondLst>
+                                        </p:cTn>
+                                        <p:tgtEl>
+                                          <p:spTgt spid="16"/>
+                                        </p:tgtEl>
+                                        <p:attrNameLst>
+                                          <p:attrName>style.visibility</p:attrName>
+                                        </p:attrNameLst>
+                                      </p:cBhvr>
+                                      <p:to>
+                                        <p:strVal val="visible"/>
+                                      </p:to>
+                                    </p:set>
+                                    <p:anim calcmode="lin" valueType="num">
+                                      <p:cBhvr>
+                                        <p:cTn id="70" dur="500" fill="hold"/>
+                                        <p:tgtEl>
+                                          <p:spTgt spid="16"/>
+                                        </p:tgtEl>
+                                        <p:attrNameLst>
+                                          <p:attrName>ppt_w</p:attrName>
+                                        </p:attrNameLst>
+                                      </p:cBhvr>
+                                      <p:tavLst>
+                                        <p:tav tm="0">
+                                          <p:val>
+                                            <p:fltVal val="0"/>
+                                          </p:val>
+                                        </p:tav>
+                                        <p:tav tm="100000">
+                                          <p:val>
+                                            <p:strVal val="#ppt_w"/>
+                                          </p:val>
+                                        </p:tav>
+                                      </p:tavLst>
+                                    </p:anim>
+                                    <p:anim calcmode="lin" valueType="num">
+                                      <p:cBhvr>
+                                        <p:cTn id="71" dur="500" fill="hold"/>
+                                        <p:tgtEl>
+                                          <p:spTgt spid="16"/>
+                                        </p:tgtEl>
+                                        <p:attrNameLst>
+                                          <p:attrName>ppt_h</p:attrName>
+                                        </p:attrNameLst>
+                                      </p:cBhvr>
+                                      <p:tavLst>
+                                        <p:tav tm="0">
+                                          <p:val>
+                                            <p:fltVal val="0"/>
+                                          </p:val>
+                                        </p:tav>
+                                        <p:tav tm="100000">
+                                          <p:val>
+                                            <p:strVal val="#ppt_h"/>
+                                          </p:val>
+                                        </p:tav>
+                                      </p:tavLst>
+                                    </p:anim>
+                                    <p:animEffect transition="in" filter="fade">
+                                      <p:cBhvr>
+                                        <p:cTn id="72" dur="500"/>
+                                        <p:tgtEl>
+                                          <p:spTgt spid="16"/>
+                                        </p:tgtEl>
+                                      </p:cBhvr>
+                                    </p:animEffect>
+                                  </p:childTnLst>
+                                </p:cTn>
+                              </p:par>
+                            </p:childTnLst>
+                          </p:cTn>
+                        </p:par>
+                      </p:childTnLst>
+                    </p:cTn>
+                  </p:par>
+                </p:childTnLst>
+              </p:cTn>
+              <p:prevCondLst>
+                <p:cond evt="onPrev" delay="0">
+                  <p:tgtEl>
+                    <p:sldTgt/>
+                  </p:tgtEl>
+                </p:cond>
+              </p:prevCondLst>
+              <p:nextCondLst>
+                <p:cond evt="onNext" delay="0">
+                  <p:tgtEl>
+                    <p:sldTgt/>
+                  </p:tgtEl>
+                </p:cond>
+              </p:nextCondLst>
+            </p:seq>
+          </p:childTnLst>
+        </p:cTn>
+      </p:par>
+    </p:tnLst>
+    <p:bldLst>
+      <p:bldP spid="7" grpId="0" animBg="1"/>
+      <p:bldP spid="13" grpId="0" animBg="1"/>
+    </p:bldLst>
+  </p:timing>
 </p:sld>
 </file>
 
@@ -9266,6 +14449,1125 @@
   <p:clrMapOvr>
     <a:masterClrMapping/>
   </p:clrMapOvr>
+  <p:transition>
+    <p:fade/>
+  </p:transition>
+  <p:timing>
+    <p:tnLst>
+      <p:par>
+        <p:cTn id="1" dur="indefinite" restart="never" nodeType="tmRoot">
+          <p:childTnLst>
+            <p:seq concurrent="1" nextAc="seek">
+              <p:cTn id="2" dur="indefinite" nodeType="mainSeq">
+                <p:childTnLst>
+                  <p:par>
+                    <p:cTn id="3" fill="hold">
+                      <p:stCondLst>
+                        <p:cond delay="indefinite"/>
+                      </p:stCondLst>
+                      <p:childTnLst>
+                        <p:par>
+                          <p:cTn id="4" fill="hold">
+                            <p:stCondLst>
+                              <p:cond delay="0"/>
+                            </p:stCondLst>
+                            <p:childTnLst>
+                              <p:par>
+                                <p:cTn id="5" presetID="53" presetClass="entr" presetSubtype="16" fill="hold" grpId="0" nodeType="clickEffect">
+                                  <p:stCondLst>
+                                    <p:cond delay="0"/>
+                                  </p:stCondLst>
+                                  <p:childTnLst>
+                                    <p:set>
+                                      <p:cBhvr>
+                                        <p:cTn id="6" dur="1" fill="hold">
+                                          <p:stCondLst>
+                                            <p:cond delay="0"/>
+                                          </p:stCondLst>
+                                        </p:cTn>
+                                        <p:tgtEl>
+                                          <p:spTgt spid="9"/>
+                                        </p:tgtEl>
+                                        <p:attrNameLst>
+                                          <p:attrName>style.visibility</p:attrName>
+                                        </p:attrNameLst>
+                                      </p:cBhvr>
+                                      <p:to>
+                                        <p:strVal val="visible"/>
+                                      </p:to>
+                                    </p:set>
+                                    <p:anim calcmode="lin" valueType="num">
+                                      <p:cBhvr>
+                                        <p:cTn id="7" dur="500" fill="hold"/>
+                                        <p:tgtEl>
+                                          <p:spTgt spid="9"/>
+                                        </p:tgtEl>
+                                        <p:attrNameLst>
+                                          <p:attrName>ppt_w</p:attrName>
+                                        </p:attrNameLst>
+                                      </p:cBhvr>
+                                      <p:tavLst>
+                                        <p:tav tm="0">
+                                          <p:val>
+                                            <p:fltVal val="0"/>
+                                          </p:val>
+                                        </p:tav>
+                                        <p:tav tm="100000">
+                                          <p:val>
+                                            <p:strVal val="#ppt_w"/>
+                                          </p:val>
+                                        </p:tav>
+                                      </p:tavLst>
+                                    </p:anim>
+                                    <p:anim calcmode="lin" valueType="num">
+                                      <p:cBhvr>
+                                        <p:cTn id="8" dur="500" fill="hold"/>
+                                        <p:tgtEl>
+                                          <p:spTgt spid="9"/>
+                                        </p:tgtEl>
+                                        <p:attrNameLst>
+                                          <p:attrName>ppt_h</p:attrName>
+                                        </p:attrNameLst>
+                                      </p:cBhvr>
+                                      <p:tavLst>
+                                        <p:tav tm="0">
+                                          <p:val>
+                                            <p:fltVal val="0"/>
+                                          </p:val>
+                                        </p:tav>
+                                        <p:tav tm="100000">
+                                          <p:val>
+                                            <p:strVal val="#ppt_h"/>
+                                          </p:val>
+                                        </p:tav>
+                                      </p:tavLst>
+                                    </p:anim>
+                                    <p:animEffect transition="in" filter="fade">
+                                      <p:cBhvr>
+                                        <p:cTn id="9" dur="500"/>
+                                        <p:tgtEl>
+                                          <p:spTgt spid="9"/>
+                                        </p:tgtEl>
+                                      </p:cBhvr>
+                                    </p:animEffect>
+                                  </p:childTnLst>
+                                </p:cTn>
+                              </p:par>
+                            </p:childTnLst>
+                          </p:cTn>
+                        </p:par>
+                      </p:childTnLst>
+                    </p:cTn>
+                  </p:par>
+                  <p:par>
+                    <p:cTn id="10" fill="hold">
+                      <p:stCondLst>
+                        <p:cond delay="indefinite"/>
+                      </p:stCondLst>
+                      <p:childTnLst>
+                        <p:par>
+                          <p:cTn id="11" fill="hold">
+                            <p:stCondLst>
+                              <p:cond delay="0"/>
+                            </p:stCondLst>
+                            <p:childTnLst>
+                              <p:par>
+                                <p:cTn id="12" presetID="53" presetClass="entr" presetSubtype="16" fill="hold" nodeType="clickEffect">
+                                  <p:stCondLst>
+                                    <p:cond delay="0"/>
+                                  </p:stCondLst>
+                                  <p:childTnLst>
+                                    <p:set>
+                                      <p:cBhvr>
+                                        <p:cTn id="13" dur="1" fill="hold">
+                                          <p:stCondLst>
+                                            <p:cond delay="0"/>
+                                          </p:stCondLst>
+                                        </p:cTn>
+                                        <p:tgtEl>
+                                          <p:spTgt spid="10">
+                                            <p:txEl>
+                                              <p:pRg st="0" end="0"/>
+                                            </p:txEl>
+                                          </p:spTgt>
+                                        </p:tgtEl>
+                                        <p:attrNameLst>
+                                          <p:attrName>style.visibility</p:attrName>
+                                        </p:attrNameLst>
+                                      </p:cBhvr>
+                                      <p:to>
+                                        <p:strVal val="visible"/>
+                                      </p:to>
+                                    </p:set>
+                                    <p:anim calcmode="lin" valueType="num">
+                                      <p:cBhvr>
+                                        <p:cTn id="14" dur="500" fill="hold"/>
+                                        <p:tgtEl>
+                                          <p:spTgt spid="10">
+                                            <p:txEl>
+                                              <p:pRg st="0" end="0"/>
+                                            </p:txEl>
+                                          </p:spTgt>
+                                        </p:tgtEl>
+                                        <p:attrNameLst>
+                                          <p:attrName>ppt_w</p:attrName>
+                                        </p:attrNameLst>
+                                      </p:cBhvr>
+                                      <p:tavLst>
+                                        <p:tav tm="0">
+                                          <p:val>
+                                            <p:fltVal val="0"/>
+                                          </p:val>
+                                        </p:tav>
+                                        <p:tav tm="100000">
+                                          <p:val>
+                                            <p:strVal val="#ppt_w"/>
+                                          </p:val>
+                                        </p:tav>
+                                      </p:tavLst>
+                                    </p:anim>
+                                    <p:anim calcmode="lin" valueType="num">
+                                      <p:cBhvr>
+                                        <p:cTn id="15" dur="500" fill="hold"/>
+                                        <p:tgtEl>
+                                          <p:spTgt spid="10">
+                                            <p:txEl>
+                                              <p:pRg st="0" end="0"/>
+                                            </p:txEl>
+                                          </p:spTgt>
+                                        </p:tgtEl>
+                                        <p:attrNameLst>
+                                          <p:attrName>ppt_h</p:attrName>
+                                        </p:attrNameLst>
+                                      </p:cBhvr>
+                                      <p:tavLst>
+                                        <p:tav tm="0">
+                                          <p:val>
+                                            <p:fltVal val="0"/>
+                                          </p:val>
+                                        </p:tav>
+                                        <p:tav tm="100000">
+                                          <p:val>
+                                            <p:strVal val="#ppt_h"/>
+                                          </p:val>
+                                        </p:tav>
+                                      </p:tavLst>
+                                    </p:anim>
+                                    <p:animEffect transition="in" filter="fade">
+                                      <p:cBhvr>
+                                        <p:cTn id="16" dur="500"/>
+                                        <p:tgtEl>
+                                          <p:spTgt spid="10">
+                                            <p:txEl>
+                                              <p:pRg st="0" end="0"/>
+                                            </p:txEl>
+                                          </p:spTgt>
+                                        </p:tgtEl>
+                                      </p:cBhvr>
+                                    </p:animEffect>
+                                  </p:childTnLst>
+                                </p:cTn>
+                              </p:par>
+                            </p:childTnLst>
+                          </p:cTn>
+                        </p:par>
+                      </p:childTnLst>
+                    </p:cTn>
+                  </p:par>
+                  <p:par>
+                    <p:cTn id="17" fill="hold">
+                      <p:stCondLst>
+                        <p:cond delay="indefinite"/>
+                      </p:stCondLst>
+                      <p:childTnLst>
+                        <p:par>
+                          <p:cTn id="18" fill="hold">
+                            <p:stCondLst>
+                              <p:cond delay="0"/>
+                            </p:stCondLst>
+                            <p:childTnLst>
+                              <p:par>
+                                <p:cTn id="19" presetID="53" presetClass="entr" presetSubtype="16" fill="hold" nodeType="clickEffect">
+                                  <p:stCondLst>
+                                    <p:cond delay="0"/>
+                                  </p:stCondLst>
+                                  <p:childTnLst>
+                                    <p:set>
+                                      <p:cBhvr>
+                                        <p:cTn id="20" dur="1" fill="hold">
+                                          <p:stCondLst>
+                                            <p:cond delay="0"/>
+                                          </p:stCondLst>
+                                        </p:cTn>
+                                        <p:tgtEl>
+                                          <p:spTgt spid="11">
+                                            <p:txEl>
+                                              <p:pRg st="0" end="0"/>
+                                            </p:txEl>
+                                          </p:spTgt>
+                                        </p:tgtEl>
+                                        <p:attrNameLst>
+                                          <p:attrName>style.visibility</p:attrName>
+                                        </p:attrNameLst>
+                                      </p:cBhvr>
+                                      <p:to>
+                                        <p:strVal val="visible"/>
+                                      </p:to>
+                                    </p:set>
+                                    <p:anim calcmode="lin" valueType="num">
+                                      <p:cBhvr>
+                                        <p:cTn id="21" dur="500" fill="hold"/>
+                                        <p:tgtEl>
+                                          <p:spTgt spid="11">
+                                            <p:txEl>
+                                              <p:pRg st="0" end="0"/>
+                                            </p:txEl>
+                                          </p:spTgt>
+                                        </p:tgtEl>
+                                        <p:attrNameLst>
+                                          <p:attrName>ppt_w</p:attrName>
+                                        </p:attrNameLst>
+                                      </p:cBhvr>
+                                      <p:tavLst>
+                                        <p:tav tm="0">
+                                          <p:val>
+                                            <p:fltVal val="0"/>
+                                          </p:val>
+                                        </p:tav>
+                                        <p:tav tm="100000">
+                                          <p:val>
+                                            <p:strVal val="#ppt_w"/>
+                                          </p:val>
+                                        </p:tav>
+                                      </p:tavLst>
+                                    </p:anim>
+                                    <p:anim calcmode="lin" valueType="num">
+                                      <p:cBhvr>
+                                        <p:cTn id="22" dur="500" fill="hold"/>
+                                        <p:tgtEl>
+                                          <p:spTgt spid="11">
+                                            <p:txEl>
+                                              <p:pRg st="0" end="0"/>
+                                            </p:txEl>
+                                          </p:spTgt>
+                                        </p:tgtEl>
+                                        <p:attrNameLst>
+                                          <p:attrName>ppt_h</p:attrName>
+                                        </p:attrNameLst>
+                                      </p:cBhvr>
+                                      <p:tavLst>
+                                        <p:tav tm="0">
+                                          <p:val>
+                                            <p:fltVal val="0"/>
+                                          </p:val>
+                                        </p:tav>
+                                        <p:tav tm="100000">
+                                          <p:val>
+                                            <p:strVal val="#ppt_h"/>
+                                          </p:val>
+                                        </p:tav>
+                                      </p:tavLst>
+                                    </p:anim>
+                                    <p:animEffect transition="in" filter="fade">
+                                      <p:cBhvr>
+                                        <p:cTn id="23" dur="500"/>
+                                        <p:tgtEl>
+                                          <p:spTgt spid="11">
+                                            <p:txEl>
+                                              <p:pRg st="0" end="0"/>
+                                            </p:txEl>
+                                          </p:spTgt>
+                                        </p:tgtEl>
+                                      </p:cBhvr>
+                                    </p:animEffect>
+                                  </p:childTnLst>
+                                </p:cTn>
+                              </p:par>
+                            </p:childTnLst>
+                          </p:cTn>
+                        </p:par>
+                      </p:childTnLst>
+                    </p:cTn>
+                  </p:par>
+                  <p:par>
+                    <p:cTn id="24" fill="hold">
+                      <p:stCondLst>
+                        <p:cond delay="indefinite"/>
+                      </p:stCondLst>
+                      <p:childTnLst>
+                        <p:par>
+                          <p:cTn id="25" fill="hold">
+                            <p:stCondLst>
+                              <p:cond delay="0"/>
+                            </p:stCondLst>
+                            <p:childTnLst>
+                              <p:par>
+                                <p:cTn id="26" presetID="53" presetClass="entr" presetSubtype="16" fill="hold" nodeType="clickEffect">
+                                  <p:stCondLst>
+                                    <p:cond delay="0"/>
+                                  </p:stCondLst>
+                                  <p:childTnLst>
+                                    <p:set>
+                                      <p:cBhvr>
+                                        <p:cTn id="27" dur="1" fill="hold">
+                                          <p:stCondLst>
+                                            <p:cond delay="0"/>
+                                          </p:stCondLst>
+                                        </p:cTn>
+                                        <p:tgtEl>
+                                          <p:spTgt spid="12">
+                                            <p:txEl>
+                                              <p:pRg st="0" end="0"/>
+                                            </p:txEl>
+                                          </p:spTgt>
+                                        </p:tgtEl>
+                                        <p:attrNameLst>
+                                          <p:attrName>style.visibility</p:attrName>
+                                        </p:attrNameLst>
+                                      </p:cBhvr>
+                                      <p:to>
+                                        <p:strVal val="visible"/>
+                                      </p:to>
+                                    </p:set>
+                                    <p:anim calcmode="lin" valueType="num">
+                                      <p:cBhvr>
+                                        <p:cTn id="28" dur="500" fill="hold"/>
+                                        <p:tgtEl>
+                                          <p:spTgt spid="12">
+                                            <p:txEl>
+                                              <p:pRg st="0" end="0"/>
+                                            </p:txEl>
+                                          </p:spTgt>
+                                        </p:tgtEl>
+                                        <p:attrNameLst>
+                                          <p:attrName>ppt_w</p:attrName>
+                                        </p:attrNameLst>
+                                      </p:cBhvr>
+                                      <p:tavLst>
+                                        <p:tav tm="0">
+                                          <p:val>
+                                            <p:fltVal val="0"/>
+                                          </p:val>
+                                        </p:tav>
+                                        <p:tav tm="100000">
+                                          <p:val>
+                                            <p:strVal val="#ppt_w"/>
+                                          </p:val>
+                                        </p:tav>
+                                      </p:tavLst>
+                                    </p:anim>
+                                    <p:anim calcmode="lin" valueType="num">
+                                      <p:cBhvr>
+                                        <p:cTn id="29" dur="500" fill="hold"/>
+                                        <p:tgtEl>
+                                          <p:spTgt spid="12">
+                                            <p:txEl>
+                                              <p:pRg st="0" end="0"/>
+                                            </p:txEl>
+                                          </p:spTgt>
+                                        </p:tgtEl>
+                                        <p:attrNameLst>
+                                          <p:attrName>ppt_h</p:attrName>
+                                        </p:attrNameLst>
+                                      </p:cBhvr>
+                                      <p:tavLst>
+                                        <p:tav tm="0">
+                                          <p:val>
+                                            <p:fltVal val="0"/>
+                                          </p:val>
+                                        </p:tav>
+                                        <p:tav tm="100000">
+                                          <p:val>
+                                            <p:strVal val="#ppt_h"/>
+                                          </p:val>
+                                        </p:tav>
+                                      </p:tavLst>
+                                    </p:anim>
+                                    <p:animEffect transition="in" filter="fade">
+                                      <p:cBhvr>
+                                        <p:cTn id="30" dur="500"/>
+                                        <p:tgtEl>
+                                          <p:spTgt spid="12">
+                                            <p:txEl>
+                                              <p:pRg st="0" end="0"/>
+                                            </p:txEl>
+                                          </p:spTgt>
+                                        </p:tgtEl>
+                                      </p:cBhvr>
+                                    </p:animEffect>
+                                  </p:childTnLst>
+                                </p:cTn>
+                              </p:par>
+                            </p:childTnLst>
+                          </p:cTn>
+                        </p:par>
+                      </p:childTnLst>
+                    </p:cTn>
+                  </p:par>
+                  <p:par>
+                    <p:cTn id="31" fill="hold">
+                      <p:stCondLst>
+                        <p:cond delay="indefinite"/>
+                      </p:stCondLst>
+                      <p:childTnLst>
+                        <p:par>
+                          <p:cTn id="32" fill="hold">
+                            <p:stCondLst>
+                              <p:cond delay="0"/>
+                            </p:stCondLst>
+                            <p:childTnLst>
+                              <p:par>
+                                <p:cTn id="33" presetID="53" presetClass="entr" presetSubtype="16" fill="hold" nodeType="clickEffect">
+                                  <p:stCondLst>
+                                    <p:cond delay="0"/>
+                                  </p:stCondLst>
+                                  <p:childTnLst>
+                                    <p:set>
+                                      <p:cBhvr>
+                                        <p:cTn id="34" dur="1" fill="hold">
+                                          <p:stCondLst>
+                                            <p:cond delay="0"/>
+                                          </p:stCondLst>
+                                        </p:cTn>
+                                        <p:tgtEl>
+                                          <p:spTgt spid="13">
+                                            <p:txEl>
+                                              <p:pRg st="0" end="0"/>
+                                            </p:txEl>
+                                          </p:spTgt>
+                                        </p:tgtEl>
+                                        <p:attrNameLst>
+                                          <p:attrName>style.visibility</p:attrName>
+                                        </p:attrNameLst>
+                                      </p:cBhvr>
+                                      <p:to>
+                                        <p:strVal val="visible"/>
+                                      </p:to>
+                                    </p:set>
+                                    <p:anim calcmode="lin" valueType="num">
+                                      <p:cBhvr>
+                                        <p:cTn id="35" dur="500" fill="hold"/>
+                                        <p:tgtEl>
+                                          <p:spTgt spid="13">
+                                            <p:txEl>
+                                              <p:pRg st="0" end="0"/>
+                                            </p:txEl>
+                                          </p:spTgt>
+                                        </p:tgtEl>
+                                        <p:attrNameLst>
+                                          <p:attrName>ppt_w</p:attrName>
+                                        </p:attrNameLst>
+                                      </p:cBhvr>
+                                      <p:tavLst>
+                                        <p:tav tm="0">
+                                          <p:val>
+                                            <p:fltVal val="0"/>
+                                          </p:val>
+                                        </p:tav>
+                                        <p:tav tm="100000">
+                                          <p:val>
+                                            <p:strVal val="#ppt_w"/>
+                                          </p:val>
+                                        </p:tav>
+                                      </p:tavLst>
+                                    </p:anim>
+                                    <p:anim calcmode="lin" valueType="num">
+                                      <p:cBhvr>
+                                        <p:cTn id="36" dur="500" fill="hold"/>
+                                        <p:tgtEl>
+                                          <p:spTgt spid="13">
+                                            <p:txEl>
+                                              <p:pRg st="0" end="0"/>
+                                            </p:txEl>
+                                          </p:spTgt>
+                                        </p:tgtEl>
+                                        <p:attrNameLst>
+                                          <p:attrName>ppt_h</p:attrName>
+                                        </p:attrNameLst>
+                                      </p:cBhvr>
+                                      <p:tavLst>
+                                        <p:tav tm="0">
+                                          <p:val>
+                                            <p:fltVal val="0"/>
+                                          </p:val>
+                                        </p:tav>
+                                        <p:tav tm="100000">
+                                          <p:val>
+                                            <p:strVal val="#ppt_h"/>
+                                          </p:val>
+                                        </p:tav>
+                                      </p:tavLst>
+                                    </p:anim>
+                                    <p:animEffect transition="in" filter="fade">
+                                      <p:cBhvr>
+                                        <p:cTn id="37" dur="500"/>
+                                        <p:tgtEl>
+                                          <p:spTgt spid="13">
+                                            <p:txEl>
+                                              <p:pRg st="0" end="0"/>
+                                            </p:txEl>
+                                          </p:spTgt>
+                                        </p:tgtEl>
+                                      </p:cBhvr>
+                                    </p:animEffect>
+                                  </p:childTnLst>
+                                </p:cTn>
+                              </p:par>
+                              <p:par>
+                                <p:cTn id="38" presetID="53" presetClass="entr" presetSubtype="16" fill="hold" nodeType="withEffect">
+                                  <p:stCondLst>
+                                    <p:cond delay="0"/>
+                                  </p:stCondLst>
+                                  <p:childTnLst>
+                                    <p:set>
+                                      <p:cBhvr>
+                                        <p:cTn id="39" dur="1" fill="hold">
+                                          <p:stCondLst>
+                                            <p:cond delay="0"/>
+                                          </p:stCondLst>
+                                        </p:cTn>
+                                        <p:tgtEl>
+                                          <p:spTgt spid="13">
+                                            <p:txEl>
+                                              <p:pRg st="1" end="1"/>
+                                            </p:txEl>
+                                          </p:spTgt>
+                                        </p:tgtEl>
+                                        <p:attrNameLst>
+                                          <p:attrName>style.visibility</p:attrName>
+                                        </p:attrNameLst>
+                                      </p:cBhvr>
+                                      <p:to>
+                                        <p:strVal val="visible"/>
+                                      </p:to>
+                                    </p:set>
+                                    <p:anim calcmode="lin" valueType="num">
+                                      <p:cBhvr>
+                                        <p:cTn id="40" dur="500" fill="hold"/>
+                                        <p:tgtEl>
+                                          <p:spTgt spid="13">
+                                            <p:txEl>
+                                              <p:pRg st="1" end="1"/>
+                                            </p:txEl>
+                                          </p:spTgt>
+                                        </p:tgtEl>
+                                        <p:attrNameLst>
+                                          <p:attrName>ppt_w</p:attrName>
+                                        </p:attrNameLst>
+                                      </p:cBhvr>
+                                      <p:tavLst>
+                                        <p:tav tm="0">
+                                          <p:val>
+                                            <p:fltVal val="0"/>
+                                          </p:val>
+                                        </p:tav>
+                                        <p:tav tm="100000">
+                                          <p:val>
+                                            <p:strVal val="#ppt_w"/>
+                                          </p:val>
+                                        </p:tav>
+                                      </p:tavLst>
+                                    </p:anim>
+                                    <p:anim calcmode="lin" valueType="num">
+                                      <p:cBhvr>
+                                        <p:cTn id="41" dur="500" fill="hold"/>
+                                        <p:tgtEl>
+                                          <p:spTgt spid="13">
+                                            <p:txEl>
+                                              <p:pRg st="1" end="1"/>
+                                            </p:txEl>
+                                          </p:spTgt>
+                                        </p:tgtEl>
+                                        <p:attrNameLst>
+                                          <p:attrName>ppt_h</p:attrName>
+                                        </p:attrNameLst>
+                                      </p:cBhvr>
+                                      <p:tavLst>
+                                        <p:tav tm="0">
+                                          <p:val>
+                                            <p:fltVal val="0"/>
+                                          </p:val>
+                                        </p:tav>
+                                        <p:tav tm="100000">
+                                          <p:val>
+                                            <p:strVal val="#ppt_h"/>
+                                          </p:val>
+                                        </p:tav>
+                                      </p:tavLst>
+                                    </p:anim>
+                                    <p:animEffect transition="in" filter="fade">
+                                      <p:cBhvr>
+                                        <p:cTn id="42" dur="500"/>
+                                        <p:tgtEl>
+                                          <p:spTgt spid="13">
+                                            <p:txEl>
+                                              <p:pRg st="1" end="1"/>
+                                            </p:txEl>
+                                          </p:spTgt>
+                                        </p:tgtEl>
+                                      </p:cBhvr>
+                                    </p:animEffect>
+                                  </p:childTnLst>
+                                </p:cTn>
+                              </p:par>
+                              <p:par>
+                                <p:cTn id="43" presetID="53" presetClass="entr" presetSubtype="16" fill="hold" nodeType="withEffect">
+                                  <p:stCondLst>
+                                    <p:cond delay="0"/>
+                                  </p:stCondLst>
+                                  <p:childTnLst>
+                                    <p:set>
+                                      <p:cBhvr>
+                                        <p:cTn id="44" dur="1" fill="hold">
+                                          <p:stCondLst>
+                                            <p:cond delay="0"/>
+                                          </p:stCondLst>
+                                        </p:cTn>
+                                        <p:tgtEl>
+                                          <p:spTgt spid="13">
+                                            <p:txEl>
+                                              <p:pRg st="2" end="2"/>
+                                            </p:txEl>
+                                          </p:spTgt>
+                                        </p:tgtEl>
+                                        <p:attrNameLst>
+                                          <p:attrName>style.visibility</p:attrName>
+                                        </p:attrNameLst>
+                                      </p:cBhvr>
+                                      <p:to>
+                                        <p:strVal val="visible"/>
+                                      </p:to>
+                                    </p:set>
+                                    <p:anim calcmode="lin" valueType="num">
+                                      <p:cBhvr>
+                                        <p:cTn id="45" dur="500" fill="hold"/>
+                                        <p:tgtEl>
+                                          <p:spTgt spid="13">
+                                            <p:txEl>
+                                              <p:pRg st="2" end="2"/>
+                                            </p:txEl>
+                                          </p:spTgt>
+                                        </p:tgtEl>
+                                        <p:attrNameLst>
+                                          <p:attrName>ppt_w</p:attrName>
+                                        </p:attrNameLst>
+                                      </p:cBhvr>
+                                      <p:tavLst>
+                                        <p:tav tm="0">
+                                          <p:val>
+                                            <p:fltVal val="0"/>
+                                          </p:val>
+                                        </p:tav>
+                                        <p:tav tm="100000">
+                                          <p:val>
+                                            <p:strVal val="#ppt_w"/>
+                                          </p:val>
+                                        </p:tav>
+                                      </p:tavLst>
+                                    </p:anim>
+                                    <p:anim calcmode="lin" valueType="num">
+                                      <p:cBhvr>
+                                        <p:cTn id="46" dur="500" fill="hold"/>
+                                        <p:tgtEl>
+                                          <p:spTgt spid="13">
+                                            <p:txEl>
+                                              <p:pRg st="2" end="2"/>
+                                            </p:txEl>
+                                          </p:spTgt>
+                                        </p:tgtEl>
+                                        <p:attrNameLst>
+                                          <p:attrName>ppt_h</p:attrName>
+                                        </p:attrNameLst>
+                                      </p:cBhvr>
+                                      <p:tavLst>
+                                        <p:tav tm="0">
+                                          <p:val>
+                                            <p:fltVal val="0"/>
+                                          </p:val>
+                                        </p:tav>
+                                        <p:tav tm="100000">
+                                          <p:val>
+                                            <p:strVal val="#ppt_h"/>
+                                          </p:val>
+                                        </p:tav>
+                                      </p:tavLst>
+                                    </p:anim>
+                                    <p:animEffect transition="in" filter="fade">
+                                      <p:cBhvr>
+                                        <p:cTn id="47" dur="500"/>
+                                        <p:tgtEl>
+                                          <p:spTgt spid="13">
+                                            <p:txEl>
+                                              <p:pRg st="2" end="2"/>
+                                            </p:txEl>
+                                          </p:spTgt>
+                                        </p:tgtEl>
+                                      </p:cBhvr>
+                                    </p:animEffect>
+                                  </p:childTnLst>
+                                </p:cTn>
+                              </p:par>
+                            </p:childTnLst>
+                          </p:cTn>
+                        </p:par>
+                      </p:childTnLst>
+                    </p:cTn>
+                  </p:par>
+                  <p:par>
+                    <p:cTn id="48" fill="hold">
+                      <p:stCondLst>
+                        <p:cond delay="indefinite"/>
+                      </p:stCondLst>
+                      <p:childTnLst>
+                        <p:par>
+                          <p:cTn id="49" fill="hold">
+                            <p:stCondLst>
+                              <p:cond delay="0"/>
+                            </p:stCondLst>
+                            <p:childTnLst>
+                              <p:par>
+                                <p:cTn id="50" presetID="53" presetClass="entr" presetSubtype="16" fill="hold" grpId="0" nodeType="clickEffect">
+                                  <p:stCondLst>
+                                    <p:cond delay="0"/>
+                                  </p:stCondLst>
+                                  <p:childTnLst>
+                                    <p:set>
+                                      <p:cBhvr>
+                                        <p:cTn id="51" dur="1" fill="hold">
+                                          <p:stCondLst>
+                                            <p:cond delay="0"/>
+                                          </p:stCondLst>
+                                        </p:cTn>
+                                        <p:tgtEl>
+                                          <p:spTgt spid="14"/>
+                                        </p:tgtEl>
+                                        <p:attrNameLst>
+                                          <p:attrName>style.visibility</p:attrName>
+                                        </p:attrNameLst>
+                                      </p:cBhvr>
+                                      <p:to>
+                                        <p:strVal val="visible"/>
+                                      </p:to>
+                                    </p:set>
+                                    <p:anim calcmode="lin" valueType="num">
+                                      <p:cBhvr>
+                                        <p:cTn id="52" dur="500" fill="hold"/>
+                                        <p:tgtEl>
+                                          <p:spTgt spid="14"/>
+                                        </p:tgtEl>
+                                        <p:attrNameLst>
+                                          <p:attrName>ppt_w</p:attrName>
+                                        </p:attrNameLst>
+                                      </p:cBhvr>
+                                      <p:tavLst>
+                                        <p:tav tm="0">
+                                          <p:val>
+                                            <p:fltVal val="0"/>
+                                          </p:val>
+                                        </p:tav>
+                                        <p:tav tm="100000">
+                                          <p:val>
+                                            <p:strVal val="#ppt_w"/>
+                                          </p:val>
+                                        </p:tav>
+                                      </p:tavLst>
+                                    </p:anim>
+                                    <p:anim calcmode="lin" valueType="num">
+                                      <p:cBhvr>
+                                        <p:cTn id="53" dur="500" fill="hold"/>
+                                        <p:tgtEl>
+                                          <p:spTgt spid="14"/>
+                                        </p:tgtEl>
+                                        <p:attrNameLst>
+                                          <p:attrName>ppt_h</p:attrName>
+                                        </p:attrNameLst>
+                                      </p:cBhvr>
+                                      <p:tavLst>
+                                        <p:tav tm="0">
+                                          <p:val>
+                                            <p:fltVal val="0"/>
+                                          </p:val>
+                                        </p:tav>
+                                        <p:tav tm="100000">
+                                          <p:val>
+                                            <p:strVal val="#ppt_h"/>
+                                          </p:val>
+                                        </p:tav>
+                                      </p:tavLst>
+                                    </p:anim>
+                                    <p:animEffect transition="in" filter="fade">
+                                      <p:cBhvr>
+                                        <p:cTn id="54" dur="500"/>
+                                        <p:tgtEl>
+                                          <p:spTgt spid="14"/>
+                                        </p:tgtEl>
+                                      </p:cBhvr>
+                                    </p:animEffect>
+                                  </p:childTnLst>
+                                </p:cTn>
+                              </p:par>
+                            </p:childTnLst>
+                          </p:cTn>
+                        </p:par>
+                      </p:childTnLst>
+                    </p:cTn>
+                  </p:par>
+                  <p:par>
+                    <p:cTn id="55" fill="hold">
+                      <p:stCondLst>
+                        <p:cond delay="indefinite"/>
+                      </p:stCondLst>
+                      <p:childTnLst>
+                        <p:par>
+                          <p:cTn id="56" fill="hold">
+                            <p:stCondLst>
+                              <p:cond delay="0"/>
+                            </p:stCondLst>
+                            <p:childTnLst>
+                              <p:par>
+                                <p:cTn id="57" presetID="53" presetClass="entr" presetSubtype="16" fill="hold" nodeType="clickEffect">
+                                  <p:stCondLst>
+                                    <p:cond delay="0"/>
+                                  </p:stCondLst>
+                                  <p:childTnLst>
+                                    <p:set>
+                                      <p:cBhvr>
+                                        <p:cTn id="58" dur="1" fill="hold">
+                                          <p:stCondLst>
+                                            <p:cond delay="0"/>
+                                          </p:stCondLst>
+                                        </p:cTn>
+                                        <p:tgtEl>
+                                          <p:spTgt spid="15">
+                                            <p:txEl>
+                                              <p:pRg st="0" end="0"/>
+                                            </p:txEl>
+                                          </p:spTgt>
+                                        </p:tgtEl>
+                                        <p:attrNameLst>
+                                          <p:attrName>style.visibility</p:attrName>
+                                        </p:attrNameLst>
+                                      </p:cBhvr>
+                                      <p:to>
+                                        <p:strVal val="visible"/>
+                                      </p:to>
+                                    </p:set>
+                                    <p:anim calcmode="lin" valueType="num">
+                                      <p:cBhvr>
+                                        <p:cTn id="59" dur="500" fill="hold"/>
+                                        <p:tgtEl>
+                                          <p:spTgt spid="15">
+                                            <p:txEl>
+                                              <p:pRg st="0" end="0"/>
+                                            </p:txEl>
+                                          </p:spTgt>
+                                        </p:tgtEl>
+                                        <p:attrNameLst>
+                                          <p:attrName>ppt_w</p:attrName>
+                                        </p:attrNameLst>
+                                      </p:cBhvr>
+                                      <p:tavLst>
+                                        <p:tav tm="0">
+                                          <p:val>
+                                            <p:fltVal val="0"/>
+                                          </p:val>
+                                        </p:tav>
+                                        <p:tav tm="100000">
+                                          <p:val>
+                                            <p:strVal val="#ppt_w"/>
+                                          </p:val>
+                                        </p:tav>
+                                      </p:tavLst>
+                                    </p:anim>
+                                    <p:anim calcmode="lin" valueType="num">
+                                      <p:cBhvr>
+                                        <p:cTn id="60" dur="500" fill="hold"/>
+                                        <p:tgtEl>
+                                          <p:spTgt spid="15">
+                                            <p:txEl>
+                                              <p:pRg st="0" end="0"/>
+                                            </p:txEl>
+                                          </p:spTgt>
+                                        </p:tgtEl>
+                                        <p:attrNameLst>
+                                          <p:attrName>ppt_h</p:attrName>
+                                        </p:attrNameLst>
+                                      </p:cBhvr>
+                                      <p:tavLst>
+                                        <p:tav tm="0">
+                                          <p:val>
+                                            <p:fltVal val="0"/>
+                                          </p:val>
+                                        </p:tav>
+                                        <p:tav tm="100000">
+                                          <p:val>
+                                            <p:strVal val="#ppt_h"/>
+                                          </p:val>
+                                        </p:tav>
+                                      </p:tavLst>
+                                    </p:anim>
+                                    <p:animEffect transition="in" filter="fade">
+                                      <p:cBhvr>
+                                        <p:cTn id="61" dur="500"/>
+                                        <p:tgtEl>
+                                          <p:spTgt spid="15">
+                                            <p:txEl>
+                                              <p:pRg st="0" end="0"/>
+                                            </p:txEl>
+                                          </p:spTgt>
+                                        </p:tgtEl>
+                                      </p:cBhvr>
+                                    </p:animEffect>
+                                  </p:childTnLst>
+                                </p:cTn>
+                              </p:par>
+                            </p:childTnLst>
+                          </p:cTn>
+                        </p:par>
+                      </p:childTnLst>
+                    </p:cTn>
+                  </p:par>
+                  <p:par>
+                    <p:cTn id="62" fill="hold">
+                      <p:stCondLst>
+                        <p:cond delay="indefinite"/>
+                      </p:stCondLst>
+                      <p:childTnLst>
+                        <p:par>
+                          <p:cTn id="63" fill="hold">
+                            <p:stCondLst>
+                              <p:cond delay="0"/>
+                            </p:stCondLst>
+                            <p:childTnLst>
+                              <p:par>
+                                <p:cTn id="64" presetID="53" presetClass="entr" presetSubtype="16" fill="hold" nodeType="clickEffect">
+                                  <p:stCondLst>
+                                    <p:cond delay="0"/>
+                                  </p:stCondLst>
+                                  <p:childTnLst>
+                                    <p:set>
+                                      <p:cBhvr>
+                                        <p:cTn id="65" dur="1" fill="hold">
+                                          <p:stCondLst>
+                                            <p:cond delay="0"/>
+                                          </p:stCondLst>
+                                        </p:cTn>
+                                        <p:tgtEl>
+                                          <p:spTgt spid="16">
+                                            <p:txEl>
+                                              <p:pRg st="0" end="0"/>
+                                            </p:txEl>
+                                          </p:spTgt>
+                                        </p:tgtEl>
+                                        <p:attrNameLst>
+                                          <p:attrName>style.visibility</p:attrName>
+                                        </p:attrNameLst>
+                                      </p:cBhvr>
+                                      <p:to>
+                                        <p:strVal val="visible"/>
+                                      </p:to>
+                                    </p:set>
+                                    <p:anim calcmode="lin" valueType="num">
+                                      <p:cBhvr>
+                                        <p:cTn id="66" dur="500" fill="hold"/>
+                                        <p:tgtEl>
+                                          <p:spTgt spid="16">
+                                            <p:txEl>
+                                              <p:pRg st="0" end="0"/>
+                                            </p:txEl>
+                                          </p:spTgt>
+                                        </p:tgtEl>
+                                        <p:attrNameLst>
+                                          <p:attrName>ppt_w</p:attrName>
+                                        </p:attrNameLst>
+                                      </p:cBhvr>
+                                      <p:tavLst>
+                                        <p:tav tm="0">
+                                          <p:val>
+                                            <p:fltVal val="0"/>
+                                          </p:val>
+                                        </p:tav>
+                                        <p:tav tm="100000">
+                                          <p:val>
+                                            <p:strVal val="#ppt_w"/>
+                                          </p:val>
+                                        </p:tav>
+                                      </p:tavLst>
+                                    </p:anim>
+                                    <p:anim calcmode="lin" valueType="num">
+                                      <p:cBhvr>
+                                        <p:cTn id="67" dur="500" fill="hold"/>
+                                        <p:tgtEl>
+                                          <p:spTgt spid="16">
+                                            <p:txEl>
+                                              <p:pRg st="0" end="0"/>
+                                            </p:txEl>
+                                          </p:spTgt>
+                                        </p:tgtEl>
+                                        <p:attrNameLst>
+                                          <p:attrName>ppt_h</p:attrName>
+                                        </p:attrNameLst>
+                                      </p:cBhvr>
+                                      <p:tavLst>
+                                        <p:tav tm="0">
+                                          <p:val>
+                                            <p:fltVal val="0"/>
+                                          </p:val>
+                                        </p:tav>
+                                        <p:tav tm="100000">
+                                          <p:val>
+                                            <p:strVal val="#ppt_h"/>
+                                          </p:val>
+                                        </p:tav>
+                                      </p:tavLst>
+                                    </p:anim>
+                                    <p:animEffect transition="in" filter="fade">
+                                      <p:cBhvr>
+                                        <p:cTn id="68" dur="500"/>
+                                        <p:tgtEl>
+                                          <p:spTgt spid="16">
+                                            <p:txEl>
+                                              <p:pRg st="0" end="0"/>
+                                            </p:txEl>
+                                          </p:spTgt>
+                                        </p:tgtEl>
+                                      </p:cBhvr>
+                                    </p:animEffect>
+                                  </p:childTnLst>
+                                </p:cTn>
+                              </p:par>
+                            </p:childTnLst>
+                          </p:cTn>
+                        </p:par>
+                      </p:childTnLst>
+                    </p:cTn>
+                  </p:par>
+                </p:childTnLst>
+              </p:cTn>
+              <p:prevCondLst>
+                <p:cond evt="onPrev" delay="0">
+                  <p:tgtEl>
+                    <p:sldTgt/>
+                  </p:tgtEl>
+                </p:cond>
+              </p:prevCondLst>
+              <p:nextCondLst>
+                <p:cond evt="onNext" delay="0">
+                  <p:tgtEl>
+                    <p:sldTgt/>
+                  </p:tgtEl>
+                </p:cond>
+              </p:nextCondLst>
+            </p:seq>
+          </p:childTnLst>
+        </p:cTn>
+      </p:par>
+    </p:tnLst>
+    <p:bldLst>
+      <p:bldP spid="9" grpId="0" animBg="1"/>
+      <p:bldP spid="14" grpId="0" animBg="1"/>
+    </p:bldLst>
+  </p:timing>
 </p:sld>
 </file>
 
@@ -9727,6 +16029,716 @@
   <p:clrMapOvr>
     <a:masterClrMapping/>
   </p:clrMapOvr>
+  <p:transition>
+    <p:fade/>
+  </p:transition>
+  <p:timing>
+    <p:tnLst>
+      <p:par>
+        <p:cTn id="1" dur="indefinite" restart="never" nodeType="tmRoot">
+          <p:childTnLst>
+            <p:seq concurrent="1" nextAc="seek">
+              <p:cTn id="2" dur="indefinite" nodeType="mainSeq">
+                <p:childTnLst>
+                  <p:par>
+                    <p:cTn id="3" fill="hold">
+                      <p:stCondLst>
+                        <p:cond delay="indefinite"/>
+                      </p:stCondLst>
+                      <p:childTnLst>
+                        <p:par>
+                          <p:cTn id="4" fill="hold">
+                            <p:stCondLst>
+                              <p:cond delay="0"/>
+                            </p:stCondLst>
+                            <p:childTnLst>
+                              <p:par>
+                                <p:cTn id="5" presetID="53" presetClass="entr" presetSubtype="16" fill="hold" nodeType="clickEffect">
+                                  <p:stCondLst>
+                                    <p:cond delay="0"/>
+                                  </p:stCondLst>
+                                  <p:childTnLst>
+                                    <p:set>
+                                      <p:cBhvr>
+                                        <p:cTn id="6" dur="1" fill="hold">
+                                          <p:stCondLst>
+                                            <p:cond delay="0"/>
+                                          </p:stCondLst>
+                                        </p:cTn>
+                                        <p:tgtEl>
+                                          <p:spTgt spid="6">
+                                            <p:txEl>
+                                              <p:pRg st="0" end="0"/>
+                                            </p:txEl>
+                                          </p:spTgt>
+                                        </p:tgtEl>
+                                        <p:attrNameLst>
+                                          <p:attrName>style.visibility</p:attrName>
+                                        </p:attrNameLst>
+                                      </p:cBhvr>
+                                      <p:to>
+                                        <p:strVal val="visible"/>
+                                      </p:to>
+                                    </p:set>
+                                    <p:anim calcmode="lin" valueType="num">
+                                      <p:cBhvr>
+                                        <p:cTn id="7" dur="500" fill="hold"/>
+                                        <p:tgtEl>
+                                          <p:spTgt spid="6">
+                                            <p:txEl>
+                                              <p:pRg st="0" end="0"/>
+                                            </p:txEl>
+                                          </p:spTgt>
+                                        </p:tgtEl>
+                                        <p:attrNameLst>
+                                          <p:attrName>ppt_w</p:attrName>
+                                        </p:attrNameLst>
+                                      </p:cBhvr>
+                                      <p:tavLst>
+                                        <p:tav tm="0">
+                                          <p:val>
+                                            <p:fltVal val="0"/>
+                                          </p:val>
+                                        </p:tav>
+                                        <p:tav tm="100000">
+                                          <p:val>
+                                            <p:strVal val="#ppt_w"/>
+                                          </p:val>
+                                        </p:tav>
+                                      </p:tavLst>
+                                    </p:anim>
+                                    <p:anim calcmode="lin" valueType="num">
+                                      <p:cBhvr>
+                                        <p:cTn id="8" dur="500" fill="hold"/>
+                                        <p:tgtEl>
+                                          <p:spTgt spid="6">
+                                            <p:txEl>
+                                              <p:pRg st="0" end="0"/>
+                                            </p:txEl>
+                                          </p:spTgt>
+                                        </p:tgtEl>
+                                        <p:attrNameLst>
+                                          <p:attrName>ppt_h</p:attrName>
+                                        </p:attrNameLst>
+                                      </p:cBhvr>
+                                      <p:tavLst>
+                                        <p:tav tm="0">
+                                          <p:val>
+                                            <p:fltVal val="0"/>
+                                          </p:val>
+                                        </p:tav>
+                                        <p:tav tm="100000">
+                                          <p:val>
+                                            <p:strVal val="#ppt_h"/>
+                                          </p:val>
+                                        </p:tav>
+                                      </p:tavLst>
+                                    </p:anim>
+                                    <p:animEffect transition="in" filter="fade">
+                                      <p:cBhvr>
+                                        <p:cTn id="9" dur="500"/>
+                                        <p:tgtEl>
+                                          <p:spTgt spid="6">
+                                            <p:txEl>
+                                              <p:pRg st="0" end="0"/>
+                                            </p:txEl>
+                                          </p:spTgt>
+                                        </p:tgtEl>
+                                      </p:cBhvr>
+                                    </p:animEffect>
+                                  </p:childTnLst>
+                                </p:cTn>
+                              </p:par>
+                            </p:childTnLst>
+                          </p:cTn>
+                        </p:par>
+                      </p:childTnLst>
+                    </p:cTn>
+                  </p:par>
+                  <p:par>
+                    <p:cTn id="10" fill="hold">
+                      <p:stCondLst>
+                        <p:cond delay="indefinite"/>
+                      </p:stCondLst>
+                      <p:childTnLst>
+                        <p:par>
+                          <p:cTn id="11" fill="hold">
+                            <p:stCondLst>
+                              <p:cond delay="0"/>
+                            </p:stCondLst>
+                            <p:childTnLst>
+                              <p:par>
+                                <p:cTn id="12" presetID="53" presetClass="entr" presetSubtype="16" fill="hold" nodeType="clickEffect">
+                                  <p:stCondLst>
+                                    <p:cond delay="0"/>
+                                  </p:stCondLst>
+                                  <p:childTnLst>
+                                    <p:set>
+                                      <p:cBhvr>
+                                        <p:cTn id="13" dur="1" fill="hold">
+                                          <p:stCondLst>
+                                            <p:cond delay="0"/>
+                                          </p:stCondLst>
+                                        </p:cTn>
+                                        <p:tgtEl>
+                                          <p:spTgt spid="6">
+                                            <p:txEl>
+                                              <p:pRg st="1" end="1"/>
+                                            </p:txEl>
+                                          </p:spTgt>
+                                        </p:tgtEl>
+                                        <p:attrNameLst>
+                                          <p:attrName>style.visibility</p:attrName>
+                                        </p:attrNameLst>
+                                      </p:cBhvr>
+                                      <p:to>
+                                        <p:strVal val="visible"/>
+                                      </p:to>
+                                    </p:set>
+                                    <p:anim calcmode="lin" valueType="num">
+                                      <p:cBhvr>
+                                        <p:cTn id="14" dur="500" fill="hold"/>
+                                        <p:tgtEl>
+                                          <p:spTgt spid="6">
+                                            <p:txEl>
+                                              <p:pRg st="1" end="1"/>
+                                            </p:txEl>
+                                          </p:spTgt>
+                                        </p:tgtEl>
+                                        <p:attrNameLst>
+                                          <p:attrName>ppt_w</p:attrName>
+                                        </p:attrNameLst>
+                                      </p:cBhvr>
+                                      <p:tavLst>
+                                        <p:tav tm="0">
+                                          <p:val>
+                                            <p:fltVal val="0"/>
+                                          </p:val>
+                                        </p:tav>
+                                        <p:tav tm="100000">
+                                          <p:val>
+                                            <p:strVal val="#ppt_w"/>
+                                          </p:val>
+                                        </p:tav>
+                                      </p:tavLst>
+                                    </p:anim>
+                                    <p:anim calcmode="lin" valueType="num">
+                                      <p:cBhvr>
+                                        <p:cTn id="15" dur="500" fill="hold"/>
+                                        <p:tgtEl>
+                                          <p:spTgt spid="6">
+                                            <p:txEl>
+                                              <p:pRg st="1" end="1"/>
+                                            </p:txEl>
+                                          </p:spTgt>
+                                        </p:tgtEl>
+                                        <p:attrNameLst>
+                                          <p:attrName>ppt_h</p:attrName>
+                                        </p:attrNameLst>
+                                      </p:cBhvr>
+                                      <p:tavLst>
+                                        <p:tav tm="0">
+                                          <p:val>
+                                            <p:fltVal val="0"/>
+                                          </p:val>
+                                        </p:tav>
+                                        <p:tav tm="100000">
+                                          <p:val>
+                                            <p:strVal val="#ppt_h"/>
+                                          </p:val>
+                                        </p:tav>
+                                      </p:tavLst>
+                                    </p:anim>
+                                    <p:animEffect transition="in" filter="fade">
+                                      <p:cBhvr>
+                                        <p:cTn id="16" dur="500"/>
+                                        <p:tgtEl>
+                                          <p:spTgt spid="6">
+                                            <p:txEl>
+                                              <p:pRg st="1" end="1"/>
+                                            </p:txEl>
+                                          </p:spTgt>
+                                        </p:tgtEl>
+                                      </p:cBhvr>
+                                    </p:animEffect>
+                                  </p:childTnLst>
+                                </p:cTn>
+                              </p:par>
+                            </p:childTnLst>
+                          </p:cTn>
+                        </p:par>
+                      </p:childTnLst>
+                    </p:cTn>
+                  </p:par>
+                  <p:par>
+                    <p:cTn id="17" fill="hold">
+                      <p:stCondLst>
+                        <p:cond delay="indefinite"/>
+                      </p:stCondLst>
+                      <p:childTnLst>
+                        <p:par>
+                          <p:cTn id="18" fill="hold">
+                            <p:stCondLst>
+                              <p:cond delay="0"/>
+                            </p:stCondLst>
+                            <p:childTnLst>
+                              <p:par>
+                                <p:cTn id="19" presetID="53" presetClass="entr" presetSubtype="16" fill="hold" nodeType="clickEffect">
+                                  <p:stCondLst>
+                                    <p:cond delay="0"/>
+                                  </p:stCondLst>
+                                  <p:childTnLst>
+                                    <p:set>
+                                      <p:cBhvr>
+                                        <p:cTn id="20" dur="1" fill="hold">
+                                          <p:stCondLst>
+                                            <p:cond delay="0"/>
+                                          </p:stCondLst>
+                                        </p:cTn>
+                                        <p:tgtEl>
+                                          <p:spTgt spid="6">
+                                            <p:txEl>
+                                              <p:pRg st="2" end="2"/>
+                                            </p:txEl>
+                                          </p:spTgt>
+                                        </p:tgtEl>
+                                        <p:attrNameLst>
+                                          <p:attrName>style.visibility</p:attrName>
+                                        </p:attrNameLst>
+                                      </p:cBhvr>
+                                      <p:to>
+                                        <p:strVal val="visible"/>
+                                      </p:to>
+                                    </p:set>
+                                    <p:anim calcmode="lin" valueType="num">
+                                      <p:cBhvr>
+                                        <p:cTn id="21" dur="500" fill="hold"/>
+                                        <p:tgtEl>
+                                          <p:spTgt spid="6">
+                                            <p:txEl>
+                                              <p:pRg st="2" end="2"/>
+                                            </p:txEl>
+                                          </p:spTgt>
+                                        </p:tgtEl>
+                                        <p:attrNameLst>
+                                          <p:attrName>ppt_w</p:attrName>
+                                        </p:attrNameLst>
+                                      </p:cBhvr>
+                                      <p:tavLst>
+                                        <p:tav tm="0">
+                                          <p:val>
+                                            <p:fltVal val="0"/>
+                                          </p:val>
+                                        </p:tav>
+                                        <p:tav tm="100000">
+                                          <p:val>
+                                            <p:strVal val="#ppt_w"/>
+                                          </p:val>
+                                        </p:tav>
+                                      </p:tavLst>
+                                    </p:anim>
+                                    <p:anim calcmode="lin" valueType="num">
+                                      <p:cBhvr>
+                                        <p:cTn id="22" dur="500" fill="hold"/>
+                                        <p:tgtEl>
+                                          <p:spTgt spid="6">
+                                            <p:txEl>
+                                              <p:pRg st="2" end="2"/>
+                                            </p:txEl>
+                                          </p:spTgt>
+                                        </p:tgtEl>
+                                        <p:attrNameLst>
+                                          <p:attrName>ppt_h</p:attrName>
+                                        </p:attrNameLst>
+                                      </p:cBhvr>
+                                      <p:tavLst>
+                                        <p:tav tm="0">
+                                          <p:val>
+                                            <p:fltVal val="0"/>
+                                          </p:val>
+                                        </p:tav>
+                                        <p:tav tm="100000">
+                                          <p:val>
+                                            <p:strVal val="#ppt_h"/>
+                                          </p:val>
+                                        </p:tav>
+                                      </p:tavLst>
+                                    </p:anim>
+                                    <p:animEffect transition="in" filter="fade">
+                                      <p:cBhvr>
+                                        <p:cTn id="23" dur="500"/>
+                                        <p:tgtEl>
+                                          <p:spTgt spid="6">
+                                            <p:txEl>
+                                              <p:pRg st="2" end="2"/>
+                                            </p:txEl>
+                                          </p:spTgt>
+                                        </p:tgtEl>
+                                      </p:cBhvr>
+                                    </p:animEffect>
+                                  </p:childTnLst>
+                                </p:cTn>
+                              </p:par>
+                            </p:childTnLst>
+                          </p:cTn>
+                        </p:par>
+                      </p:childTnLst>
+                    </p:cTn>
+                  </p:par>
+                  <p:par>
+                    <p:cTn id="24" fill="hold">
+                      <p:stCondLst>
+                        <p:cond delay="indefinite"/>
+                      </p:stCondLst>
+                      <p:childTnLst>
+                        <p:par>
+                          <p:cTn id="25" fill="hold">
+                            <p:stCondLst>
+                              <p:cond delay="0"/>
+                            </p:stCondLst>
+                            <p:childTnLst>
+                              <p:par>
+                                <p:cTn id="26" presetID="53" presetClass="entr" presetSubtype="16" fill="hold" grpId="1" nodeType="clickEffect">
+                                  <p:stCondLst>
+                                    <p:cond delay="0"/>
+                                  </p:stCondLst>
+                                  <p:childTnLst>
+                                    <p:set>
+                                      <p:cBhvr>
+                                        <p:cTn id="27" dur="1" fill="hold">
+                                          <p:stCondLst>
+                                            <p:cond delay="0"/>
+                                          </p:stCondLst>
+                                        </p:cTn>
+                                        <p:tgtEl>
+                                          <p:spTgt spid="7"/>
+                                        </p:tgtEl>
+                                        <p:attrNameLst>
+                                          <p:attrName>style.visibility</p:attrName>
+                                        </p:attrNameLst>
+                                      </p:cBhvr>
+                                      <p:to>
+                                        <p:strVal val="visible"/>
+                                      </p:to>
+                                    </p:set>
+                                    <p:anim calcmode="lin" valueType="num">
+                                      <p:cBhvr>
+                                        <p:cTn id="28" dur="500" fill="hold"/>
+                                        <p:tgtEl>
+                                          <p:spTgt spid="7"/>
+                                        </p:tgtEl>
+                                        <p:attrNameLst>
+                                          <p:attrName>ppt_w</p:attrName>
+                                        </p:attrNameLst>
+                                      </p:cBhvr>
+                                      <p:tavLst>
+                                        <p:tav tm="0">
+                                          <p:val>
+                                            <p:fltVal val="0"/>
+                                          </p:val>
+                                        </p:tav>
+                                        <p:tav tm="100000">
+                                          <p:val>
+                                            <p:strVal val="#ppt_w"/>
+                                          </p:val>
+                                        </p:tav>
+                                      </p:tavLst>
+                                    </p:anim>
+                                    <p:anim calcmode="lin" valueType="num">
+                                      <p:cBhvr>
+                                        <p:cTn id="29" dur="500" fill="hold"/>
+                                        <p:tgtEl>
+                                          <p:spTgt spid="7"/>
+                                        </p:tgtEl>
+                                        <p:attrNameLst>
+                                          <p:attrName>ppt_h</p:attrName>
+                                        </p:attrNameLst>
+                                      </p:cBhvr>
+                                      <p:tavLst>
+                                        <p:tav tm="0">
+                                          <p:val>
+                                            <p:fltVal val="0"/>
+                                          </p:val>
+                                        </p:tav>
+                                        <p:tav tm="100000">
+                                          <p:val>
+                                            <p:strVal val="#ppt_h"/>
+                                          </p:val>
+                                        </p:tav>
+                                      </p:tavLst>
+                                    </p:anim>
+                                    <p:animEffect transition="in" filter="fade">
+                                      <p:cBhvr>
+                                        <p:cTn id="30" dur="500"/>
+                                        <p:tgtEl>
+                                          <p:spTgt spid="7"/>
+                                        </p:tgtEl>
+                                      </p:cBhvr>
+                                    </p:animEffect>
+                                  </p:childTnLst>
+                                </p:cTn>
+                              </p:par>
+                            </p:childTnLst>
+                          </p:cTn>
+                        </p:par>
+                      </p:childTnLst>
+                    </p:cTn>
+                  </p:par>
+                  <p:par>
+                    <p:cTn id="31" fill="hold">
+                      <p:stCondLst>
+                        <p:cond delay="indefinite"/>
+                      </p:stCondLst>
+                      <p:childTnLst>
+                        <p:par>
+                          <p:cTn id="32" fill="hold">
+                            <p:stCondLst>
+                              <p:cond delay="0"/>
+                            </p:stCondLst>
+                            <p:childTnLst>
+                              <p:par>
+                                <p:cTn id="33" presetID="53" presetClass="entr" presetSubtype="16" fill="hold" nodeType="clickEffect">
+                                  <p:stCondLst>
+                                    <p:cond delay="0"/>
+                                  </p:stCondLst>
+                                  <p:childTnLst>
+                                    <p:set>
+                                      <p:cBhvr>
+                                        <p:cTn id="34" dur="1" fill="hold">
+                                          <p:stCondLst>
+                                            <p:cond delay="0"/>
+                                          </p:stCondLst>
+                                        </p:cTn>
+                                        <p:tgtEl>
+                                          <p:spTgt spid="8">
+                                            <p:txEl>
+                                              <p:pRg st="0" end="0"/>
+                                            </p:txEl>
+                                          </p:spTgt>
+                                        </p:tgtEl>
+                                        <p:attrNameLst>
+                                          <p:attrName>style.visibility</p:attrName>
+                                        </p:attrNameLst>
+                                      </p:cBhvr>
+                                      <p:to>
+                                        <p:strVal val="visible"/>
+                                      </p:to>
+                                    </p:set>
+                                    <p:anim calcmode="lin" valueType="num">
+                                      <p:cBhvr>
+                                        <p:cTn id="35" dur="500" fill="hold"/>
+                                        <p:tgtEl>
+                                          <p:spTgt spid="8">
+                                            <p:txEl>
+                                              <p:pRg st="0" end="0"/>
+                                            </p:txEl>
+                                          </p:spTgt>
+                                        </p:tgtEl>
+                                        <p:attrNameLst>
+                                          <p:attrName>ppt_w</p:attrName>
+                                        </p:attrNameLst>
+                                      </p:cBhvr>
+                                      <p:tavLst>
+                                        <p:tav tm="0">
+                                          <p:val>
+                                            <p:fltVal val="0"/>
+                                          </p:val>
+                                        </p:tav>
+                                        <p:tav tm="100000">
+                                          <p:val>
+                                            <p:strVal val="#ppt_w"/>
+                                          </p:val>
+                                        </p:tav>
+                                      </p:tavLst>
+                                    </p:anim>
+                                    <p:anim calcmode="lin" valueType="num">
+                                      <p:cBhvr>
+                                        <p:cTn id="36" dur="500" fill="hold"/>
+                                        <p:tgtEl>
+                                          <p:spTgt spid="8">
+                                            <p:txEl>
+                                              <p:pRg st="0" end="0"/>
+                                            </p:txEl>
+                                          </p:spTgt>
+                                        </p:tgtEl>
+                                        <p:attrNameLst>
+                                          <p:attrName>ppt_h</p:attrName>
+                                        </p:attrNameLst>
+                                      </p:cBhvr>
+                                      <p:tavLst>
+                                        <p:tav tm="0">
+                                          <p:val>
+                                            <p:fltVal val="0"/>
+                                          </p:val>
+                                        </p:tav>
+                                        <p:tav tm="100000">
+                                          <p:val>
+                                            <p:strVal val="#ppt_h"/>
+                                          </p:val>
+                                        </p:tav>
+                                      </p:tavLst>
+                                    </p:anim>
+                                    <p:animEffect transition="in" filter="fade">
+                                      <p:cBhvr>
+                                        <p:cTn id="37" dur="500"/>
+                                        <p:tgtEl>
+                                          <p:spTgt spid="8">
+                                            <p:txEl>
+                                              <p:pRg st="0" end="0"/>
+                                            </p:txEl>
+                                          </p:spTgt>
+                                        </p:tgtEl>
+                                      </p:cBhvr>
+                                    </p:animEffect>
+                                  </p:childTnLst>
+                                </p:cTn>
+                              </p:par>
+                            </p:childTnLst>
+                          </p:cTn>
+                        </p:par>
+                      </p:childTnLst>
+                    </p:cTn>
+                  </p:par>
+                  <p:par>
+                    <p:cTn id="38" fill="hold">
+                      <p:stCondLst>
+                        <p:cond delay="indefinite"/>
+                      </p:stCondLst>
+                      <p:childTnLst>
+                        <p:par>
+                          <p:cTn id="39" fill="hold">
+                            <p:stCondLst>
+                              <p:cond delay="0"/>
+                            </p:stCondLst>
+                            <p:childTnLst>
+                              <p:par>
+                                <p:cTn id="40" presetID="53" presetClass="entr" presetSubtype="16" fill="hold" nodeType="clickEffect">
+                                  <p:stCondLst>
+                                    <p:cond delay="0"/>
+                                  </p:stCondLst>
+                                  <p:childTnLst>
+                                    <p:set>
+                                      <p:cBhvr>
+                                        <p:cTn id="41" dur="1" fill="hold">
+                                          <p:stCondLst>
+                                            <p:cond delay="0"/>
+                                          </p:stCondLst>
+                                        </p:cTn>
+                                        <p:tgtEl>
+                                          <p:spTgt spid="9">
+                                            <p:txEl>
+                                              <p:pRg st="0" end="0"/>
+                                            </p:txEl>
+                                          </p:spTgt>
+                                        </p:tgtEl>
+                                        <p:attrNameLst>
+                                          <p:attrName>style.visibility</p:attrName>
+                                        </p:attrNameLst>
+                                      </p:cBhvr>
+                                      <p:to>
+                                        <p:strVal val="visible"/>
+                                      </p:to>
+                                    </p:set>
+                                    <p:anim calcmode="lin" valueType="num">
+                                      <p:cBhvr>
+                                        <p:cTn id="42" dur="500" fill="hold"/>
+                                        <p:tgtEl>
+                                          <p:spTgt spid="9">
+                                            <p:txEl>
+                                              <p:pRg st="0" end="0"/>
+                                            </p:txEl>
+                                          </p:spTgt>
+                                        </p:tgtEl>
+                                        <p:attrNameLst>
+                                          <p:attrName>ppt_w</p:attrName>
+                                        </p:attrNameLst>
+                                      </p:cBhvr>
+                                      <p:tavLst>
+                                        <p:tav tm="0">
+                                          <p:val>
+                                            <p:fltVal val="0"/>
+                                          </p:val>
+                                        </p:tav>
+                                        <p:tav tm="100000">
+                                          <p:val>
+                                            <p:strVal val="#ppt_w"/>
+                                          </p:val>
+                                        </p:tav>
+                                      </p:tavLst>
+                                    </p:anim>
+                                    <p:anim calcmode="lin" valueType="num">
+                                      <p:cBhvr>
+                                        <p:cTn id="43" dur="500" fill="hold"/>
+                                        <p:tgtEl>
+                                          <p:spTgt spid="9">
+                                            <p:txEl>
+                                              <p:pRg st="0" end="0"/>
+                                            </p:txEl>
+                                          </p:spTgt>
+                                        </p:tgtEl>
+                                        <p:attrNameLst>
+                                          <p:attrName>ppt_h</p:attrName>
+                                        </p:attrNameLst>
+                                      </p:cBhvr>
+                                      <p:tavLst>
+                                        <p:tav tm="0">
+                                          <p:val>
+                                            <p:fltVal val="0"/>
+                                          </p:val>
+                                        </p:tav>
+                                        <p:tav tm="100000">
+                                          <p:val>
+                                            <p:strVal val="#ppt_h"/>
+                                          </p:val>
+                                        </p:tav>
+                                      </p:tavLst>
+                                    </p:anim>
+                                    <p:animEffect transition="in" filter="fade">
+                                      <p:cBhvr>
+                                        <p:cTn id="44" dur="500"/>
+                                        <p:tgtEl>
+                                          <p:spTgt spid="9">
+                                            <p:txEl>
+                                              <p:pRg st="0" end="0"/>
+                                            </p:txEl>
+                                          </p:spTgt>
+                                        </p:tgtEl>
+                                      </p:cBhvr>
+                                    </p:animEffect>
+                                  </p:childTnLst>
+                                </p:cTn>
+                              </p:par>
+                            </p:childTnLst>
+                          </p:cTn>
+                        </p:par>
+                      </p:childTnLst>
+                    </p:cTn>
+                  </p:par>
+                </p:childTnLst>
+              </p:cTn>
+              <p:prevCondLst>
+                <p:cond evt="onPrev" delay="0">
+                  <p:tgtEl>
+                    <p:sldTgt/>
+                  </p:tgtEl>
+                </p:cond>
+              </p:prevCondLst>
+              <p:nextCondLst>
+                <p:cond evt="onNext" delay="0">
+                  <p:tgtEl>
+                    <p:sldTgt/>
+                  </p:tgtEl>
+                </p:cond>
+              </p:nextCondLst>
+            </p:seq>
+          </p:childTnLst>
+        </p:cTn>
+      </p:par>
+    </p:tnLst>
+    <p:bldLst>
+      <p:bldP spid="7" grpId="1" animBg="1"/>
+    </p:bldLst>
+  </p:timing>
 </p:sld>
 </file>
 
@@ -9931,25 +16943,11 @@
             </a:pPr>
             <a:r>
               <a:rPr lang="en-US" sz="1200" b="1" dirty="0">
-                <a:solidFill>
-                  <a:srgbClr val="272525"/>
-                </a:solidFill>
                 <a:latin typeface="Inter" pitchFamily="34" charset="0"/>
                 <a:ea typeface="Inter" pitchFamily="34" charset="-122"/>
-                <a:cs typeface="Inter" pitchFamily="34" charset="-120"/>
+                <a:cs typeface="IrisUPC" panose="020B0604020202020204" pitchFamily="34" charset="0"/>
               </a:rPr>
-              <a:t>Question:</a:t>
-            </a:r>
-            <a:r>
-              <a:rPr lang="en-US" sz="1200" dirty="0">
-                <a:solidFill>
-                  <a:srgbClr val="272525"/>
-                </a:solidFill>
-                <a:latin typeface="Inter" pitchFamily="34" charset="0"/>
-                <a:ea typeface="Inter" pitchFamily="34" charset="-122"/>
-                <a:cs typeface="Inter" pitchFamily="34" charset="-120"/>
-              </a:rPr>
-              <a:t> "What should I do if a patient is in opioid withdrawal?"</a:t>
+              <a:t>Question: “How do you see your role as a nursing professional as it relates to the opioid crisis in this community”?</a:t>
             </a:r>
             <a:endParaRPr lang="en-US" sz="1200" dirty="0"/>
           </a:p>
@@ -10047,6 +17045,127 @@
           <a:bodyPr wrap="square" lIns="0" tIns="0" rIns="0" bIns="0" rtlCol="0" anchor="t"/>
           <a:lstStyle/>
           <a:p>
+            <a:pPr>
+              <a:lnSpc>
+                <a:spcPts val="1650"/>
+              </a:lnSpc>
+            </a:pPr>
+            <a:r>
+              <a:rPr lang="en-US" sz="1200" dirty="0">
+                <a:solidFill>
+                  <a:srgbClr val="272525"/>
+                </a:solidFill>
+                <a:latin typeface="Inter" pitchFamily="34" charset="0"/>
+                <a:ea typeface="Inter" pitchFamily="34" charset="-122"/>
+                <a:cs typeface="Inter" pitchFamily="34" charset="-120"/>
+              </a:rPr>
+              <a:t>"benzodiazepines plus opioids greatly raise overdose risk."</a:t>
+            </a:r>
+            <a:endParaRPr lang="en-US" sz="1200" dirty="0"/>
+          </a:p>
+          <a:p>
+            <a:pPr marL="0" indent="0" algn="l">
+              <a:lnSpc>
+                <a:spcPts val="1650"/>
+              </a:lnSpc>
+              <a:buNone/>
+            </a:pPr>
+            <a:endParaRPr lang="en-US" sz="1200" dirty="0"/>
+          </a:p>
+        </p:txBody>
+      </p:sp>
+      <p:sp>
+        <p:nvSpPr>
+          <p:cNvPr id="10" name="Shape 8"/>
+          <p:cNvSpPr/>
+          <p:nvPr/>
+        </p:nvSpPr>
+        <p:spPr>
+          <a:xfrm>
+            <a:off x="7400568" y="2525078"/>
+            <a:ext cx="5414367" cy="1396365"/>
+          </a:xfrm>
+          <a:prstGeom prst="roundRect">
+            <a:avLst>
+              <a:gd name="adj" fmla="val 8041"/>
+            </a:avLst>
+          </a:prstGeom>
+          <a:solidFill>
+            <a:srgbClr val="F5FBF6"/>
+          </a:solidFill>
+          <a:ln/>
+        </p:spPr>
+        <p:txBody>
+          <a:bodyPr/>
+          <a:lstStyle/>
+          <a:p>
+            <a:endParaRPr lang="en-US"/>
+          </a:p>
+        </p:txBody>
+      </p:sp>
+      <p:sp>
+        <p:nvSpPr>
+          <p:cNvPr id="11" name="Text 9"/>
+          <p:cNvSpPr/>
+          <p:nvPr/>
+        </p:nvSpPr>
+        <p:spPr>
+          <a:xfrm>
+            <a:off x="7556421" y="2632234"/>
+            <a:ext cx="4452580" cy="243602"/>
+          </a:xfrm>
+          <a:prstGeom prst="rect">
+            <a:avLst/>
+          </a:prstGeom>
+          <a:noFill/>
+          <a:ln/>
+        </p:spPr>
+        <p:txBody>
+          <a:bodyPr wrap="none" lIns="0" tIns="0" rIns="0" bIns="0" rtlCol="0" anchor="t"/>
+          <a:lstStyle/>
+          <a:p>
+            <a:pPr marL="0" indent="0" algn="l">
+              <a:lnSpc>
+                <a:spcPts val="1900"/>
+              </a:lnSpc>
+              <a:buNone/>
+            </a:pPr>
+            <a:r>
+              <a:rPr lang="en-US" sz="1500" b="1" dirty="0">
+                <a:solidFill>
+                  <a:srgbClr val="000000"/>
+                </a:solidFill>
+                <a:latin typeface="Inter Bold" pitchFamily="34" charset="0"/>
+                <a:ea typeface="Inter Bold" pitchFamily="34" charset="-122"/>
+                <a:cs typeface="Inter Bold" pitchFamily="34" charset="-120"/>
+              </a:rPr>
+              <a:t>Practicing Nurse with 5 years of experience gets:</a:t>
+            </a:r>
+            <a:endParaRPr lang="en-US" sz="1500" dirty="0"/>
+          </a:p>
+        </p:txBody>
+      </p:sp>
+      <p:sp>
+        <p:nvSpPr>
+          <p:cNvPr id="12" name="Text 10"/>
+          <p:cNvSpPr/>
+          <p:nvPr/>
+        </p:nvSpPr>
+        <p:spPr>
+          <a:xfrm>
+            <a:off x="7556421" y="2982992"/>
+            <a:ext cx="5102662" cy="842010"/>
+          </a:xfrm>
+          <a:prstGeom prst="rect">
+            <a:avLst/>
+          </a:prstGeom>
+          <a:noFill/>
+          <a:ln/>
+        </p:spPr>
+        <p:txBody>
+          <a:bodyPr wrap="square" lIns="0" tIns="0" rIns="0" bIns="0" rtlCol="0" anchor="t"/>
+          <a:lstStyle/>
+          <a:p>
             <a:pPr marL="0" indent="0" algn="l">
               <a:lnSpc>
                 <a:spcPts val="1650"/>
@@ -10062,120 +17181,7 @@
                 <a:ea typeface="Inter" pitchFamily="34" charset="-122"/>
                 <a:cs typeface="Inter" pitchFamily="34" charset="-120"/>
               </a:rPr>
-              <a:t>"Withdrawal is uncomfortable but not life-threatening. Common symptoms include body aches, sweating, and anxiety. Your role is to provide comfort measures and monitor vital signs. The physician will prescribe medications."</a:t>
-            </a:r>
-            <a:endParaRPr lang="en-US" sz="1200" dirty="0"/>
-          </a:p>
-        </p:txBody>
-      </p:sp>
-      <p:sp>
-        <p:nvSpPr>
-          <p:cNvPr id="10" name="Shape 8"/>
-          <p:cNvSpPr/>
-          <p:nvPr/>
-        </p:nvSpPr>
-        <p:spPr>
-          <a:xfrm>
-            <a:off x="7400568" y="2525078"/>
-            <a:ext cx="5414367" cy="1396365"/>
-          </a:xfrm>
-          <a:prstGeom prst="roundRect">
-            <a:avLst>
-              <a:gd name="adj" fmla="val 8041"/>
-            </a:avLst>
-          </a:prstGeom>
-          <a:solidFill>
-            <a:srgbClr val="F5FBF6"/>
-          </a:solidFill>
-          <a:ln/>
-        </p:spPr>
-        <p:txBody>
-          <a:bodyPr/>
-          <a:lstStyle/>
-          <a:p>
-            <a:endParaRPr lang="en-US"/>
-          </a:p>
-        </p:txBody>
-      </p:sp>
-      <p:sp>
-        <p:nvSpPr>
-          <p:cNvPr id="11" name="Text 9"/>
-          <p:cNvSpPr/>
-          <p:nvPr/>
-        </p:nvSpPr>
-        <p:spPr>
-          <a:xfrm>
-            <a:off x="7556421" y="2632234"/>
-            <a:ext cx="4452580" cy="243602"/>
-          </a:xfrm>
-          <a:prstGeom prst="rect">
-            <a:avLst/>
-          </a:prstGeom>
-          <a:noFill/>
-          <a:ln/>
-        </p:spPr>
-        <p:txBody>
-          <a:bodyPr wrap="none" lIns="0" tIns="0" rIns="0" bIns="0" rtlCol="0" anchor="t"/>
-          <a:lstStyle/>
-          <a:p>
-            <a:pPr marL="0" indent="0" algn="l">
-              <a:lnSpc>
-                <a:spcPts val="1900"/>
-              </a:lnSpc>
-              <a:buNone/>
-            </a:pPr>
-            <a:r>
-              <a:rPr lang="en-US" sz="1500" b="1" dirty="0">
-                <a:solidFill>
-                  <a:srgbClr val="000000"/>
-                </a:solidFill>
-                <a:latin typeface="Inter Bold" pitchFamily="34" charset="0"/>
-                <a:ea typeface="Inter Bold" pitchFamily="34" charset="-122"/>
-                <a:cs typeface="Inter Bold" pitchFamily="34" charset="-120"/>
-              </a:rPr>
-              <a:t>Practicing PA with 10 years of experience gets:</a:t>
-            </a:r>
-            <a:endParaRPr lang="en-US" sz="1500" dirty="0"/>
-          </a:p>
-        </p:txBody>
-      </p:sp>
-      <p:sp>
-        <p:nvSpPr>
-          <p:cNvPr id="12" name="Text 10"/>
-          <p:cNvSpPr/>
-          <p:nvPr/>
-        </p:nvSpPr>
-        <p:spPr>
-          <a:xfrm>
-            <a:off x="7556421" y="2982992"/>
-            <a:ext cx="5102662" cy="842010"/>
-          </a:xfrm>
-          <a:prstGeom prst="rect">
-            <a:avLst/>
-          </a:prstGeom>
-          <a:noFill/>
-          <a:ln/>
-        </p:spPr>
-        <p:txBody>
-          <a:bodyPr wrap="square" lIns="0" tIns="0" rIns="0" bIns="0" rtlCol="0" anchor="t"/>
-          <a:lstStyle/>
-          <a:p>
-            <a:pPr marL="0" indent="0" algn="l">
-              <a:lnSpc>
-                <a:spcPts val="1650"/>
-              </a:lnSpc>
-              <a:buNone/>
-            </a:pPr>
-            <a:r>
-              <a:rPr lang="en-US" sz="1200" dirty="0">
-                <a:solidFill>
-                  <a:srgbClr val="272525"/>
-                </a:solidFill>
-                <a:latin typeface="Inter" pitchFamily="34" charset="0"/>
-                <a:ea typeface="Inter" pitchFamily="34" charset="-122"/>
-                <a:cs typeface="Inter" pitchFamily="34" charset="-120"/>
-              </a:rPr>
-              <a:t>"Acute withdrawal management: consider buprenorphine induction (2-4 mg sublingual) or clonidine for sympathomimetic symptoms. Monitor for dehydration and electrolyte imbalance. Refer to addiction medicine if complex comorbidities present."</a:t>
+              <a:t>”watching for recurrent hypoventilation, aspiration, and polysubstance effects given the benzodiazepine screen.”</a:t>
             </a:r>
             <a:endParaRPr lang="en-US" sz="1200" dirty="0"/>
           </a:p>
@@ -10798,6 +17804,9 @@
   <p:clrMapOvr>
     <a:masterClrMapping/>
   </p:clrMapOvr>
+  <p:transition>
+    <p:fade/>
+  </p:transition>
 </p:sld>
 </file>
 
